--- a/2024/2024-04-12-AI-Updates.pptx
+++ b/2024/2024-04-12-AI-Updates.pptx
@@ -2,10 +2,10 @@
 <file path=ppt/presentation.xml><?xml version="1.0" encoding="utf-8"?>
 <p:presentation xmlns:a="http://schemas.openxmlformats.org/drawingml/2006/main" xmlns:r="http://schemas.openxmlformats.org/officeDocument/2006/relationships" xmlns:p="http://schemas.openxmlformats.org/presentationml/2006/main" strictFirstAndLastChars="0" embedTrueTypeFonts="1" saveSubsetFonts="1" autoCompressPictures="0">
   <p:sldMasterIdLst>
-    <p:sldMasterId id="2147483659" r:id="rId1"/>
+    <p:sldMasterId id="2147483660" r:id="rId1"/>
   </p:sldMasterIdLst>
   <p:notesMasterIdLst>
-    <p:notesMasterId r:id="rId23"/>
+    <p:notesMasterId r:id="rId24"/>
   </p:notesMasterIdLst>
   <p:sldIdLst>
     <p:sldId id="256" r:id="rId2"/>
@@ -29,16 +29,17 @@
     <p:sldId id="274" r:id="rId20"/>
     <p:sldId id="275" r:id="rId21"/>
     <p:sldId id="276" r:id="rId22"/>
+    <p:sldId id="277" r:id="rId23"/>
   </p:sldIdLst>
   <p:sldSz cx="9144000" cy="5143500" type="screen16x9"/>
   <p:notesSz cx="6858000" cy="9144000"/>
   <p:embeddedFontLst>
     <p:embeddedFont>
       <p:font typeface="Roboto Mono" pitchFamily="49" charset="0"/>
-      <p:regular r:id="rId24"/>
-      <p:bold r:id="rId25"/>
-      <p:italic r:id="rId26"/>
-      <p:boldItalic r:id="rId27"/>
+      <p:regular r:id="rId25"/>
+      <p:bold r:id="rId26"/>
+      <p:italic r:id="rId27"/>
+      <p:boldItalic r:id="rId28"/>
     </p:embeddedFont>
   </p:embeddedFontLst>
   <p:defaultTextStyle>
@@ -857,7 +858,7 @@
   <p:cSld>
     <p:spTree>
       <p:nvGrpSpPr>
-        <p:cNvPr id="1" name="Shape 50"/>
+        <p:cNvPr id="1" name="Shape 53"/>
         <p:cNvGrpSpPr/>
         <p:nvPr/>
       </p:nvGrpSpPr>
@@ -871,7 +872,7 @@
       </p:grpSpPr>
       <p:sp>
         <p:nvSpPr>
-          <p:cNvPr id="51" name="Google Shape;51;p1:notes"/>
+          <p:cNvPr id="54" name="Google Shape;54;p1:notes"/>
           <p:cNvSpPr>
             <a:spLocks noGrp="1" noRot="1" noChangeAspect="1"/>
           </p:cNvSpPr>
@@ -922,7 +923,7 @@
       </p:sp>
       <p:sp>
         <p:nvSpPr>
-          <p:cNvPr id="52" name="Google Shape;52;p1:notes"/>
+          <p:cNvPr id="55" name="Google Shape;55;p1:notes"/>
           <p:cNvSpPr txBox="1">
             <a:spLocks noGrp="1"/>
           </p:cNvSpPr>
@@ -979,7 +980,7 @@
   <p:cSld>
     <p:spTree>
       <p:nvGrpSpPr>
-        <p:cNvPr id="1" name="Shape 170"/>
+        <p:cNvPr id="1" name="Shape 173"/>
         <p:cNvGrpSpPr/>
         <p:nvPr/>
       </p:nvGrpSpPr>
@@ -993,7 +994,7 @@
       </p:grpSpPr>
       <p:sp>
         <p:nvSpPr>
-          <p:cNvPr id="171" name="Google Shape;171;g2cb65d971b0_0_20:notes"/>
+          <p:cNvPr id="174" name="Google Shape;174;g2cb65d971b0_0_20:notes"/>
           <p:cNvSpPr>
             <a:spLocks noGrp="1" noRot="1" noChangeAspect="1"/>
           </p:cNvSpPr>
@@ -1044,7 +1045,7 @@
       </p:sp>
       <p:sp>
         <p:nvSpPr>
-          <p:cNvPr id="172" name="Google Shape;172;g2cb65d971b0_0_20:notes"/>
+          <p:cNvPr id="175" name="Google Shape;175;g2cb65d971b0_0_20:notes"/>
           <p:cNvSpPr txBox="1">
             <a:spLocks noGrp="1"/>
           </p:cNvSpPr>
@@ -1101,7 +1102,7 @@
   <p:cSld>
     <p:spTree>
       <p:nvGrpSpPr>
-        <p:cNvPr id="1" name="Shape 183"/>
+        <p:cNvPr id="1" name="Shape 186"/>
         <p:cNvGrpSpPr/>
         <p:nvPr/>
       </p:nvGrpSpPr>
@@ -1115,7 +1116,7 @@
       </p:grpSpPr>
       <p:sp>
         <p:nvSpPr>
-          <p:cNvPr id="184" name="Google Shape;184;g2cb017cd3f3_0_0:notes"/>
+          <p:cNvPr id="187" name="Google Shape;187;g2cb017cd3f3_0_0:notes"/>
           <p:cNvSpPr>
             <a:spLocks noGrp="1" noRot="1" noChangeAspect="1"/>
           </p:cNvSpPr>
@@ -1166,7 +1167,7 @@
       </p:sp>
       <p:sp>
         <p:nvSpPr>
-          <p:cNvPr id="185" name="Google Shape;185;g2cb017cd3f3_0_0:notes"/>
+          <p:cNvPr id="188" name="Google Shape;188;g2cb017cd3f3_0_0:notes"/>
           <p:cNvSpPr txBox="1">
             <a:spLocks noGrp="1"/>
           </p:cNvSpPr>
@@ -1223,7 +1224,7 @@
   <p:cSld>
     <p:spTree>
       <p:nvGrpSpPr>
-        <p:cNvPr id="1" name="Shape 190"/>
+        <p:cNvPr id="1" name="Shape 193"/>
         <p:cNvGrpSpPr/>
         <p:nvPr/>
       </p:nvGrpSpPr>
@@ -1237,7 +1238,7 @@
       </p:grpSpPr>
       <p:sp>
         <p:nvSpPr>
-          <p:cNvPr id="191" name="Google Shape;191;g2ca5a11b978_0_8:notes"/>
+          <p:cNvPr id="194" name="Google Shape;194;g2ca5a11b978_0_8:notes"/>
           <p:cNvSpPr>
             <a:spLocks noGrp="1" noRot="1" noChangeAspect="1"/>
           </p:cNvSpPr>
@@ -1288,7 +1289,7 @@
       </p:sp>
       <p:sp>
         <p:nvSpPr>
-          <p:cNvPr id="192" name="Google Shape;192;g2ca5a11b978_0_8:notes"/>
+          <p:cNvPr id="195" name="Google Shape;195;g2ca5a11b978_0_8:notes"/>
           <p:cNvSpPr txBox="1">
             <a:spLocks noGrp="1"/>
           </p:cNvSpPr>
@@ -1345,7 +1346,7 @@
   <p:cSld>
     <p:spTree>
       <p:nvGrpSpPr>
-        <p:cNvPr id="1" name="Shape 198"/>
+        <p:cNvPr id="1" name="Shape 201"/>
         <p:cNvGrpSpPr/>
         <p:nvPr/>
       </p:nvGrpSpPr>
@@ -1359,7 +1360,7 @@
       </p:grpSpPr>
       <p:sp>
         <p:nvSpPr>
-          <p:cNvPr id="199" name="Google Shape;199;g2cb01867ce5_0_1:notes"/>
+          <p:cNvPr id="202" name="Google Shape;202;g2cb01867ce5_0_1:notes"/>
           <p:cNvSpPr>
             <a:spLocks noGrp="1" noRot="1" noChangeAspect="1"/>
           </p:cNvSpPr>
@@ -1410,7 +1411,7 @@
       </p:sp>
       <p:sp>
         <p:nvSpPr>
-          <p:cNvPr id="200" name="Google Shape;200;g2cb01867ce5_0_1:notes"/>
+          <p:cNvPr id="203" name="Google Shape;203;g2cb01867ce5_0_1:notes"/>
           <p:cNvSpPr txBox="1">
             <a:spLocks noGrp="1"/>
           </p:cNvSpPr>
@@ -1467,7 +1468,7 @@
   <p:cSld>
     <p:spTree>
       <p:nvGrpSpPr>
-        <p:cNvPr id="1" name="Shape 206"/>
+        <p:cNvPr id="1" name="Shape 209"/>
         <p:cNvGrpSpPr/>
         <p:nvPr/>
       </p:nvGrpSpPr>
@@ -1481,7 +1482,7 @@
       </p:grpSpPr>
       <p:sp>
         <p:nvSpPr>
-          <p:cNvPr id="207" name="Google Shape;207;g2cb6ea0db93_1_0:notes"/>
+          <p:cNvPr id="210" name="Google Shape;210;g2cb6ea0db93_1_0:notes"/>
           <p:cNvSpPr>
             <a:spLocks noGrp="1" noRot="1" noChangeAspect="1"/>
           </p:cNvSpPr>
@@ -1532,7 +1533,7 @@
       </p:sp>
       <p:sp>
         <p:nvSpPr>
-          <p:cNvPr id="208" name="Google Shape;208;g2cb6ea0db93_1_0:notes"/>
+          <p:cNvPr id="211" name="Google Shape;211;g2cb6ea0db93_1_0:notes"/>
           <p:cNvSpPr txBox="1">
             <a:spLocks noGrp="1"/>
           </p:cNvSpPr>
@@ -1589,7 +1590,7 @@
   <p:cSld>
     <p:spTree>
       <p:nvGrpSpPr>
-        <p:cNvPr id="1" name="Shape 213"/>
+        <p:cNvPr id="1" name="Shape 217"/>
         <p:cNvGrpSpPr/>
         <p:nvPr/>
       </p:nvGrpSpPr>
@@ -1603,7 +1604,7 @@
       </p:grpSpPr>
       <p:sp>
         <p:nvSpPr>
-          <p:cNvPr id="214" name="Google Shape;214;g2cb65d971b0_0_0:notes"/>
+          <p:cNvPr id="218" name="Google Shape;218;g2cbb9863d42_0_0:notes"/>
           <p:cNvSpPr>
             <a:spLocks noGrp="1" noRot="1" noChangeAspect="1"/>
           </p:cNvSpPr>
@@ -1654,7 +1655,7 @@
       </p:sp>
       <p:sp>
         <p:nvSpPr>
-          <p:cNvPr id="215" name="Google Shape;215;g2cb65d971b0_0_0:notes"/>
+          <p:cNvPr id="219" name="Google Shape;219;g2cbb9863d42_0_0:notes"/>
           <p:cNvSpPr txBox="1">
             <a:spLocks noGrp="1"/>
           </p:cNvSpPr>
@@ -1711,7 +1712,7 @@
   <p:cSld>
     <p:spTree>
       <p:nvGrpSpPr>
-        <p:cNvPr id="1" name="Shape 222"/>
+        <p:cNvPr id="1" name="Shape 239"/>
         <p:cNvGrpSpPr/>
         <p:nvPr/>
       </p:nvGrpSpPr>
@@ -1725,7 +1726,7 @@
       </p:grpSpPr>
       <p:sp>
         <p:nvSpPr>
-          <p:cNvPr id="223" name="Google Shape;223;g2c9ea90b5da_0_0:notes"/>
+          <p:cNvPr id="240" name="Google Shape;240;g2cb65d971b0_0_0:notes"/>
           <p:cNvSpPr>
             <a:spLocks noGrp="1" noRot="1" noChangeAspect="1"/>
           </p:cNvSpPr>
@@ -1776,7 +1777,7 @@
       </p:sp>
       <p:sp>
         <p:nvSpPr>
-          <p:cNvPr id="224" name="Google Shape;224;g2c9ea90b5da_0_0:notes"/>
+          <p:cNvPr id="241" name="Google Shape;241;g2cb65d971b0_0_0:notes"/>
           <p:cNvSpPr txBox="1">
             <a:spLocks noGrp="1"/>
           </p:cNvSpPr>
@@ -1833,7 +1834,7 @@
   <p:cSld>
     <p:spTree>
       <p:nvGrpSpPr>
-        <p:cNvPr id="1" name="Shape 229"/>
+        <p:cNvPr id="1" name="Shape 248"/>
         <p:cNvGrpSpPr/>
         <p:nvPr/>
       </p:nvGrpSpPr>
@@ -1847,7 +1848,7 @@
       </p:grpSpPr>
       <p:sp>
         <p:nvSpPr>
-          <p:cNvPr id="230" name="Google Shape;230;g2cb7d82b688_1_0:notes"/>
+          <p:cNvPr id="249" name="Google Shape;249;g2c9ea90b5da_0_0:notes"/>
           <p:cNvSpPr>
             <a:spLocks noGrp="1" noRot="1" noChangeAspect="1"/>
           </p:cNvSpPr>
@@ -1898,7 +1899,7 @@
       </p:sp>
       <p:sp>
         <p:nvSpPr>
-          <p:cNvPr id="231" name="Google Shape;231;g2cb7d82b688_1_0:notes"/>
+          <p:cNvPr id="250" name="Google Shape;250;g2c9ea90b5da_0_0:notes"/>
           <p:cNvSpPr txBox="1">
             <a:spLocks noGrp="1"/>
           </p:cNvSpPr>
@@ -1955,7 +1956,7 @@
   <p:cSld>
     <p:spTree>
       <p:nvGrpSpPr>
-        <p:cNvPr id="1" name="Shape 241"/>
+        <p:cNvPr id="1" name="Shape 255"/>
         <p:cNvGrpSpPr/>
         <p:nvPr/>
       </p:nvGrpSpPr>
@@ -1969,7 +1970,7 @@
       </p:grpSpPr>
       <p:sp>
         <p:nvSpPr>
-          <p:cNvPr id="242" name="Google Shape;242;p20:notes"/>
+          <p:cNvPr id="256" name="Google Shape;256;g2cb7d82b688_1_0:notes"/>
           <p:cNvSpPr>
             <a:spLocks noGrp="1" noRot="1" noChangeAspect="1"/>
           </p:cNvSpPr>
@@ -2020,7 +2021,7 @@
       </p:sp>
       <p:sp>
         <p:nvSpPr>
-          <p:cNvPr id="243" name="Google Shape;243;p20:notes"/>
+          <p:cNvPr id="257" name="Google Shape;257;g2cb7d82b688_1_0:notes"/>
           <p:cNvSpPr txBox="1">
             <a:spLocks noGrp="1"/>
           </p:cNvSpPr>
@@ -2077,7 +2078,7 @@
   <p:cSld>
     <p:spTree>
       <p:nvGrpSpPr>
-        <p:cNvPr id="1" name="Shape 258"/>
+        <p:cNvPr id="1" name="Shape 267"/>
         <p:cNvGrpSpPr/>
         <p:nvPr/>
       </p:nvGrpSpPr>
@@ -2091,7 +2092,7 @@
       </p:grpSpPr>
       <p:sp>
         <p:nvSpPr>
-          <p:cNvPr id="259" name="Google Shape;259;p21:notes"/>
+          <p:cNvPr id="268" name="Google Shape;268;p20:notes"/>
           <p:cNvSpPr>
             <a:spLocks noGrp="1" noRot="1" noChangeAspect="1"/>
           </p:cNvSpPr>
@@ -2142,7 +2143,7 @@
       </p:sp>
       <p:sp>
         <p:nvSpPr>
-          <p:cNvPr id="260" name="Google Shape;260;p21:notes"/>
+          <p:cNvPr id="269" name="Google Shape;269;p20:notes"/>
           <p:cNvSpPr txBox="1">
             <a:spLocks noGrp="1"/>
           </p:cNvSpPr>
@@ -2199,7 +2200,7 @@
   <p:cSld>
     <p:spTree>
       <p:nvGrpSpPr>
-        <p:cNvPr id="1" name="Shape 57"/>
+        <p:cNvPr id="1" name="Shape 60"/>
         <p:cNvGrpSpPr/>
         <p:nvPr/>
       </p:nvGrpSpPr>
@@ -2213,7 +2214,7 @@
       </p:grpSpPr>
       <p:sp>
         <p:nvSpPr>
-          <p:cNvPr id="58" name="Google Shape;58;g2cba00691e4_0_75:notes"/>
+          <p:cNvPr id="61" name="Google Shape;61;g2cba00691e4_0_75:notes"/>
           <p:cNvSpPr>
             <a:spLocks noGrp="1" noRot="1" noChangeAspect="1"/>
           </p:cNvSpPr>
@@ -2264,7 +2265,7 @@
       </p:sp>
       <p:sp>
         <p:nvSpPr>
-          <p:cNvPr id="59" name="Google Shape;59;g2cba00691e4_0_75:notes"/>
+          <p:cNvPr id="62" name="Google Shape;62;g2cba00691e4_0_75:notes"/>
           <p:cNvSpPr txBox="1">
             <a:spLocks noGrp="1"/>
           </p:cNvSpPr>
@@ -2321,7 +2322,7 @@
   <p:cSld>
     <p:spTree>
       <p:nvGrpSpPr>
-        <p:cNvPr id="1" name="Shape 268"/>
+        <p:cNvPr id="1" name="Shape 284"/>
         <p:cNvGrpSpPr/>
         <p:nvPr/>
       </p:nvGrpSpPr>
@@ -2335,7 +2336,129 @@
       </p:grpSpPr>
       <p:sp>
         <p:nvSpPr>
-          <p:cNvPr id="269" name="Google Shape;269;p22:notes"/>
+          <p:cNvPr id="285" name="Google Shape;285;p21:notes"/>
+          <p:cNvSpPr>
+            <a:spLocks noGrp="1" noRot="1" noChangeAspect="1"/>
+          </p:cNvSpPr>
+          <p:nvPr>
+            <p:ph type="sldImg" idx="2"/>
+          </p:nvPr>
+        </p:nvSpPr>
+        <p:spPr>
+          <a:xfrm>
+            <a:off x="381300" y="685800"/>
+            <a:ext cx="6096000" cy="3429000"/>
+          </a:xfrm>
+          <a:custGeom>
+            <a:avLst/>
+            <a:gdLst/>
+            <a:ahLst/>
+            <a:cxnLst/>
+            <a:rect l="l" t="t" r="r" b="b"/>
+            <a:pathLst>
+              <a:path w="120000" h="120000" extrusionOk="0">
+                <a:moveTo>
+                  <a:pt x="0" y="0"/>
+                </a:moveTo>
+                <a:lnTo>
+                  <a:pt x="120000" y="0"/>
+                </a:lnTo>
+                <a:lnTo>
+                  <a:pt x="120000" y="120000"/>
+                </a:lnTo>
+                <a:lnTo>
+                  <a:pt x="0" y="120000"/>
+                </a:lnTo>
+                <a:close/>
+              </a:path>
+            </a:pathLst>
+          </a:custGeom>
+          <a:noFill/>
+          <a:ln w="9525" cap="flat" cmpd="sng">
+            <a:solidFill>
+              <a:srgbClr val="000000"/>
+            </a:solidFill>
+            <a:prstDash val="solid"/>
+            <a:round/>
+            <a:headEnd type="none" w="sm" len="sm"/>
+            <a:tailEnd type="none" w="sm" len="sm"/>
+          </a:ln>
+        </p:spPr>
+      </p:sp>
+      <p:sp>
+        <p:nvSpPr>
+          <p:cNvPr id="286" name="Google Shape;286;p21:notes"/>
+          <p:cNvSpPr txBox="1">
+            <a:spLocks noGrp="1"/>
+          </p:cNvSpPr>
+          <p:nvPr>
+            <p:ph type="body" idx="1"/>
+          </p:nvPr>
+        </p:nvSpPr>
+        <p:spPr>
+          <a:xfrm>
+            <a:off x="685800" y="4343400"/>
+            <a:ext cx="5486400" cy="4114800"/>
+          </a:xfrm>
+          <a:prstGeom prst="rect">
+            <a:avLst/>
+          </a:prstGeom>
+          <a:noFill/>
+          <a:ln>
+            <a:noFill/>
+          </a:ln>
+        </p:spPr>
+        <p:txBody>
+          <a:bodyPr spcFirstLastPara="1" wrap="square" lIns="91425" tIns="91425" rIns="91425" bIns="91425" anchor="t" anchorCtr="0">
+            <a:noAutofit/>
+          </a:bodyPr>
+          <a:lstStyle/>
+          <a:p>
+            <a:pPr marL="0" lvl="0" indent="0" algn="l" rtl="0">
+              <a:lnSpc>
+                <a:spcPct val="100000"/>
+              </a:lnSpc>
+              <a:spcBef>
+                <a:spcPts val="0"/>
+              </a:spcBef>
+              <a:spcAft>
+                <a:spcPts val="0"/>
+              </a:spcAft>
+              <a:buSzPts val="1100"/>
+              <a:buNone/>
+            </a:pPr>
+            <a:endParaRPr/>
+          </a:p>
+        </p:txBody>
+      </p:sp>
+    </p:spTree>
+  </p:cSld>
+  <p:clrMapOvr>
+    <a:masterClrMapping/>
+  </p:clrMapOvr>
+</p:notes>
+</file>
+
+<file path=ppt/notesSlides/notesSlide21.xml><?xml version="1.0" encoding="utf-8"?>
+<p:notes xmlns:a="http://schemas.openxmlformats.org/drawingml/2006/main" xmlns:r="http://schemas.openxmlformats.org/officeDocument/2006/relationships" xmlns:p="http://schemas.openxmlformats.org/presentationml/2006/main" showMasterSp="0" showMasterPhAnim="0">
+  <p:cSld>
+    <p:spTree>
+      <p:nvGrpSpPr>
+        <p:cNvPr id="1" name="Shape 294"/>
+        <p:cNvGrpSpPr/>
+        <p:nvPr/>
+      </p:nvGrpSpPr>
+      <p:grpSpPr>
+        <a:xfrm>
+          <a:off x="0" y="0"/>
+          <a:ext cx="0" cy="0"/>
+          <a:chOff x="0" y="0"/>
+          <a:chExt cx="0" cy="0"/>
+        </a:xfrm>
+      </p:grpSpPr>
+      <p:sp>
+        <p:nvSpPr>
+          <p:cNvPr id="295" name="Google Shape;295;p22:notes"/>
           <p:cNvSpPr>
             <a:spLocks noGrp="1" noRot="1" noChangeAspect="1"/>
           </p:cNvSpPr>
@@ -2386,7 +2509,7 @@
       </p:sp>
       <p:sp>
         <p:nvSpPr>
-          <p:cNvPr id="270" name="Google Shape;270;p22:notes"/>
+          <p:cNvPr id="296" name="Google Shape;296;p22:notes"/>
           <p:cNvSpPr txBox="1">
             <a:spLocks noGrp="1"/>
           </p:cNvSpPr>
@@ -2438,12 +2561,12 @@
 </p:notes>
 </file>
 
-<file path=ppt/notesSlides/notesSlide21.xml><?xml version="1.0" encoding="utf-8"?>
+<file path=ppt/notesSlides/notesSlide22.xml><?xml version="1.0" encoding="utf-8"?>
 <p:notes xmlns:a="http://schemas.openxmlformats.org/drawingml/2006/main" xmlns:r="http://schemas.openxmlformats.org/officeDocument/2006/relationships" xmlns:p="http://schemas.openxmlformats.org/presentationml/2006/main" showMasterSp="0" showMasterPhAnim="0">
   <p:cSld>
     <p:spTree>
       <p:nvGrpSpPr>
-        <p:cNvPr id="1" name="Shape 278"/>
+        <p:cNvPr id="1" name="Shape 304"/>
         <p:cNvGrpSpPr/>
         <p:nvPr/>
       </p:nvGrpSpPr>
@@ -2457,7 +2580,7 @@
       </p:grpSpPr>
       <p:sp>
         <p:nvSpPr>
-          <p:cNvPr id="279" name="Google Shape;279;p23:notes"/>
+          <p:cNvPr id="305" name="Google Shape;305;p23:notes"/>
           <p:cNvSpPr>
             <a:spLocks noGrp="1" noRot="1" noChangeAspect="1"/>
           </p:cNvSpPr>
@@ -2508,7 +2631,7 @@
       </p:sp>
       <p:sp>
         <p:nvSpPr>
-          <p:cNvPr id="280" name="Google Shape;280;p23:notes"/>
+          <p:cNvPr id="306" name="Google Shape;306;p23:notes"/>
           <p:cNvSpPr txBox="1">
             <a:spLocks noGrp="1"/>
           </p:cNvSpPr>
@@ -2565,7 +2688,7 @@
   <p:cSld>
     <p:spTree>
       <p:nvGrpSpPr>
-        <p:cNvPr id="1" name="Shape 66"/>
+        <p:cNvPr id="1" name="Shape 69"/>
         <p:cNvGrpSpPr/>
         <p:nvPr/>
       </p:nvGrpSpPr>
@@ -2579,7 +2702,7 @@
       </p:grpSpPr>
       <p:sp>
         <p:nvSpPr>
-          <p:cNvPr id="67" name="Google Shape;67;g1f5417c9c71_0_26:notes"/>
+          <p:cNvPr id="70" name="Google Shape;70;g1f5417c9c71_0_26:notes"/>
           <p:cNvSpPr>
             <a:spLocks noGrp="1" noRot="1" noChangeAspect="1"/>
           </p:cNvSpPr>
@@ -2630,7 +2753,7 @@
       </p:sp>
       <p:sp>
         <p:nvSpPr>
-          <p:cNvPr id="68" name="Google Shape;68;g1f5417c9c71_0_26:notes"/>
+          <p:cNvPr id="71" name="Google Shape;71;g1f5417c9c71_0_26:notes"/>
           <p:cNvSpPr txBox="1">
             <a:spLocks noGrp="1"/>
           </p:cNvSpPr>
@@ -2687,7 +2810,7 @@
   <p:cSld>
     <p:spTree>
       <p:nvGrpSpPr>
-        <p:cNvPr id="1" name="Shape 90"/>
+        <p:cNvPr id="1" name="Shape 93"/>
         <p:cNvGrpSpPr/>
         <p:nvPr/>
       </p:nvGrpSpPr>
@@ -2701,7 +2824,7 @@
       </p:grpSpPr>
       <p:sp>
         <p:nvSpPr>
-          <p:cNvPr id="91" name="Google Shape;91;g2cb01868c32_0_0:notes"/>
+          <p:cNvPr id="94" name="Google Shape;94;g2cb01868c32_0_0:notes"/>
           <p:cNvSpPr>
             <a:spLocks noGrp="1" noRot="1" noChangeAspect="1"/>
           </p:cNvSpPr>
@@ -2752,7 +2875,7 @@
       </p:sp>
       <p:sp>
         <p:nvSpPr>
-          <p:cNvPr id="92" name="Google Shape;92;g2cb01868c32_0_0:notes"/>
+          <p:cNvPr id="95" name="Google Shape;95;g2cb01868c32_0_0:notes"/>
           <p:cNvSpPr txBox="1">
             <a:spLocks noGrp="1"/>
           </p:cNvSpPr>
@@ -2809,7 +2932,7 @@
   <p:cSld>
     <p:spTree>
       <p:nvGrpSpPr>
-        <p:cNvPr id="1" name="Shape 104"/>
+        <p:cNvPr id="1" name="Shape 107"/>
         <p:cNvGrpSpPr/>
         <p:nvPr/>
       </p:nvGrpSpPr>
@@ -2823,7 +2946,7 @@
       </p:grpSpPr>
       <p:sp>
         <p:nvSpPr>
-          <p:cNvPr id="105" name="Google Shape;105;g2cb5e50a2fd_0_0:notes"/>
+          <p:cNvPr id="108" name="Google Shape;108;g2cb5e50a2fd_0_0:notes"/>
           <p:cNvSpPr>
             <a:spLocks noGrp="1" noRot="1" noChangeAspect="1"/>
           </p:cNvSpPr>
@@ -2874,7 +2997,7 @@
       </p:sp>
       <p:sp>
         <p:nvSpPr>
-          <p:cNvPr id="106" name="Google Shape;106;g2cb5e50a2fd_0_0:notes"/>
+          <p:cNvPr id="109" name="Google Shape;109;g2cb5e50a2fd_0_0:notes"/>
           <p:cNvSpPr txBox="1">
             <a:spLocks noGrp="1"/>
           </p:cNvSpPr>
@@ -2931,7 +3054,7 @@
   <p:cSld>
     <p:spTree>
       <p:nvGrpSpPr>
-        <p:cNvPr id="1" name="Shape 117"/>
+        <p:cNvPr id="1" name="Shape 120"/>
         <p:cNvGrpSpPr/>
         <p:nvPr/>
       </p:nvGrpSpPr>
@@ -2945,7 +3068,7 @@
       </p:grpSpPr>
       <p:sp>
         <p:nvSpPr>
-          <p:cNvPr id="118" name="Google Shape;118;g2cb5e50a2fd_1_0:notes"/>
+          <p:cNvPr id="121" name="Google Shape;121;g2cb5e50a2fd_1_0:notes"/>
           <p:cNvSpPr>
             <a:spLocks noGrp="1" noRot="1" noChangeAspect="1"/>
           </p:cNvSpPr>
@@ -2996,7 +3119,7 @@
       </p:sp>
       <p:sp>
         <p:nvSpPr>
-          <p:cNvPr id="119" name="Google Shape;119;g2cb5e50a2fd_1_0:notes"/>
+          <p:cNvPr id="122" name="Google Shape;122;g2cb5e50a2fd_1_0:notes"/>
           <p:cNvSpPr txBox="1">
             <a:spLocks noGrp="1"/>
           </p:cNvSpPr>
@@ -3053,7 +3176,7 @@
   <p:cSld>
     <p:spTree>
       <p:nvGrpSpPr>
-        <p:cNvPr id="1" name="Shape 128"/>
+        <p:cNvPr id="1" name="Shape 131"/>
         <p:cNvGrpSpPr/>
         <p:nvPr/>
       </p:nvGrpSpPr>
@@ -3067,129 +3190,7 @@
       </p:grpSpPr>
       <p:sp>
         <p:nvSpPr>
-          <p:cNvPr id="129" name="Google Shape;129;g2ca5a11b978_0_19:notes"/>
-          <p:cNvSpPr>
-            <a:spLocks noGrp="1" noRot="1" noChangeAspect="1"/>
-          </p:cNvSpPr>
-          <p:nvPr>
-            <p:ph type="sldImg" idx="2"/>
-          </p:nvPr>
-        </p:nvSpPr>
-        <p:spPr>
-          <a:xfrm>
-            <a:off x="381000" y="685800"/>
-            <a:ext cx="6096000" cy="3429000"/>
-          </a:xfrm>
-          <a:custGeom>
-            <a:avLst/>
-            <a:gdLst/>
-            <a:ahLst/>
-            <a:cxnLst/>
-            <a:rect l="l" t="t" r="r" b="b"/>
-            <a:pathLst>
-              <a:path w="120000" h="120000" extrusionOk="0">
-                <a:moveTo>
-                  <a:pt x="0" y="0"/>
-                </a:moveTo>
-                <a:lnTo>
-                  <a:pt x="120000" y="0"/>
-                </a:lnTo>
-                <a:lnTo>
-                  <a:pt x="120000" y="120000"/>
-                </a:lnTo>
-                <a:lnTo>
-                  <a:pt x="0" y="120000"/>
-                </a:lnTo>
-                <a:close/>
-              </a:path>
-            </a:pathLst>
-          </a:custGeom>
-          <a:noFill/>
-          <a:ln w="9525" cap="flat" cmpd="sng">
-            <a:solidFill>
-              <a:srgbClr val="000000"/>
-            </a:solidFill>
-            <a:prstDash val="solid"/>
-            <a:round/>
-            <a:headEnd type="none" w="sm" len="sm"/>
-            <a:tailEnd type="none" w="sm" len="sm"/>
-          </a:ln>
-        </p:spPr>
-      </p:sp>
-      <p:sp>
-        <p:nvSpPr>
-          <p:cNvPr id="130" name="Google Shape;130;g2ca5a11b978_0_19:notes"/>
-          <p:cNvSpPr txBox="1">
-            <a:spLocks noGrp="1"/>
-          </p:cNvSpPr>
-          <p:nvPr>
-            <p:ph type="body" idx="1"/>
-          </p:nvPr>
-        </p:nvSpPr>
-        <p:spPr>
-          <a:xfrm>
-            <a:off x="685800" y="4343400"/>
-            <a:ext cx="5486400" cy="4114800"/>
-          </a:xfrm>
-          <a:prstGeom prst="rect">
-            <a:avLst/>
-          </a:prstGeom>
-          <a:noFill/>
-          <a:ln>
-            <a:noFill/>
-          </a:ln>
-        </p:spPr>
-        <p:txBody>
-          <a:bodyPr spcFirstLastPara="1" wrap="square" lIns="91425" tIns="91425" rIns="91425" bIns="91425" anchor="t" anchorCtr="0">
-            <a:noAutofit/>
-          </a:bodyPr>
-          <a:lstStyle/>
-          <a:p>
-            <a:pPr marL="0" lvl="0" indent="0" algn="l" rtl="0">
-              <a:lnSpc>
-                <a:spcPct val="100000"/>
-              </a:lnSpc>
-              <a:spcBef>
-                <a:spcPts val="0"/>
-              </a:spcBef>
-              <a:spcAft>
-                <a:spcPts val="0"/>
-              </a:spcAft>
-              <a:buSzPts val="1100"/>
-              <a:buNone/>
-            </a:pPr>
-            <a:endParaRPr/>
-          </a:p>
-        </p:txBody>
-      </p:sp>
-    </p:spTree>
-  </p:cSld>
-  <p:clrMapOvr>
-    <a:masterClrMapping/>
-  </p:clrMapOvr>
-</p:notes>
-</file>
-
-<file path=ppt/notesSlides/notesSlide8.xml><?xml version="1.0" encoding="utf-8"?>
-<p:notes xmlns:a="http://schemas.openxmlformats.org/drawingml/2006/main" xmlns:r="http://schemas.openxmlformats.org/officeDocument/2006/relationships" xmlns:p="http://schemas.openxmlformats.org/presentationml/2006/main" showMasterSp="0" showMasterPhAnim="0">
-  <p:cSld>
-    <p:spTree>
-      <p:nvGrpSpPr>
-        <p:cNvPr id="1" name="Shape 141"/>
-        <p:cNvGrpSpPr/>
-        <p:nvPr/>
-      </p:nvGrpSpPr>
-      <p:grpSpPr>
-        <a:xfrm>
-          <a:off x="0" y="0"/>
-          <a:ext cx="0" cy="0"/>
-          <a:chOff x="0" y="0"/>
-          <a:chExt cx="0" cy="0"/>
-        </a:xfrm>
-      </p:grpSpPr>
-      <p:sp>
-        <p:nvSpPr>
-          <p:cNvPr id="142" name="Google Shape;142;g2c9ea90b5da_0_27:notes"/>
+          <p:cNvPr id="132" name="Google Shape;132;g2ca5a11b978_0_19:notes"/>
           <p:cNvSpPr>
             <a:spLocks noGrp="1" noRot="1" noChangeAspect="1"/>
           </p:cNvSpPr>
@@ -3240,7 +3241,7 @@
       </p:sp>
       <p:sp>
         <p:nvSpPr>
-          <p:cNvPr id="143" name="Google Shape;143;g2c9ea90b5da_0_27:notes"/>
+          <p:cNvPr id="133" name="Google Shape;133;g2ca5a11b978_0_19:notes"/>
           <p:cNvSpPr txBox="1">
             <a:spLocks noGrp="1"/>
           </p:cNvSpPr>
@@ -3292,12 +3293,12 @@
 </p:notes>
 </file>
 
-<file path=ppt/notesSlides/notesSlide9.xml><?xml version="1.0" encoding="utf-8"?>
+<file path=ppt/notesSlides/notesSlide8.xml><?xml version="1.0" encoding="utf-8"?>
 <p:notes xmlns:a="http://schemas.openxmlformats.org/drawingml/2006/main" xmlns:r="http://schemas.openxmlformats.org/officeDocument/2006/relationships" xmlns:p="http://schemas.openxmlformats.org/presentationml/2006/main" showMasterSp="0" showMasterPhAnim="0">
   <p:cSld>
     <p:spTree>
       <p:nvGrpSpPr>
-        <p:cNvPr id="1" name="Shape 155"/>
+        <p:cNvPr id="1" name="Shape 144"/>
         <p:cNvGrpSpPr/>
         <p:nvPr/>
       </p:nvGrpSpPr>
@@ -3311,7 +3312,7 @@
       </p:grpSpPr>
       <p:sp>
         <p:nvSpPr>
-          <p:cNvPr id="156" name="Google Shape;156;g2cb01868c32_0_21:notes"/>
+          <p:cNvPr id="145" name="Google Shape;145;g2c9ea90b5da_0_27:notes"/>
           <p:cNvSpPr>
             <a:spLocks noGrp="1" noRot="1" noChangeAspect="1"/>
           </p:cNvSpPr>
@@ -3362,7 +3363,129 @@
       </p:sp>
       <p:sp>
         <p:nvSpPr>
-          <p:cNvPr id="157" name="Google Shape;157;g2cb01868c32_0_21:notes"/>
+          <p:cNvPr id="146" name="Google Shape;146;g2c9ea90b5da_0_27:notes"/>
+          <p:cNvSpPr txBox="1">
+            <a:spLocks noGrp="1"/>
+          </p:cNvSpPr>
+          <p:nvPr>
+            <p:ph type="body" idx="1"/>
+          </p:nvPr>
+        </p:nvSpPr>
+        <p:spPr>
+          <a:xfrm>
+            <a:off x="685800" y="4343400"/>
+            <a:ext cx="5486400" cy="4114800"/>
+          </a:xfrm>
+          <a:prstGeom prst="rect">
+            <a:avLst/>
+          </a:prstGeom>
+          <a:noFill/>
+          <a:ln>
+            <a:noFill/>
+          </a:ln>
+        </p:spPr>
+        <p:txBody>
+          <a:bodyPr spcFirstLastPara="1" wrap="square" lIns="91425" tIns="91425" rIns="91425" bIns="91425" anchor="t" anchorCtr="0">
+            <a:noAutofit/>
+          </a:bodyPr>
+          <a:lstStyle/>
+          <a:p>
+            <a:pPr marL="0" lvl="0" indent="0" algn="l" rtl="0">
+              <a:lnSpc>
+                <a:spcPct val="100000"/>
+              </a:lnSpc>
+              <a:spcBef>
+                <a:spcPts val="0"/>
+              </a:spcBef>
+              <a:spcAft>
+                <a:spcPts val="0"/>
+              </a:spcAft>
+              <a:buSzPts val="1100"/>
+              <a:buNone/>
+            </a:pPr>
+            <a:endParaRPr/>
+          </a:p>
+        </p:txBody>
+      </p:sp>
+    </p:spTree>
+  </p:cSld>
+  <p:clrMapOvr>
+    <a:masterClrMapping/>
+  </p:clrMapOvr>
+</p:notes>
+</file>
+
+<file path=ppt/notesSlides/notesSlide9.xml><?xml version="1.0" encoding="utf-8"?>
+<p:notes xmlns:a="http://schemas.openxmlformats.org/drawingml/2006/main" xmlns:r="http://schemas.openxmlformats.org/officeDocument/2006/relationships" xmlns:p="http://schemas.openxmlformats.org/presentationml/2006/main" showMasterSp="0" showMasterPhAnim="0">
+  <p:cSld>
+    <p:spTree>
+      <p:nvGrpSpPr>
+        <p:cNvPr id="1" name="Shape 158"/>
+        <p:cNvGrpSpPr/>
+        <p:nvPr/>
+      </p:nvGrpSpPr>
+      <p:grpSpPr>
+        <a:xfrm>
+          <a:off x="0" y="0"/>
+          <a:ext cx="0" cy="0"/>
+          <a:chOff x="0" y="0"/>
+          <a:chExt cx="0" cy="0"/>
+        </a:xfrm>
+      </p:grpSpPr>
+      <p:sp>
+        <p:nvSpPr>
+          <p:cNvPr id="159" name="Google Shape;159;g2cb01868c32_0_21:notes"/>
+          <p:cNvSpPr>
+            <a:spLocks noGrp="1" noRot="1" noChangeAspect="1"/>
+          </p:cNvSpPr>
+          <p:nvPr>
+            <p:ph type="sldImg" idx="2"/>
+          </p:nvPr>
+        </p:nvSpPr>
+        <p:spPr>
+          <a:xfrm>
+            <a:off x="381300" y="685800"/>
+            <a:ext cx="6096000" cy="3429000"/>
+          </a:xfrm>
+          <a:custGeom>
+            <a:avLst/>
+            <a:gdLst/>
+            <a:ahLst/>
+            <a:cxnLst/>
+            <a:rect l="l" t="t" r="r" b="b"/>
+            <a:pathLst>
+              <a:path w="120000" h="120000" extrusionOk="0">
+                <a:moveTo>
+                  <a:pt x="0" y="0"/>
+                </a:moveTo>
+                <a:lnTo>
+                  <a:pt x="120000" y="0"/>
+                </a:lnTo>
+                <a:lnTo>
+                  <a:pt x="120000" y="120000"/>
+                </a:lnTo>
+                <a:lnTo>
+                  <a:pt x="0" y="120000"/>
+                </a:lnTo>
+                <a:close/>
+              </a:path>
+            </a:pathLst>
+          </a:custGeom>
+          <a:noFill/>
+          <a:ln w="9525" cap="flat" cmpd="sng">
+            <a:solidFill>
+              <a:srgbClr val="000000"/>
+            </a:solidFill>
+            <a:prstDash val="solid"/>
+            <a:round/>
+            <a:headEnd type="none" w="sm" len="sm"/>
+            <a:tailEnd type="none" w="sm" len="sm"/>
+          </a:ln>
+        </p:spPr>
+      </p:sp>
+      <p:sp>
+        <p:nvSpPr>
+          <p:cNvPr id="160" name="Google Shape;160;g2cb01868c32_0_21:notes"/>
           <p:cNvSpPr txBox="1">
             <a:spLocks noGrp="1"/>
           </p:cNvSpPr>
@@ -4962,6 +5085,297 @@
               <a:rPr lang="en"/>
               <a:t>‹#›</a:t>
             </a:fld>
+            <a:endParaRPr/>
+          </a:p>
+        </p:txBody>
+      </p:sp>
+    </p:spTree>
+  </p:cSld>
+  <p:clrMapOvr>
+    <a:masterClrMapping/>
+  </p:clrMapOvr>
+</p:sldLayout>
+</file>
+
+<file path=ppt/slideLayouts/slideLayout12.xml><?xml version="1.0" encoding="utf-8"?>
+<p:sldLayout xmlns:a="http://schemas.openxmlformats.org/drawingml/2006/main" xmlns:r="http://schemas.openxmlformats.org/officeDocument/2006/relationships" xmlns:p="http://schemas.openxmlformats.org/presentationml/2006/main" matchingName="Title, Content" type="obj">
+  <p:cSld name="OBJECT">
+    <p:spTree>
+      <p:nvGrpSpPr>
+        <p:cNvPr id="1" name="Shape 50"/>
+        <p:cNvGrpSpPr/>
+        <p:nvPr/>
+      </p:nvGrpSpPr>
+      <p:grpSpPr>
+        <a:xfrm>
+          <a:off x="0" y="0"/>
+          <a:ext cx="0" cy="0"/>
+          <a:chOff x="0" y="0"/>
+          <a:chExt cx="0" cy="0"/>
+        </a:xfrm>
+      </p:grpSpPr>
+      <p:sp>
+        <p:nvSpPr>
+          <p:cNvPr id="51" name="Google Shape;51;p13"/>
+          <p:cNvSpPr txBox="1">
+            <a:spLocks noGrp="1"/>
+          </p:cNvSpPr>
+          <p:nvPr>
+            <p:ph type="title"/>
+          </p:nvPr>
+        </p:nvSpPr>
+        <p:spPr>
+          <a:xfrm>
+            <a:off x="457172" y="205067"/>
+            <a:ext cx="8228700" cy="858600"/>
+          </a:xfrm>
+          <a:prstGeom prst="rect">
+            <a:avLst/>
+          </a:prstGeom>
+          <a:noFill/>
+          <a:ln>
+            <a:noFill/>
+          </a:ln>
+        </p:spPr>
+        <p:txBody>
+          <a:bodyPr spcFirstLastPara="1" wrap="square" lIns="0" tIns="0" rIns="0" bIns="0" anchor="ctr" anchorCtr="0">
+            <a:normAutofit/>
+          </a:bodyPr>
+          <a:lstStyle>
+            <a:lvl1pPr lvl="0" algn="l" rtl="0">
+              <a:spcBef>
+                <a:spcPts val="0"/>
+              </a:spcBef>
+              <a:spcAft>
+                <a:spcPts val="0"/>
+              </a:spcAft>
+              <a:buSzPts val="2800"/>
+              <a:buNone/>
+              <a:defRPr/>
+            </a:lvl1pPr>
+            <a:lvl2pPr lvl="1" algn="l" rtl="0">
+              <a:spcBef>
+                <a:spcPts val="0"/>
+              </a:spcBef>
+              <a:spcAft>
+                <a:spcPts val="0"/>
+              </a:spcAft>
+              <a:buSzPts val="2800"/>
+              <a:buNone/>
+              <a:defRPr/>
+            </a:lvl2pPr>
+            <a:lvl3pPr lvl="2" algn="l" rtl="0">
+              <a:spcBef>
+                <a:spcPts val="0"/>
+              </a:spcBef>
+              <a:spcAft>
+                <a:spcPts val="0"/>
+              </a:spcAft>
+              <a:buSzPts val="2800"/>
+              <a:buNone/>
+              <a:defRPr/>
+            </a:lvl3pPr>
+            <a:lvl4pPr lvl="3" algn="l" rtl="0">
+              <a:spcBef>
+                <a:spcPts val="0"/>
+              </a:spcBef>
+              <a:spcAft>
+                <a:spcPts val="0"/>
+              </a:spcAft>
+              <a:buSzPts val="2800"/>
+              <a:buNone/>
+              <a:defRPr/>
+            </a:lvl4pPr>
+            <a:lvl5pPr lvl="4" algn="l" rtl="0">
+              <a:spcBef>
+                <a:spcPts val="0"/>
+              </a:spcBef>
+              <a:spcAft>
+                <a:spcPts val="0"/>
+              </a:spcAft>
+              <a:buSzPts val="2800"/>
+              <a:buNone/>
+              <a:defRPr/>
+            </a:lvl5pPr>
+            <a:lvl6pPr lvl="5" algn="l" rtl="0">
+              <a:spcBef>
+                <a:spcPts val="0"/>
+              </a:spcBef>
+              <a:spcAft>
+                <a:spcPts val="0"/>
+              </a:spcAft>
+              <a:buSzPts val="2800"/>
+              <a:buNone/>
+              <a:defRPr/>
+            </a:lvl6pPr>
+            <a:lvl7pPr lvl="6" algn="l" rtl="0">
+              <a:spcBef>
+                <a:spcPts val="0"/>
+              </a:spcBef>
+              <a:spcAft>
+                <a:spcPts val="0"/>
+              </a:spcAft>
+              <a:buSzPts val="2800"/>
+              <a:buNone/>
+              <a:defRPr/>
+            </a:lvl7pPr>
+            <a:lvl8pPr lvl="7" algn="l" rtl="0">
+              <a:spcBef>
+                <a:spcPts val="0"/>
+              </a:spcBef>
+              <a:spcAft>
+                <a:spcPts val="0"/>
+              </a:spcAft>
+              <a:buSzPts val="2800"/>
+              <a:buNone/>
+              <a:defRPr/>
+            </a:lvl8pPr>
+            <a:lvl9pPr lvl="8" algn="l" rtl="0">
+              <a:spcBef>
+                <a:spcPts val="0"/>
+              </a:spcBef>
+              <a:spcAft>
+                <a:spcPts val="0"/>
+              </a:spcAft>
+              <a:buSzPts val="2800"/>
+              <a:buNone/>
+              <a:defRPr/>
+            </a:lvl9pPr>
+          </a:lstStyle>
+          <a:p>
+            <a:endParaRPr/>
+          </a:p>
+        </p:txBody>
+      </p:sp>
+      <p:sp>
+        <p:nvSpPr>
+          <p:cNvPr id="52" name="Google Shape;52;p13"/>
+          <p:cNvSpPr txBox="1">
+            <a:spLocks noGrp="1"/>
+          </p:cNvSpPr>
+          <p:nvPr>
+            <p:ph type="body" idx="1"/>
+          </p:nvPr>
+        </p:nvSpPr>
+        <p:spPr>
+          <a:xfrm>
+            <a:off x="457172" y="1203299"/>
+            <a:ext cx="8228700" cy="2982600"/>
+          </a:xfrm>
+          <a:prstGeom prst="rect">
+            <a:avLst/>
+          </a:prstGeom>
+          <a:noFill/>
+          <a:ln>
+            <a:noFill/>
+          </a:ln>
+        </p:spPr>
+        <p:txBody>
+          <a:bodyPr spcFirstLastPara="1" wrap="square" lIns="0" tIns="0" rIns="0" bIns="0" anchor="t" anchorCtr="0">
+            <a:normAutofit/>
+          </a:bodyPr>
+          <a:lstStyle>
+            <a:lvl1pPr marL="457200" lvl="0" indent="-228600" algn="l" rtl="0">
+              <a:spcBef>
+                <a:spcPts val="0"/>
+              </a:spcBef>
+              <a:spcAft>
+                <a:spcPts val="0"/>
+              </a:spcAft>
+              <a:buSzPts val="1800"/>
+              <a:buNone/>
+              <a:defRPr/>
+            </a:lvl1pPr>
+            <a:lvl2pPr marL="914400" lvl="1" indent="-228600" algn="l" rtl="0">
+              <a:spcBef>
+                <a:spcPts val="0"/>
+              </a:spcBef>
+              <a:spcAft>
+                <a:spcPts val="0"/>
+              </a:spcAft>
+              <a:buSzPts val="1400"/>
+              <a:buNone/>
+              <a:defRPr/>
+            </a:lvl2pPr>
+            <a:lvl3pPr marL="1371600" lvl="2" indent="-228600" algn="l" rtl="0">
+              <a:spcBef>
+                <a:spcPts val="0"/>
+              </a:spcBef>
+              <a:spcAft>
+                <a:spcPts val="0"/>
+              </a:spcAft>
+              <a:buSzPts val="1400"/>
+              <a:buNone/>
+              <a:defRPr/>
+            </a:lvl3pPr>
+            <a:lvl4pPr marL="1828800" lvl="3" indent="-228600" algn="l" rtl="0">
+              <a:spcBef>
+                <a:spcPts val="0"/>
+              </a:spcBef>
+              <a:spcAft>
+                <a:spcPts val="0"/>
+              </a:spcAft>
+              <a:buSzPts val="1400"/>
+              <a:buNone/>
+              <a:defRPr/>
+            </a:lvl4pPr>
+            <a:lvl5pPr marL="2286000" lvl="4" indent="-228600" algn="l" rtl="0">
+              <a:spcBef>
+                <a:spcPts val="0"/>
+              </a:spcBef>
+              <a:spcAft>
+                <a:spcPts val="0"/>
+              </a:spcAft>
+              <a:buSzPts val="1400"/>
+              <a:buNone/>
+              <a:defRPr/>
+            </a:lvl5pPr>
+            <a:lvl6pPr marL="2743200" lvl="5" indent="-228600" algn="l" rtl="0">
+              <a:spcBef>
+                <a:spcPts val="0"/>
+              </a:spcBef>
+              <a:spcAft>
+                <a:spcPts val="0"/>
+              </a:spcAft>
+              <a:buSzPts val="1400"/>
+              <a:buNone/>
+              <a:defRPr/>
+            </a:lvl6pPr>
+            <a:lvl7pPr marL="3200400" lvl="6" indent="-228600" algn="l" rtl="0">
+              <a:spcBef>
+                <a:spcPts val="0"/>
+              </a:spcBef>
+              <a:spcAft>
+                <a:spcPts val="0"/>
+              </a:spcAft>
+              <a:buSzPts val="1400"/>
+              <a:buNone/>
+              <a:defRPr/>
+            </a:lvl7pPr>
+            <a:lvl8pPr marL="3657600" lvl="7" indent="-228600" algn="l" rtl="0">
+              <a:spcBef>
+                <a:spcPts val="0"/>
+              </a:spcBef>
+              <a:spcAft>
+                <a:spcPts val="0"/>
+              </a:spcAft>
+              <a:buSzPts val="1400"/>
+              <a:buNone/>
+              <a:defRPr/>
+            </a:lvl8pPr>
+            <a:lvl9pPr marL="4114800" lvl="8" indent="-228600" algn="l" rtl="0">
+              <a:spcBef>
+                <a:spcPts val="0"/>
+              </a:spcBef>
+              <a:spcAft>
+                <a:spcPts val="0"/>
+              </a:spcAft>
+              <a:buSzPts val="1400"/>
+              <a:buNone/>
+              <a:defRPr/>
+            </a:lvl9pPr>
+          </a:lstStyle>
+          <a:p>
             <a:endParaRPr/>
           </a:p>
         </p:txBody>
@@ -10463,6 +10877,7 @@
     <p:sldLayoutId id="2147483656" r:id="rId9"/>
     <p:sldLayoutId id="2147483657" r:id="rId10"/>
     <p:sldLayoutId id="2147483658" r:id="rId11"/>
+    <p:sldLayoutId id="2147483659" r:id="rId12"/>
   </p:sldLayoutIdLst>
   <p:hf sldNum="0" hdr="0" ftr="0" dt="0"/>
   <p:txStyles>
@@ -11162,7 +11577,7 @@
   <p:cSld>
     <p:spTree>
       <p:nvGrpSpPr>
-        <p:cNvPr id="1" name="Shape 53"/>
+        <p:cNvPr id="1" name="Shape 56"/>
         <p:cNvGrpSpPr/>
         <p:nvPr/>
       </p:nvGrpSpPr>
@@ -11176,13 +11591,13 @@
       </p:grpSpPr>
       <p:sp>
         <p:nvSpPr>
-          <p:cNvPr id="54" name="Google Shape;54;p13"/>
+          <p:cNvPr id="57" name="Google Shape;57;p14"/>
           <p:cNvSpPr txBox="1"/>
           <p:nvPr/>
         </p:nvSpPr>
         <p:spPr>
           <a:xfrm>
-            <a:off x="86325" y="1356425"/>
+            <a:off x="86325" y="1204025"/>
             <a:ext cx="4420200" cy="3417000"/>
           </a:xfrm>
           <a:prstGeom prst="rect">
@@ -11768,14 +12183,14 @@
       </p:sp>
       <p:sp>
         <p:nvSpPr>
-          <p:cNvPr id="55" name="Google Shape;55;p13"/>
+          <p:cNvPr id="58" name="Google Shape;58;p14"/>
           <p:cNvSpPr txBox="1"/>
           <p:nvPr/>
         </p:nvSpPr>
         <p:spPr>
           <a:xfrm>
-            <a:off x="4635500" y="1356425"/>
-            <a:ext cx="4420200" cy="3417000"/>
+            <a:off x="4635500" y="1204025"/>
+            <a:ext cx="4420200" cy="3648000"/>
           </a:xfrm>
           <a:prstGeom prst="rect">
             <a:avLst/>
@@ -12184,7 +12599,7 @@
                 <a:cs typeface="Calibri"/>
                 <a:sym typeface="Calibri"/>
               </a:rPr>
-              <a:t>Ollama &amp; Embedding Models</a:t>
+              <a:t>Make RAG Better</a:t>
             </a:r>
             <a:endParaRPr sz="1500" b="1">
               <a:solidFill>
@@ -12224,7 +12639,7 @@
                 <a:cs typeface="Calibri"/>
                 <a:sym typeface="Calibri"/>
               </a:rPr>
-              <a:t>AIOS: LLM Agent Operating System</a:t>
+              <a:t>Ollama &amp; Embedding Models</a:t>
             </a:r>
             <a:endParaRPr sz="1500" b="1">
               <a:solidFill>
@@ -12264,7 +12679,7 @@
                 <a:cs typeface="Calibri"/>
                 <a:sym typeface="Calibri"/>
               </a:rPr>
-              <a:t>3Blue1Brown YouTube Deep Learning Tutorials</a:t>
+              <a:t>AIOS: LLM Agent Operating System</a:t>
             </a:r>
             <a:endParaRPr sz="1500" b="1">
               <a:solidFill>
@@ -12304,7 +12719,7 @@
                 <a:cs typeface="Calibri"/>
                 <a:sym typeface="Calibri"/>
               </a:rPr>
-              <a:t>Crowd-sourced "Arena" Leaderboard</a:t>
+              <a:t>3Blue1Brown YouTube Deep Learning Tutorials</a:t>
             </a:r>
             <a:endParaRPr sz="1500" b="1">
               <a:solidFill>
@@ -12344,7 +12759,7 @@
                 <a:cs typeface="Calibri"/>
                 <a:sym typeface="Calibri"/>
               </a:rPr>
-              <a:t>Tech Layoffs are x3 times lower than in 2023</a:t>
+              <a:t>Crowd-sourced "Arena" Leaderboard</a:t>
             </a:r>
             <a:endParaRPr sz="1500" b="1">
               <a:solidFill>
@@ -12356,11 +12771,51 @@
               <a:sym typeface="Calibri"/>
             </a:endParaRPr>
           </a:p>
+          <a:p>
+            <a:pPr marL="228600" marR="0" lvl="0" indent="-209550" algn="l" rtl="0">
+              <a:lnSpc>
+                <a:spcPct val="100000"/>
+              </a:lnSpc>
+              <a:spcBef>
+                <a:spcPts val="0"/>
+              </a:spcBef>
+              <a:spcAft>
+                <a:spcPts val="0"/>
+              </a:spcAft>
+              <a:buClr>
+                <a:srgbClr val="3C78D8"/>
+              </a:buClr>
+              <a:buSzPts val="1500"/>
+              <a:buFont typeface="Calibri"/>
+              <a:buChar char="●"/>
+            </a:pPr>
+            <a:r>
+              <a:rPr lang="en" sz="1500" b="1">
+                <a:solidFill>
+                  <a:srgbClr val="3C78D8"/>
+                </a:solidFill>
+                <a:latin typeface="Calibri"/>
+                <a:ea typeface="Calibri"/>
+                <a:cs typeface="Calibri"/>
+                <a:sym typeface="Calibri"/>
+              </a:rPr>
+              <a:t>Tech Layoffs are x3 times lower than in 2023</a:t>
+            </a:r>
+            <a:endParaRPr sz="1500" b="1">
+              <a:solidFill>
+                <a:srgbClr val="3C78D8"/>
+              </a:solidFill>
+              <a:latin typeface="Calibri"/>
+              <a:ea typeface="Calibri"/>
+              <a:cs typeface="Calibri"/>
+              <a:sym typeface="Calibri"/>
+            </a:endParaRPr>
+          </a:p>
         </p:txBody>
       </p:sp>
       <p:sp>
         <p:nvSpPr>
-          <p:cNvPr id="56" name="Google Shape;56;p13"/>
+          <p:cNvPr id="59" name="Google Shape;59;p14"/>
           <p:cNvSpPr txBox="1"/>
           <p:nvPr/>
         </p:nvSpPr>
@@ -12489,7 +12944,7 @@
   <p:cSld>
     <p:spTree>
       <p:nvGrpSpPr>
-        <p:cNvPr id="1" name="Shape 173"/>
+        <p:cNvPr id="1" name="Shape 176"/>
         <p:cNvGrpSpPr/>
         <p:nvPr/>
       </p:nvGrpSpPr>
@@ -12503,7 +12958,7 @@
       </p:grpSpPr>
       <p:sp>
         <p:nvSpPr>
-          <p:cNvPr id="174" name="Google Shape;174;p22"/>
+          <p:cNvPr id="177" name="Google Shape;177;p23"/>
           <p:cNvSpPr txBox="1"/>
           <p:nvPr/>
         </p:nvSpPr>
@@ -12725,7 +13180,7 @@
       </p:sp>
       <p:sp>
         <p:nvSpPr>
-          <p:cNvPr id="175" name="Google Shape;175;p22"/>
+          <p:cNvPr id="178" name="Google Shape;178;p23"/>
           <p:cNvSpPr txBox="1"/>
           <p:nvPr/>
         </p:nvSpPr>
@@ -12783,7 +13238,7 @@
       </p:sp>
       <p:sp>
         <p:nvSpPr>
-          <p:cNvPr id="176" name="Google Shape;176;p22"/>
+          <p:cNvPr id="179" name="Google Shape;179;p23"/>
           <p:cNvSpPr txBox="1"/>
           <p:nvPr/>
         </p:nvSpPr>
@@ -12843,7 +13298,7 @@
       </p:sp>
       <p:sp>
         <p:nvSpPr>
-          <p:cNvPr id="177" name="Google Shape;177;p22"/>
+          <p:cNvPr id="180" name="Google Shape;180;p23"/>
           <p:cNvSpPr txBox="1"/>
           <p:nvPr/>
         </p:nvSpPr>
@@ -12995,7 +13450,7 @@
       </p:sp>
       <p:pic>
         <p:nvPicPr>
-          <p:cNvPr id="178" name="Google Shape;178;p22"/>
+          <p:cNvPr id="181" name="Google Shape;181;p23"/>
           <p:cNvPicPr preferRelativeResize="0"/>
           <p:nvPr/>
         </p:nvPicPr>
@@ -13028,7 +13483,7 @@
       </p:pic>
       <p:sp>
         <p:nvSpPr>
-          <p:cNvPr id="179" name="Google Shape;179;p22"/>
+          <p:cNvPr id="182" name="Google Shape;182;p23"/>
           <p:cNvSpPr txBox="1"/>
           <p:nvPr/>
         </p:nvSpPr>
@@ -13197,7 +13652,7 @@
       </p:sp>
       <p:sp>
         <p:nvSpPr>
-          <p:cNvPr id="180" name="Google Shape;180;p22"/>
+          <p:cNvPr id="183" name="Google Shape;183;p23"/>
           <p:cNvSpPr txBox="1"/>
           <p:nvPr/>
         </p:nvSpPr>
@@ -13299,7 +13754,7 @@
       </p:sp>
       <p:pic>
         <p:nvPicPr>
-          <p:cNvPr id="181" name="Google Shape;181;p22"/>
+          <p:cNvPr id="184" name="Google Shape;184;p23"/>
           <p:cNvPicPr preferRelativeResize="0"/>
           <p:nvPr/>
         </p:nvPicPr>
@@ -13332,7 +13787,7 @@
       </p:pic>
       <p:sp>
         <p:nvSpPr>
-          <p:cNvPr id="182" name="Google Shape;182;p22"/>
+          <p:cNvPr id="185" name="Google Shape;185;p23"/>
           <p:cNvSpPr txBox="1"/>
           <p:nvPr/>
         </p:nvSpPr>
@@ -13453,7 +13908,7 @@
   <p:cSld>
     <p:spTree>
       <p:nvGrpSpPr>
-        <p:cNvPr id="1" name="Shape 186"/>
+        <p:cNvPr id="1" name="Shape 189"/>
         <p:cNvGrpSpPr/>
         <p:nvPr/>
       </p:nvGrpSpPr>
@@ -13467,7 +13922,7 @@
       </p:grpSpPr>
       <p:sp>
         <p:nvSpPr>
-          <p:cNvPr id="187" name="Google Shape;187;p23"/>
+          <p:cNvPr id="190" name="Google Shape;190;p24"/>
           <p:cNvSpPr txBox="1"/>
           <p:nvPr/>
         </p:nvSpPr>
@@ -13937,7 +14392,7 @@
       </p:sp>
       <p:sp>
         <p:nvSpPr>
-          <p:cNvPr id="188" name="Google Shape;188;p23"/>
+          <p:cNvPr id="191" name="Google Shape;191;p24"/>
           <p:cNvSpPr txBox="1"/>
           <p:nvPr/>
         </p:nvSpPr>
@@ -14001,7 +14456,7 @@
       </p:sp>
       <p:pic>
         <p:nvPicPr>
-          <p:cNvPr id="189" name="Google Shape;189;p23"/>
+          <p:cNvPr id="192" name="Google Shape;192;p24"/>
           <p:cNvPicPr preferRelativeResize="0"/>
           <p:nvPr/>
         </p:nvPicPr>
@@ -14045,7 +14500,7 @@
   <p:cSld>
     <p:spTree>
       <p:nvGrpSpPr>
-        <p:cNvPr id="1" name="Shape 193"/>
+        <p:cNvPr id="1" name="Shape 196"/>
         <p:cNvGrpSpPr/>
         <p:nvPr/>
       </p:nvGrpSpPr>
@@ -14059,7 +14514,7 @@
       </p:grpSpPr>
       <p:sp>
         <p:nvSpPr>
-          <p:cNvPr id="194" name="Google Shape;194;p24"/>
+          <p:cNvPr id="197" name="Google Shape;197;p25"/>
           <p:cNvSpPr txBox="1"/>
           <p:nvPr/>
         </p:nvSpPr>
@@ -14378,7 +14833,7 @@
       </p:sp>
       <p:sp>
         <p:nvSpPr>
-          <p:cNvPr id="195" name="Google Shape;195;p24"/>
+          <p:cNvPr id="198" name="Google Shape;198;p25"/>
           <p:cNvSpPr txBox="1"/>
           <p:nvPr/>
         </p:nvSpPr>
@@ -14436,7 +14891,7 @@
       </p:sp>
       <p:pic>
         <p:nvPicPr>
-          <p:cNvPr id="196" name="Google Shape;196;p24"/>
+          <p:cNvPr id="199" name="Google Shape;199;p25"/>
           <p:cNvPicPr preferRelativeResize="0"/>
           <p:nvPr/>
         </p:nvPicPr>
@@ -14470,7 +14925,7 @@
       </p:pic>
       <p:pic>
         <p:nvPicPr>
-          <p:cNvPr id="197" name="Google Shape;197;p24"/>
+          <p:cNvPr id="200" name="Google Shape;200;p25"/>
           <p:cNvPicPr preferRelativeResize="0"/>
           <p:nvPr/>
         </p:nvPicPr>
@@ -14520,7 +14975,7 @@
   <p:cSld>
     <p:spTree>
       <p:nvGrpSpPr>
-        <p:cNvPr id="1" name="Shape 201"/>
+        <p:cNvPr id="1" name="Shape 204"/>
         <p:cNvGrpSpPr/>
         <p:nvPr/>
       </p:nvGrpSpPr>
@@ -14534,7 +14989,7 @@
       </p:grpSpPr>
       <p:sp>
         <p:nvSpPr>
-          <p:cNvPr id="202" name="Google Shape;202;p25"/>
+          <p:cNvPr id="205" name="Google Shape;205;p26"/>
           <p:cNvSpPr txBox="1"/>
           <p:nvPr/>
         </p:nvSpPr>
@@ -14593,7 +15048,7 @@
                 <a:cs typeface="Calibri"/>
                 <a:sym typeface="Calibri"/>
               </a:rPr>
-              <a:t>pure C/CUDA.</a:t>
+              <a:t>pure C.</a:t>
             </a:r>
             <a:endParaRPr sz="1300">
               <a:latin typeface="Calibri"/>
@@ -14880,7 +15335,7 @@
       </p:sp>
       <p:sp>
         <p:nvSpPr>
-          <p:cNvPr id="203" name="Google Shape;203;p25"/>
+          <p:cNvPr id="206" name="Google Shape;206;p26"/>
           <p:cNvSpPr txBox="1"/>
           <p:nvPr/>
         </p:nvSpPr>
@@ -14938,7 +15393,7 @@
       </p:sp>
       <p:pic>
         <p:nvPicPr>
-          <p:cNvPr id="204" name="Google Shape;204;p25"/>
+          <p:cNvPr id="207" name="Google Shape;207;p26"/>
           <p:cNvPicPr preferRelativeResize="0"/>
           <p:nvPr/>
         </p:nvPicPr>
@@ -14971,7 +15426,7 @@
       </p:pic>
       <p:sp>
         <p:nvSpPr>
-          <p:cNvPr id="205" name="Google Shape;205;p25"/>
+          <p:cNvPr id="208" name="Google Shape;208;p26"/>
           <p:cNvSpPr txBox="1"/>
           <p:nvPr/>
         </p:nvSpPr>
@@ -15024,7 +15479,7 @@
   <p:cSld>
     <p:spTree>
       <p:nvGrpSpPr>
-        <p:cNvPr id="1" name="Shape 209"/>
+        <p:cNvPr id="1" name="Shape 212"/>
         <p:cNvGrpSpPr/>
         <p:nvPr/>
       </p:nvGrpSpPr>
@@ -15038,7 +15493,7 @@
       </p:grpSpPr>
       <p:sp>
         <p:nvSpPr>
-          <p:cNvPr id="210" name="Google Shape;210;p26"/>
+          <p:cNvPr id="213" name="Google Shape;213;p27"/>
           <p:cNvSpPr txBox="1"/>
           <p:nvPr/>
         </p:nvSpPr>
@@ -15227,14 +15682,14 @@
       </p:sp>
       <p:sp>
         <p:nvSpPr>
-          <p:cNvPr id="211" name="Google Shape;211;p26"/>
+          <p:cNvPr id="214" name="Google Shape;214;p27"/>
           <p:cNvSpPr txBox="1"/>
           <p:nvPr/>
         </p:nvSpPr>
         <p:spPr>
           <a:xfrm>
             <a:off x="0" y="0"/>
-            <a:ext cx="6969300" cy="461700"/>
+            <a:ext cx="5608200" cy="461700"/>
           </a:xfrm>
           <a:prstGeom prst="rect">
             <a:avLst/>
@@ -15285,7 +15740,7 @@
       </p:sp>
       <p:pic>
         <p:nvPicPr>
-          <p:cNvPr id="212" name="Google Shape;212;p26"/>
+          <p:cNvPr id="215" name="Google Shape;215;p27"/>
           <p:cNvPicPr preferRelativeResize="0"/>
           <p:nvPr/>
         </p:nvPicPr>
@@ -15316,6 +15771,97 @@
           </a:ln>
         </p:spPr>
       </p:pic>
+      <p:sp>
+        <p:nvSpPr>
+          <p:cNvPr id="216" name="Google Shape;216;p27"/>
+          <p:cNvSpPr txBox="1"/>
+          <p:nvPr/>
+        </p:nvSpPr>
+        <p:spPr>
+          <a:xfrm>
+            <a:off x="6096000" y="76200"/>
+            <a:ext cx="3000000" cy="585000"/>
+          </a:xfrm>
+          <a:prstGeom prst="rect">
+            <a:avLst/>
+          </a:prstGeom>
+          <a:noFill/>
+          <a:ln>
+            <a:noFill/>
+          </a:ln>
+        </p:spPr>
+        <p:txBody>
+          <a:bodyPr spcFirstLastPara="1" wrap="square" lIns="91425" tIns="91425" rIns="91425" bIns="91425" anchor="t" anchorCtr="0">
+            <a:spAutoFit/>
+          </a:bodyPr>
+          <a:lstStyle/>
+          <a:p>
+            <a:pPr marL="0" lvl="0" indent="0" algn="l" rtl="0">
+              <a:spcBef>
+                <a:spcPts val="0"/>
+              </a:spcBef>
+              <a:spcAft>
+                <a:spcPts val="0"/>
+              </a:spcAft>
+              <a:buNone/>
+            </a:pPr>
+            <a:r>
+              <a:rPr lang="en" sz="1300">
+                <a:latin typeface="Calibri"/>
+                <a:ea typeface="Calibri"/>
+                <a:cs typeface="Calibri"/>
+                <a:sym typeface="Calibri"/>
+              </a:rPr>
+              <a:t>Original RAG paper (2021, FAIR)</a:t>
+            </a:r>
+            <a:endParaRPr sz="1300">
+              <a:latin typeface="Calibri"/>
+              <a:ea typeface="Calibri"/>
+              <a:cs typeface="Calibri"/>
+              <a:sym typeface="Calibri"/>
+            </a:endParaRPr>
+          </a:p>
+          <a:p>
+            <a:pPr marL="0" lvl="0" indent="0" algn="l" rtl="0">
+              <a:spcBef>
+                <a:spcPts val="0"/>
+              </a:spcBef>
+              <a:spcAft>
+                <a:spcPts val="0"/>
+              </a:spcAft>
+              <a:buNone/>
+            </a:pPr>
+            <a:r>
+              <a:rPr lang="en" sz="1300" u="sng">
+                <a:solidFill>
+                  <a:schemeClr val="hlink"/>
+                </a:solidFill>
+                <a:latin typeface="Calibri"/>
+                <a:ea typeface="Calibri"/>
+                <a:cs typeface="Calibri"/>
+                <a:sym typeface="Calibri"/>
+                <a:hlinkClick r:id="rId8"/>
+              </a:rPr>
+              <a:t>https://arxiv.org/pdf/2005.11401.pdf</a:t>
+            </a:r>
+            <a:r>
+              <a:rPr lang="en" sz="1300">
+                <a:latin typeface="Calibri"/>
+                <a:ea typeface="Calibri"/>
+                <a:cs typeface="Calibri"/>
+                <a:sym typeface="Calibri"/>
+              </a:rPr>
+              <a:t> </a:t>
+            </a:r>
+            <a:endParaRPr sz="1300">
+              <a:latin typeface="Calibri"/>
+              <a:ea typeface="Calibri"/>
+              <a:cs typeface="Calibri"/>
+              <a:sym typeface="Calibri"/>
+            </a:endParaRPr>
+          </a:p>
+        </p:txBody>
+      </p:sp>
     </p:spTree>
   </p:cSld>
   <p:clrMapOvr>
@@ -15329,7 +15875,7 @@
   <p:cSld>
     <p:spTree>
       <p:nvGrpSpPr>
-        <p:cNvPr id="1" name="Shape 216"/>
+        <p:cNvPr id="1" name="Shape 220"/>
         <p:cNvGrpSpPr/>
         <p:nvPr/>
       </p:nvGrpSpPr>
@@ -15343,7 +15889,1892 @@
       </p:grpSpPr>
       <p:sp>
         <p:nvSpPr>
-          <p:cNvPr id="217" name="Google Shape;217;p27"/>
+          <p:cNvPr id="221" name="Google Shape;221;p28"/>
+          <p:cNvSpPr txBox="1"/>
+          <p:nvPr/>
+        </p:nvSpPr>
+        <p:spPr>
+          <a:xfrm>
+            <a:off x="53350" y="461700"/>
+            <a:ext cx="4313400" cy="3257100"/>
+          </a:xfrm>
+          <a:prstGeom prst="rect">
+            <a:avLst/>
+          </a:prstGeom>
+          <a:solidFill>
+            <a:srgbClr val="FFF2CC"/>
+          </a:solidFill>
+          <a:ln w="9525" cap="flat" cmpd="sng">
+            <a:solidFill>
+              <a:srgbClr val="FF0000"/>
+            </a:solidFill>
+            <a:prstDash val="solid"/>
+            <a:round/>
+            <a:headEnd type="none" w="sm" len="sm"/>
+            <a:tailEnd type="none" w="sm" len="sm"/>
+          </a:ln>
+        </p:spPr>
+        <p:txBody>
+          <a:bodyPr spcFirstLastPara="1" wrap="square" lIns="27425" tIns="27425" rIns="27425" bIns="27425" anchor="t" anchorCtr="0">
+            <a:spAutoFit/>
+          </a:bodyPr>
+          <a:lstStyle/>
+          <a:p>
+            <a:pPr marL="0" lvl="0" indent="0" algn="l" rtl="0">
+              <a:spcBef>
+                <a:spcPts val="0"/>
+              </a:spcBef>
+              <a:spcAft>
+                <a:spcPts val="0"/>
+              </a:spcAft>
+              <a:buNone/>
+            </a:pPr>
+            <a:r>
+              <a:rPr lang="en" sz="1300">
+                <a:latin typeface="Calibri"/>
+                <a:ea typeface="Calibri"/>
+                <a:cs typeface="Calibri"/>
+                <a:sym typeface="Calibri"/>
+              </a:rPr>
+              <a:t>One problem with RAG is that </a:t>
+            </a:r>
+            <a:r>
+              <a:rPr lang="en" sz="1300" b="1">
+                <a:solidFill>
+                  <a:srgbClr val="FF0000"/>
+                </a:solidFill>
+                <a:latin typeface="Calibri"/>
+                <a:ea typeface="Calibri"/>
+                <a:cs typeface="Calibri"/>
+                <a:sym typeface="Calibri"/>
+              </a:rPr>
+              <a:t>the questions and answers don't have to be semantically similar.</a:t>
+            </a:r>
+            <a:r>
+              <a:rPr lang="en" sz="1300">
+                <a:latin typeface="Calibri"/>
+                <a:ea typeface="Calibri"/>
+                <a:cs typeface="Calibri"/>
+                <a:sym typeface="Calibri"/>
+              </a:rPr>
+              <a:t> One way of solving it is to do the search in the space of questions.</a:t>
+            </a:r>
+            <a:endParaRPr sz="1300">
+              <a:latin typeface="Calibri"/>
+              <a:ea typeface="Calibri"/>
+              <a:cs typeface="Calibri"/>
+              <a:sym typeface="Calibri"/>
+            </a:endParaRPr>
+          </a:p>
+          <a:p>
+            <a:pPr marL="0" lvl="0" indent="0" algn="l" rtl="0">
+              <a:spcBef>
+                <a:spcPts val="0"/>
+              </a:spcBef>
+              <a:spcAft>
+                <a:spcPts val="0"/>
+              </a:spcAft>
+              <a:buNone/>
+            </a:pPr>
+            <a:endParaRPr sz="1300">
+              <a:latin typeface="Calibri"/>
+              <a:ea typeface="Calibri"/>
+              <a:cs typeface="Calibri"/>
+              <a:sym typeface="Calibri"/>
+            </a:endParaRPr>
+          </a:p>
+          <a:p>
+            <a:pPr marL="0" lvl="0" indent="0" algn="l" rtl="0">
+              <a:spcBef>
+                <a:spcPts val="0"/>
+              </a:spcBef>
+              <a:spcAft>
+                <a:spcPts val="0"/>
+              </a:spcAft>
+              <a:buNone/>
+            </a:pPr>
+            <a:r>
+              <a:rPr lang="en" sz="1300">
+                <a:latin typeface="Calibri"/>
+                <a:ea typeface="Calibri"/>
+                <a:cs typeface="Calibri"/>
+                <a:sym typeface="Calibri"/>
+              </a:rPr>
+              <a:t>Text vector indexing:</a:t>
+            </a:r>
+            <a:endParaRPr sz="1300">
+              <a:latin typeface="Calibri"/>
+              <a:ea typeface="Calibri"/>
+              <a:cs typeface="Calibri"/>
+              <a:sym typeface="Calibri"/>
+            </a:endParaRPr>
+          </a:p>
+          <a:p>
+            <a:pPr marL="457200" lvl="0" indent="-311150" algn="l" rtl="0">
+              <a:spcBef>
+                <a:spcPts val="0"/>
+              </a:spcBef>
+              <a:spcAft>
+                <a:spcPts val="0"/>
+              </a:spcAft>
+              <a:buSzPts val="1300"/>
+              <a:buFont typeface="Calibri"/>
+              <a:buChar char="●"/>
+            </a:pPr>
+            <a:r>
+              <a:rPr lang="en" sz="1300">
+                <a:latin typeface="Calibri"/>
+                <a:ea typeface="Calibri"/>
+                <a:cs typeface="Calibri"/>
+                <a:sym typeface="Calibri"/>
+              </a:rPr>
+              <a:t>split text into text chunks, </a:t>
+            </a:r>
+            <a:endParaRPr sz="1300">
+              <a:latin typeface="Calibri"/>
+              <a:ea typeface="Calibri"/>
+              <a:cs typeface="Calibri"/>
+              <a:sym typeface="Calibri"/>
+            </a:endParaRPr>
+          </a:p>
+          <a:p>
+            <a:pPr marL="457200" lvl="0" indent="-311150" algn="l" rtl="0">
+              <a:spcBef>
+                <a:spcPts val="0"/>
+              </a:spcBef>
+              <a:spcAft>
+                <a:spcPts val="0"/>
+              </a:spcAft>
+              <a:buSzPts val="1300"/>
+              <a:buFont typeface="Calibri"/>
+              <a:buChar char="●"/>
+            </a:pPr>
+            <a:r>
+              <a:rPr lang="en" sz="1300">
+                <a:latin typeface="Calibri"/>
+                <a:ea typeface="Calibri"/>
+                <a:cs typeface="Calibri"/>
+                <a:sym typeface="Calibri"/>
+              </a:rPr>
+              <a:t>generate embedding vectors </a:t>
+            </a:r>
+            <a:r>
+              <a:rPr lang="en" sz="1300" b="1">
+                <a:solidFill>
+                  <a:srgbClr val="3C78D8"/>
+                </a:solidFill>
+                <a:latin typeface="Calibri"/>
+                <a:ea typeface="Calibri"/>
+                <a:cs typeface="Calibri"/>
+                <a:sym typeface="Calibri"/>
+              </a:rPr>
+              <a:t>from those text chunks</a:t>
+            </a:r>
+            <a:r>
+              <a:rPr lang="en" sz="1300">
+                <a:latin typeface="Calibri"/>
+                <a:ea typeface="Calibri"/>
+                <a:cs typeface="Calibri"/>
+                <a:sym typeface="Calibri"/>
+              </a:rPr>
+              <a:t>, </a:t>
+            </a:r>
+            <a:endParaRPr sz="1300">
+              <a:latin typeface="Calibri"/>
+              <a:ea typeface="Calibri"/>
+              <a:cs typeface="Calibri"/>
+              <a:sym typeface="Calibri"/>
+            </a:endParaRPr>
+          </a:p>
+          <a:p>
+            <a:pPr marL="457200" lvl="0" indent="-311150" algn="l" rtl="0">
+              <a:spcBef>
+                <a:spcPts val="0"/>
+              </a:spcBef>
+              <a:spcAft>
+                <a:spcPts val="0"/>
+              </a:spcAft>
+              <a:buSzPts val="1300"/>
+              <a:buFont typeface="Calibri"/>
+              <a:buChar char="●"/>
+            </a:pPr>
+            <a:r>
+              <a:rPr lang="en" sz="1300">
+                <a:latin typeface="Calibri"/>
+                <a:ea typeface="Calibri"/>
+                <a:cs typeface="Calibri"/>
+                <a:sym typeface="Calibri"/>
+              </a:rPr>
+              <a:t>index them as </a:t>
+            </a:r>
+            <a:r>
+              <a:rPr lang="en" sz="1300" b="1">
+                <a:solidFill>
+                  <a:srgbClr val="FF0000"/>
+                </a:solidFill>
+                <a:latin typeface="Calibri"/>
+                <a:ea typeface="Calibri"/>
+                <a:cs typeface="Calibri"/>
+                <a:sym typeface="Calibri"/>
+              </a:rPr>
+              <a:t>(vector_from_text, text)</a:t>
+            </a:r>
+            <a:endParaRPr sz="1300" b="1">
+              <a:solidFill>
+                <a:srgbClr val="FF0000"/>
+              </a:solidFill>
+              <a:latin typeface="Calibri"/>
+              <a:ea typeface="Calibri"/>
+              <a:cs typeface="Calibri"/>
+              <a:sym typeface="Calibri"/>
+            </a:endParaRPr>
+          </a:p>
+          <a:p>
+            <a:pPr marL="0" lvl="0" indent="0" algn="l" rtl="0">
+              <a:spcBef>
+                <a:spcPts val="0"/>
+              </a:spcBef>
+              <a:spcAft>
+                <a:spcPts val="0"/>
+              </a:spcAft>
+              <a:buNone/>
+            </a:pPr>
+            <a:endParaRPr sz="1300">
+              <a:latin typeface="Calibri"/>
+              <a:ea typeface="Calibri"/>
+              <a:cs typeface="Calibri"/>
+              <a:sym typeface="Calibri"/>
+            </a:endParaRPr>
+          </a:p>
+          <a:p>
+            <a:pPr marL="0" lvl="0" indent="0" algn="l" rtl="0">
+              <a:spcBef>
+                <a:spcPts val="0"/>
+              </a:spcBef>
+              <a:spcAft>
+                <a:spcPts val="0"/>
+              </a:spcAft>
+              <a:buNone/>
+            </a:pPr>
+            <a:r>
+              <a:rPr lang="en" sz="1300">
+                <a:latin typeface="Calibri"/>
+                <a:ea typeface="Calibri"/>
+                <a:cs typeface="Calibri"/>
+                <a:sym typeface="Calibri"/>
+              </a:rPr>
+              <a:t>Question vector indexing:</a:t>
+            </a:r>
+            <a:endParaRPr sz="1300">
+              <a:latin typeface="Calibri"/>
+              <a:ea typeface="Calibri"/>
+              <a:cs typeface="Calibri"/>
+              <a:sym typeface="Calibri"/>
+            </a:endParaRPr>
+          </a:p>
+          <a:p>
+            <a:pPr marL="457200" lvl="0" indent="-311150" algn="l" rtl="0">
+              <a:spcBef>
+                <a:spcPts val="0"/>
+              </a:spcBef>
+              <a:spcAft>
+                <a:spcPts val="0"/>
+              </a:spcAft>
+              <a:buSzPts val="1300"/>
+              <a:buFont typeface="Calibri"/>
+              <a:buChar char="●"/>
+            </a:pPr>
+            <a:r>
+              <a:rPr lang="en" sz="1300">
+                <a:latin typeface="Calibri"/>
+                <a:ea typeface="Calibri"/>
+                <a:cs typeface="Calibri"/>
+                <a:sym typeface="Calibri"/>
+              </a:rPr>
+              <a:t>split text into big chunks - chapters.</a:t>
+            </a:r>
+            <a:endParaRPr sz="1300">
+              <a:latin typeface="Calibri"/>
+              <a:ea typeface="Calibri"/>
+              <a:cs typeface="Calibri"/>
+              <a:sym typeface="Calibri"/>
+            </a:endParaRPr>
+          </a:p>
+          <a:p>
+            <a:pPr marL="457200" lvl="0" indent="-311150" algn="l" rtl="0">
+              <a:spcBef>
+                <a:spcPts val="0"/>
+              </a:spcBef>
+              <a:spcAft>
+                <a:spcPts val="0"/>
+              </a:spcAft>
+              <a:buSzPts val="1300"/>
+              <a:buFont typeface="Calibri"/>
+              <a:buChar char="●"/>
+            </a:pPr>
+            <a:r>
+              <a:rPr lang="en" sz="1300">
+                <a:latin typeface="Calibri"/>
+                <a:ea typeface="Calibri"/>
+                <a:cs typeface="Calibri"/>
+                <a:sym typeface="Calibri"/>
+              </a:rPr>
+              <a:t>for each chapter generate multiple "exam" questions</a:t>
+            </a:r>
+            <a:endParaRPr sz="1300">
+              <a:latin typeface="Calibri"/>
+              <a:ea typeface="Calibri"/>
+              <a:cs typeface="Calibri"/>
+              <a:sym typeface="Calibri"/>
+            </a:endParaRPr>
+          </a:p>
+          <a:p>
+            <a:pPr marL="457200" lvl="0" indent="-311150" algn="l" rtl="0">
+              <a:spcBef>
+                <a:spcPts val="0"/>
+              </a:spcBef>
+              <a:spcAft>
+                <a:spcPts val="0"/>
+              </a:spcAft>
+              <a:buSzPts val="1300"/>
+              <a:buFont typeface="Calibri"/>
+              <a:buChar char="●"/>
+            </a:pPr>
+            <a:r>
+              <a:rPr lang="en" sz="1300">
+                <a:solidFill>
+                  <a:schemeClr val="dk1"/>
+                </a:solidFill>
+                <a:latin typeface="Calibri"/>
+                <a:ea typeface="Calibri"/>
+                <a:cs typeface="Calibri"/>
+                <a:sym typeface="Calibri"/>
+              </a:rPr>
+              <a:t>generate embedding vectors </a:t>
+            </a:r>
+            <a:r>
+              <a:rPr lang="en" sz="1300" b="1">
+                <a:solidFill>
+                  <a:srgbClr val="3C78D8"/>
+                </a:solidFill>
+                <a:latin typeface="Calibri"/>
+                <a:ea typeface="Calibri"/>
+                <a:cs typeface="Calibri"/>
+                <a:sym typeface="Calibri"/>
+              </a:rPr>
+              <a:t>from questions</a:t>
+            </a:r>
+            <a:endParaRPr sz="1300" b="1">
+              <a:solidFill>
+                <a:srgbClr val="3C78D8"/>
+              </a:solidFill>
+              <a:latin typeface="Calibri"/>
+              <a:ea typeface="Calibri"/>
+              <a:cs typeface="Calibri"/>
+              <a:sym typeface="Calibri"/>
+            </a:endParaRPr>
+          </a:p>
+          <a:p>
+            <a:pPr marL="457200" lvl="0" indent="-311150" algn="l" rtl="0">
+              <a:spcBef>
+                <a:spcPts val="0"/>
+              </a:spcBef>
+              <a:spcAft>
+                <a:spcPts val="0"/>
+              </a:spcAft>
+              <a:buSzPts val="1300"/>
+              <a:buFont typeface="Calibri"/>
+              <a:buChar char="●"/>
+            </a:pPr>
+            <a:r>
+              <a:rPr lang="en" sz="1300">
+                <a:latin typeface="Calibri"/>
+                <a:ea typeface="Calibri"/>
+                <a:cs typeface="Calibri"/>
+                <a:sym typeface="Calibri"/>
+              </a:rPr>
+              <a:t>index them as </a:t>
+            </a:r>
+            <a:r>
+              <a:rPr lang="en" sz="1300" b="1">
+                <a:solidFill>
+                  <a:srgbClr val="FF0000"/>
+                </a:solidFill>
+                <a:latin typeface="Calibri"/>
+                <a:ea typeface="Calibri"/>
+                <a:cs typeface="Calibri"/>
+                <a:sym typeface="Calibri"/>
+              </a:rPr>
+              <a:t>(vector_from_question, text)</a:t>
+            </a:r>
+            <a:endParaRPr sz="1300" b="1">
+              <a:solidFill>
+                <a:srgbClr val="FF0000"/>
+              </a:solidFill>
+              <a:latin typeface="Calibri"/>
+              <a:ea typeface="Calibri"/>
+              <a:cs typeface="Calibri"/>
+              <a:sym typeface="Calibri"/>
+            </a:endParaRPr>
+          </a:p>
+          <a:p>
+            <a:pPr marL="0" lvl="0" indent="0" algn="l" rtl="0">
+              <a:spcBef>
+                <a:spcPts val="0"/>
+              </a:spcBef>
+              <a:spcAft>
+                <a:spcPts val="0"/>
+              </a:spcAft>
+              <a:buNone/>
+            </a:pPr>
+            <a:endParaRPr sz="1300">
+              <a:latin typeface="Calibri"/>
+              <a:ea typeface="Calibri"/>
+              <a:cs typeface="Calibri"/>
+              <a:sym typeface="Calibri"/>
+            </a:endParaRPr>
+          </a:p>
+          <a:p>
+            <a:pPr marL="0" lvl="0" indent="0" algn="l" rtl="0">
+              <a:spcBef>
+                <a:spcPts val="0"/>
+              </a:spcBef>
+              <a:spcAft>
+                <a:spcPts val="0"/>
+              </a:spcAft>
+              <a:buNone/>
+            </a:pPr>
+            <a:r>
+              <a:rPr lang="en" sz="1300">
+                <a:latin typeface="Calibri"/>
+                <a:ea typeface="Calibri"/>
+                <a:cs typeface="Calibri"/>
+                <a:sym typeface="Calibri"/>
+              </a:rPr>
+              <a:t>You can also use hybrid approach using both methods together</a:t>
+            </a:r>
+            <a:endParaRPr sz="1300">
+              <a:latin typeface="Calibri"/>
+              <a:ea typeface="Calibri"/>
+              <a:cs typeface="Calibri"/>
+              <a:sym typeface="Calibri"/>
+            </a:endParaRPr>
+          </a:p>
+        </p:txBody>
+      </p:sp>
+      <p:sp>
+        <p:nvSpPr>
+          <p:cNvPr id="222" name="Google Shape;222;p28"/>
+          <p:cNvSpPr txBox="1"/>
+          <p:nvPr/>
+        </p:nvSpPr>
+        <p:spPr>
+          <a:xfrm>
+            <a:off x="0" y="0"/>
+            <a:ext cx="2237700" cy="461700"/>
+          </a:xfrm>
+          <a:prstGeom prst="rect">
+            <a:avLst/>
+          </a:prstGeom>
+          <a:noFill/>
+          <a:ln>
+            <a:noFill/>
+          </a:ln>
+        </p:spPr>
+        <p:txBody>
+          <a:bodyPr spcFirstLastPara="1" wrap="square" lIns="91425" tIns="91425" rIns="91425" bIns="91425" anchor="t" anchorCtr="0">
+            <a:spAutoFit/>
+          </a:bodyPr>
+          <a:lstStyle/>
+          <a:p>
+            <a:pPr marL="0" lvl="0" indent="0" algn="l" rtl="0">
+              <a:spcBef>
+                <a:spcPts val="0"/>
+              </a:spcBef>
+              <a:spcAft>
+                <a:spcPts val="0"/>
+              </a:spcAft>
+              <a:buNone/>
+            </a:pPr>
+            <a:r>
+              <a:rPr lang="en" sz="1800" b="1">
+                <a:solidFill>
+                  <a:srgbClr val="0F1419"/>
+                </a:solidFill>
+                <a:highlight>
+                  <a:srgbClr val="FFFFFF"/>
+                </a:highlight>
+                <a:latin typeface="Calibri"/>
+                <a:ea typeface="Calibri"/>
+                <a:cs typeface="Calibri"/>
+                <a:sym typeface="Calibri"/>
+              </a:rPr>
+              <a:t>Make RAG Better</a:t>
+            </a:r>
+            <a:endParaRPr sz="1800" b="1">
+              <a:latin typeface="Calibri"/>
+              <a:ea typeface="Calibri"/>
+              <a:cs typeface="Calibri"/>
+              <a:sym typeface="Calibri"/>
+            </a:endParaRPr>
+          </a:p>
+        </p:txBody>
+      </p:sp>
+      <p:pic>
+        <p:nvPicPr>
+          <p:cNvPr id="223" name="Google Shape;223;p28"/>
+          <p:cNvPicPr preferRelativeResize="0"/>
+          <p:nvPr/>
+        </p:nvPicPr>
+        <p:blipFill>
+          <a:blip r:embed="rId3" cstate="email">
+            <a:alphaModFix/>
+            <a:extLst>
+              <a:ext uri="{28A0092B-C50C-407E-A947-70E740481C1C}">
+                <a14:useLocalDpi xmlns:a14="http://schemas.microsoft.com/office/drawing/2010/main"/>
+              </a:ext>
+            </a:extLst>
+          </a:blip>
+          <a:stretch>
+            <a:fillRect/>
+          </a:stretch>
+        </p:blipFill>
+        <p:spPr>
+          <a:xfrm>
+            <a:off x="4585425" y="1167446"/>
+            <a:ext cx="524550" cy="641682"/>
+          </a:xfrm>
+          <a:prstGeom prst="rect">
+            <a:avLst/>
+          </a:prstGeom>
+          <a:noFill/>
+          <a:ln>
+            <a:noFill/>
+          </a:ln>
+        </p:spPr>
+      </p:pic>
+      <p:pic>
+        <p:nvPicPr>
+          <p:cNvPr id="224" name="Google Shape;224;p28"/>
+          <p:cNvPicPr preferRelativeResize="0"/>
+          <p:nvPr/>
+        </p:nvPicPr>
+        <p:blipFill>
+          <a:blip r:embed="rId4" cstate="email">
+            <a:alphaModFix/>
+            <a:extLst>
+              <a:ext uri="{28A0092B-C50C-407E-A947-70E740481C1C}">
+                <a14:useLocalDpi xmlns:a14="http://schemas.microsoft.com/office/drawing/2010/main"/>
+              </a:ext>
+            </a:extLst>
+          </a:blip>
+          <a:stretch>
+            <a:fillRect/>
+          </a:stretch>
+        </p:blipFill>
+        <p:spPr>
+          <a:xfrm>
+            <a:off x="8471324" y="804725"/>
+            <a:ext cx="573350" cy="1153600"/>
+          </a:xfrm>
+          <a:prstGeom prst="rect">
+            <a:avLst/>
+          </a:prstGeom>
+          <a:noFill/>
+          <a:ln>
+            <a:noFill/>
+          </a:ln>
+        </p:spPr>
+      </p:pic>
+      <p:sp>
+        <p:nvSpPr>
+          <p:cNvPr id="225" name="Google Shape;225;p28"/>
+          <p:cNvSpPr txBox="1"/>
+          <p:nvPr/>
+        </p:nvSpPr>
+        <p:spPr>
+          <a:xfrm>
+            <a:off x="6123332" y="776075"/>
+            <a:ext cx="987300" cy="732600"/>
+          </a:xfrm>
+          <a:prstGeom prst="rect">
+            <a:avLst/>
+          </a:prstGeom>
+          <a:solidFill>
+            <a:srgbClr val="FFF2CC"/>
+          </a:solidFill>
+          <a:ln w="9525" cap="flat" cmpd="sng">
+            <a:solidFill>
+              <a:srgbClr val="FF0000"/>
+            </a:solidFill>
+            <a:prstDash val="solid"/>
+            <a:round/>
+            <a:headEnd type="none" w="sm" len="sm"/>
+            <a:tailEnd type="none" w="sm" len="sm"/>
+          </a:ln>
+        </p:spPr>
+        <p:txBody>
+          <a:bodyPr spcFirstLastPara="1" wrap="square" lIns="27425" tIns="27425" rIns="27425" bIns="27425" anchor="t" anchorCtr="0">
+            <a:spAutoFit/>
+          </a:bodyPr>
+          <a:lstStyle/>
+          <a:p>
+            <a:pPr marL="0" lvl="0" indent="0" algn="l" rtl="0">
+              <a:spcBef>
+                <a:spcPts val="0"/>
+              </a:spcBef>
+              <a:spcAft>
+                <a:spcPts val="0"/>
+              </a:spcAft>
+              <a:buNone/>
+            </a:pPr>
+            <a:r>
+              <a:rPr lang="en" sz="1100" b="1">
+                <a:solidFill>
+                  <a:srgbClr val="FF0000"/>
+                </a:solidFill>
+                <a:latin typeface="Calibri"/>
+                <a:ea typeface="Calibri"/>
+                <a:cs typeface="Calibri"/>
+                <a:sym typeface="Calibri"/>
+              </a:rPr>
+              <a:t>LLM Agent</a:t>
+            </a:r>
+            <a:br>
+              <a:rPr lang="en" sz="1100">
+                <a:latin typeface="Calibri"/>
+                <a:ea typeface="Calibri"/>
+                <a:cs typeface="Calibri"/>
+                <a:sym typeface="Calibri"/>
+              </a:rPr>
+            </a:br>
+            <a:r>
+              <a:rPr lang="en" sz="1100">
+                <a:latin typeface="Calibri"/>
+                <a:ea typeface="Calibri"/>
+                <a:cs typeface="Calibri"/>
+                <a:sym typeface="Calibri"/>
+              </a:rPr>
+              <a:t>Classifier,</a:t>
+            </a:r>
+            <a:endParaRPr sz="1100">
+              <a:latin typeface="Calibri"/>
+              <a:ea typeface="Calibri"/>
+              <a:cs typeface="Calibri"/>
+              <a:sym typeface="Calibri"/>
+            </a:endParaRPr>
+          </a:p>
+          <a:p>
+            <a:pPr marL="0" lvl="0" indent="0" algn="l" rtl="0">
+              <a:spcBef>
+                <a:spcPts val="0"/>
+              </a:spcBef>
+              <a:spcAft>
+                <a:spcPts val="0"/>
+              </a:spcAft>
+              <a:buNone/>
+            </a:pPr>
+            <a:r>
+              <a:rPr lang="en" sz="1100">
+                <a:latin typeface="Calibri"/>
+                <a:ea typeface="Calibri"/>
+                <a:cs typeface="Calibri"/>
+                <a:sym typeface="Calibri"/>
+              </a:rPr>
+              <a:t>may ask to refine question</a:t>
+            </a:r>
+            <a:endParaRPr sz="1100">
+              <a:latin typeface="Calibri"/>
+              <a:ea typeface="Calibri"/>
+              <a:cs typeface="Calibri"/>
+              <a:sym typeface="Calibri"/>
+            </a:endParaRPr>
+          </a:p>
+        </p:txBody>
+      </p:sp>
+      <p:sp>
+        <p:nvSpPr>
+          <p:cNvPr id="226" name="Google Shape;226;p28"/>
+          <p:cNvSpPr txBox="1"/>
+          <p:nvPr/>
+        </p:nvSpPr>
+        <p:spPr>
+          <a:xfrm>
+            <a:off x="7425400" y="776063"/>
+            <a:ext cx="717600" cy="732600"/>
+          </a:xfrm>
+          <a:prstGeom prst="rect">
+            <a:avLst/>
+          </a:prstGeom>
+          <a:solidFill>
+            <a:srgbClr val="FFF2CC"/>
+          </a:solidFill>
+          <a:ln w="9525" cap="flat" cmpd="sng">
+            <a:solidFill>
+              <a:srgbClr val="FF0000"/>
+            </a:solidFill>
+            <a:prstDash val="solid"/>
+            <a:round/>
+            <a:headEnd type="none" w="sm" len="sm"/>
+            <a:tailEnd type="none" w="sm" len="sm"/>
+          </a:ln>
+        </p:spPr>
+        <p:txBody>
+          <a:bodyPr spcFirstLastPara="1" wrap="square" lIns="27425" tIns="27425" rIns="27425" bIns="27425" anchor="t" anchorCtr="0">
+            <a:spAutoFit/>
+          </a:bodyPr>
+          <a:lstStyle/>
+          <a:p>
+            <a:pPr marL="0" lvl="0" indent="0" algn="l" rtl="0">
+              <a:spcBef>
+                <a:spcPts val="0"/>
+              </a:spcBef>
+              <a:spcAft>
+                <a:spcPts val="0"/>
+              </a:spcAft>
+              <a:buNone/>
+            </a:pPr>
+            <a:r>
+              <a:rPr lang="en" sz="1100" b="1">
+                <a:solidFill>
+                  <a:srgbClr val="FF0000"/>
+                </a:solidFill>
+                <a:latin typeface="Calibri"/>
+                <a:ea typeface="Calibri"/>
+                <a:cs typeface="Calibri"/>
+                <a:sym typeface="Calibri"/>
+              </a:rPr>
+              <a:t>LLM Agent</a:t>
+            </a:r>
+            <a:br>
+              <a:rPr lang="en" sz="1100">
+                <a:latin typeface="Calibri"/>
+                <a:ea typeface="Calibri"/>
+                <a:cs typeface="Calibri"/>
+                <a:sym typeface="Calibri"/>
+              </a:rPr>
+            </a:br>
+            <a:r>
+              <a:rPr lang="en" sz="1100">
+                <a:latin typeface="Calibri"/>
+                <a:ea typeface="Calibri"/>
+                <a:cs typeface="Calibri"/>
+                <a:sym typeface="Calibri"/>
+              </a:rPr>
+              <a:t>question</a:t>
+            </a:r>
+            <a:endParaRPr sz="1100">
+              <a:latin typeface="Calibri"/>
+              <a:ea typeface="Calibri"/>
+              <a:cs typeface="Calibri"/>
+              <a:sym typeface="Calibri"/>
+            </a:endParaRPr>
+          </a:p>
+          <a:p>
+            <a:pPr marL="0" lvl="0" indent="0" algn="l" rtl="0">
+              <a:spcBef>
+                <a:spcPts val="0"/>
+              </a:spcBef>
+              <a:spcAft>
+                <a:spcPts val="0"/>
+              </a:spcAft>
+              <a:buNone/>
+            </a:pPr>
+            <a:r>
+              <a:rPr lang="en" sz="1100">
+                <a:latin typeface="Calibri"/>
+                <a:ea typeface="Calibri"/>
+                <a:cs typeface="Calibri"/>
+                <a:sym typeface="Calibri"/>
+              </a:rPr>
+              <a:t>rewriter,</a:t>
+            </a:r>
+            <a:endParaRPr sz="1100">
+              <a:latin typeface="Calibri"/>
+              <a:ea typeface="Calibri"/>
+              <a:cs typeface="Calibri"/>
+              <a:sym typeface="Calibri"/>
+            </a:endParaRPr>
+          </a:p>
+          <a:p>
+            <a:pPr marL="0" lvl="0" indent="0" algn="l" rtl="0">
+              <a:spcBef>
+                <a:spcPts val="0"/>
+              </a:spcBef>
+              <a:spcAft>
+                <a:spcPts val="0"/>
+              </a:spcAft>
+              <a:buNone/>
+            </a:pPr>
+            <a:r>
+              <a:rPr lang="en" sz="1100">
+                <a:latin typeface="Calibri"/>
+                <a:ea typeface="Calibri"/>
+                <a:cs typeface="Calibri"/>
+                <a:sym typeface="Calibri"/>
+              </a:rPr>
+              <a:t>embedding</a:t>
+            </a:r>
+            <a:endParaRPr sz="1100">
+              <a:latin typeface="Calibri"/>
+              <a:ea typeface="Calibri"/>
+              <a:cs typeface="Calibri"/>
+              <a:sym typeface="Calibri"/>
+            </a:endParaRPr>
+          </a:p>
+        </p:txBody>
+      </p:sp>
+      <p:sp>
+        <p:nvSpPr>
+          <p:cNvPr id="227" name="Google Shape;227;p28"/>
+          <p:cNvSpPr/>
+          <p:nvPr/>
+        </p:nvSpPr>
+        <p:spPr>
+          <a:xfrm>
+            <a:off x="5864143" y="1041713"/>
+            <a:ext cx="201300" cy="201300"/>
+          </a:xfrm>
+          <a:prstGeom prst="rightArrow">
+            <a:avLst>
+              <a:gd name="adj1" fmla="val 50000"/>
+              <a:gd name="adj2" fmla="val 50000"/>
+            </a:avLst>
+          </a:prstGeom>
+          <a:solidFill>
+            <a:schemeClr val="lt2"/>
+          </a:solidFill>
+          <a:ln w="9525" cap="flat" cmpd="sng">
+            <a:solidFill>
+              <a:schemeClr val="dk2"/>
+            </a:solidFill>
+            <a:prstDash val="solid"/>
+            <a:round/>
+            <a:headEnd type="none" w="sm" len="sm"/>
+            <a:tailEnd type="none" w="sm" len="sm"/>
+          </a:ln>
+        </p:spPr>
+        <p:txBody>
+          <a:bodyPr spcFirstLastPara="1" wrap="square" lIns="91425" tIns="91425" rIns="91425" bIns="91425" anchor="ctr" anchorCtr="0">
+            <a:noAutofit/>
+          </a:bodyPr>
+          <a:lstStyle/>
+          <a:p>
+            <a:pPr marL="0" lvl="0" indent="0" algn="ctr" rtl="0">
+              <a:spcBef>
+                <a:spcPts val="0"/>
+              </a:spcBef>
+              <a:spcAft>
+                <a:spcPts val="0"/>
+              </a:spcAft>
+              <a:buNone/>
+            </a:pPr>
+            <a:endParaRPr/>
+          </a:p>
+        </p:txBody>
+      </p:sp>
+      <p:sp>
+        <p:nvSpPr>
+          <p:cNvPr id="228" name="Google Shape;228;p28"/>
+          <p:cNvSpPr/>
+          <p:nvPr/>
+        </p:nvSpPr>
+        <p:spPr>
+          <a:xfrm>
+            <a:off x="7157413" y="1041713"/>
+            <a:ext cx="201300" cy="201300"/>
+          </a:xfrm>
+          <a:prstGeom prst="rightArrow">
+            <a:avLst>
+              <a:gd name="adj1" fmla="val 50000"/>
+              <a:gd name="adj2" fmla="val 50000"/>
+            </a:avLst>
+          </a:prstGeom>
+          <a:solidFill>
+            <a:schemeClr val="lt2"/>
+          </a:solidFill>
+          <a:ln w="9525" cap="flat" cmpd="sng">
+            <a:solidFill>
+              <a:schemeClr val="dk2"/>
+            </a:solidFill>
+            <a:prstDash val="solid"/>
+            <a:round/>
+            <a:headEnd type="none" w="sm" len="sm"/>
+            <a:tailEnd type="none" w="sm" len="sm"/>
+          </a:ln>
+        </p:spPr>
+        <p:txBody>
+          <a:bodyPr spcFirstLastPara="1" wrap="square" lIns="91425" tIns="91425" rIns="91425" bIns="91425" anchor="ctr" anchorCtr="0">
+            <a:noAutofit/>
+          </a:bodyPr>
+          <a:lstStyle/>
+          <a:p>
+            <a:pPr marL="0" lvl="0" indent="0" algn="ctr" rtl="0">
+              <a:spcBef>
+                <a:spcPts val="0"/>
+              </a:spcBef>
+              <a:spcAft>
+                <a:spcPts val="0"/>
+              </a:spcAft>
+              <a:buNone/>
+            </a:pPr>
+            <a:endParaRPr/>
+          </a:p>
+        </p:txBody>
+      </p:sp>
+      <p:sp>
+        <p:nvSpPr>
+          <p:cNvPr id="229" name="Google Shape;229;p28"/>
+          <p:cNvSpPr/>
+          <p:nvPr/>
+        </p:nvSpPr>
+        <p:spPr>
+          <a:xfrm>
+            <a:off x="8209675" y="1041713"/>
+            <a:ext cx="201300" cy="201300"/>
+          </a:xfrm>
+          <a:prstGeom prst="rightArrow">
+            <a:avLst>
+              <a:gd name="adj1" fmla="val 50000"/>
+              <a:gd name="adj2" fmla="val 50000"/>
+            </a:avLst>
+          </a:prstGeom>
+          <a:solidFill>
+            <a:schemeClr val="lt2"/>
+          </a:solidFill>
+          <a:ln w="9525" cap="flat" cmpd="sng">
+            <a:solidFill>
+              <a:schemeClr val="dk2"/>
+            </a:solidFill>
+            <a:prstDash val="solid"/>
+            <a:round/>
+            <a:headEnd type="none" w="sm" len="sm"/>
+            <a:tailEnd type="none" w="sm" len="sm"/>
+          </a:ln>
+        </p:spPr>
+        <p:txBody>
+          <a:bodyPr spcFirstLastPara="1" wrap="square" lIns="91425" tIns="91425" rIns="91425" bIns="91425" anchor="ctr" anchorCtr="0">
+            <a:noAutofit/>
+          </a:bodyPr>
+          <a:lstStyle/>
+          <a:p>
+            <a:pPr marL="0" lvl="0" indent="0" algn="ctr" rtl="0">
+              <a:spcBef>
+                <a:spcPts val="0"/>
+              </a:spcBef>
+              <a:spcAft>
+                <a:spcPts val="0"/>
+              </a:spcAft>
+              <a:buNone/>
+            </a:pPr>
+            <a:endParaRPr/>
+          </a:p>
+        </p:txBody>
+      </p:sp>
+      <p:sp>
+        <p:nvSpPr>
+          <p:cNvPr id="230" name="Google Shape;230;p28"/>
+          <p:cNvSpPr/>
+          <p:nvPr/>
+        </p:nvSpPr>
+        <p:spPr>
+          <a:xfrm rot="10800000">
+            <a:off x="8184525" y="1689725"/>
+            <a:ext cx="201300" cy="201300"/>
+          </a:xfrm>
+          <a:prstGeom prst="rightArrow">
+            <a:avLst>
+              <a:gd name="adj1" fmla="val 50000"/>
+              <a:gd name="adj2" fmla="val 50000"/>
+            </a:avLst>
+          </a:prstGeom>
+          <a:solidFill>
+            <a:schemeClr val="lt2"/>
+          </a:solidFill>
+          <a:ln w="9525" cap="flat" cmpd="sng">
+            <a:solidFill>
+              <a:schemeClr val="dk2"/>
+            </a:solidFill>
+            <a:prstDash val="solid"/>
+            <a:round/>
+            <a:headEnd type="none" w="sm" len="sm"/>
+            <a:tailEnd type="none" w="sm" len="sm"/>
+          </a:ln>
+        </p:spPr>
+        <p:txBody>
+          <a:bodyPr spcFirstLastPara="1" wrap="square" lIns="91425" tIns="91425" rIns="91425" bIns="91425" anchor="ctr" anchorCtr="0">
+            <a:noAutofit/>
+          </a:bodyPr>
+          <a:lstStyle/>
+          <a:p>
+            <a:pPr marL="0" lvl="0" indent="0" algn="ctr" rtl="0">
+              <a:spcBef>
+                <a:spcPts val="0"/>
+              </a:spcBef>
+              <a:spcAft>
+                <a:spcPts val="0"/>
+              </a:spcAft>
+              <a:buNone/>
+            </a:pPr>
+            <a:endParaRPr/>
+          </a:p>
+        </p:txBody>
+      </p:sp>
+      <p:sp>
+        <p:nvSpPr>
+          <p:cNvPr id="231" name="Google Shape;231;p28"/>
+          <p:cNvSpPr txBox="1"/>
+          <p:nvPr/>
+        </p:nvSpPr>
+        <p:spPr>
+          <a:xfrm>
+            <a:off x="7421494" y="1542075"/>
+            <a:ext cx="717600" cy="563400"/>
+          </a:xfrm>
+          <a:prstGeom prst="rect">
+            <a:avLst/>
+          </a:prstGeom>
+          <a:solidFill>
+            <a:srgbClr val="FFF2CC"/>
+          </a:solidFill>
+          <a:ln w="9525" cap="flat" cmpd="sng">
+            <a:solidFill>
+              <a:srgbClr val="FF0000"/>
+            </a:solidFill>
+            <a:prstDash val="solid"/>
+            <a:round/>
+            <a:headEnd type="none" w="sm" len="sm"/>
+            <a:tailEnd type="none" w="sm" len="sm"/>
+          </a:ln>
+        </p:spPr>
+        <p:txBody>
+          <a:bodyPr spcFirstLastPara="1" wrap="square" lIns="27425" tIns="27425" rIns="27425" bIns="27425" anchor="t" anchorCtr="0">
+            <a:spAutoFit/>
+          </a:bodyPr>
+          <a:lstStyle/>
+          <a:p>
+            <a:pPr marL="0" lvl="0" indent="0" algn="l" rtl="0">
+              <a:spcBef>
+                <a:spcPts val="0"/>
+              </a:spcBef>
+              <a:spcAft>
+                <a:spcPts val="0"/>
+              </a:spcAft>
+              <a:buNone/>
+            </a:pPr>
+            <a:r>
+              <a:rPr lang="en" sz="1100" b="1">
+                <a:solidFill>
+                  <a:srgbClr val="FF0000"/>
+                </a:solidFill>
+                <a:latin typeface="Calibri"/>
+                <a:ea typeface="Calibri"/>
+                <a:cs typeface="Calibri"/>
+                <a:sym typeface="Calibri"/>
+              </a:rPr>
+              <a:t>LLM Agent</a:t>
+            </a:r>
+            <a:br>
+              <a:rPr lang="en" sz="1100">
+                <a:latin typeface="Calibri"/>
+                <a:ea typeface="Calibri"/>
+                <a:cs typeface="Calibri"/>
+                <a:sym typeface="Calibri"/>
+              </a:rPr>
+            </a:br>
+            <a:r>
+              <a:rPr lang="en" sz="1100">
+                <a:latin typeface="Calibri"/>
+                <a:ea typeface="Calibri"/>
+                <a:cs typeface="Calibri"/>
+                <a:sym typeface="Calibri"/>
+              </a:rPr>
+              <a:t>semantic re-runking</a:t>
+            </a:r>
+            <a:endParaRPr sz="1100">
+              <a:latin typeface="Calibri"/>
+              <a:ea typeface="Calibri"/>
+              <a:cs typeface="Calibri"/>
+              <a:sym typeface="Calibri"/>
+            </a:endParaRPr>
+          </a:p>
+        </p:txBody>
+      </p:sp>
+      <p:sp>
+        <p:nvSpPr>
+          <p:cNvPr id="232" name="Google Shape;232;p28"/>
+          <p:cNvSpPr/>
+          <p:nvPr/>
+        </p:nvSpPr>
+        <p:spPr>
+          <a:xfrm rot="10800000">
+            <a:off x="7132775" y="1689725"/>
+            <a:ext cx="201300" cy="201300"/>
+          </a:xfrm>
+          <a:prstGeom prst="rightArrow">
+            <a:avLst>
+              <a:gd name="adj1" fmla="val 50000"/>
+              <a:gd name="adj2" fmla="val 50000"/>
+            </a:avLst>
+          </a:prstGeom>
+          <a:solidFill>
+            <a:schemeClr val="lt2"/>
+          </a:solidFill>
+          <a:ln w="9525" cap="flat" cmpd="sng">
+            <a:solidFill>
+              <a:schemeClr val="dk2"/>
+            </a:solidFill>
+            <a:prstDash val="solid"/>
+            <a:round/>
+            <a:headEnd type="none" w="sm" len="sm"/>
+            <a:tailEnd type="none" w="sm" len="sm"/>
+          </a:ln>
+        </p:spPr>
+        <p:txBody>
+          <a:bodyPr spcFirstLastPara="1" wrap="square" lIns="91425" tIns="91425" rIns="91425" bIns="91425" anchor="ctr" anchorCtr="0">
+            <a:noAutofit/>
+          </a:bodyPr>
+          <a:lstStyle/>
+          <a:p>
+            <a:pPr marL="0" lvl="0" indent="0" algn="ctr" rtl="0">
+              <a:spcBef>
+                <a:spcPts val="0"/>
+              </a:spcBef>
+              <a:spcAft>
+                <a:spcPts val="0"/>
+              </a:spcAft>
+              <a:buNone/>
+            </a:pPr>
+            <a:endParaRPr/>
+          </a:p>
+        </p:txBody>
+      </p:sp>
+      <p:sp>
+        <p:nvSpPr>
+          <p:cNvPr id="233" name="Google Shape;233;p28"/>
+          <p:cNvSpPr txBox="1"/>
+          <p:nvPr/>
+        </p:nvSpPr>
+        <p:spPr>
+          <a:xfrm>
+            <a:off x="6181744" y="1593425"/>
+            <a:ext cx="907500" cy="393900"/>
+          </a:xfrm>
+          <a:prstGeom prst="rect">
+            <a:avLst/>
+          </a:prstGeom>
+          <a:solidFill>
+            <a:srgbClr val="FFF2CC"/>
+          </a:solidFill>
+          <a:ln w="9525" cap="flat" cmpd="sng">
+            <a:solidFill>
+              <a:srgbClr val="FF0000"/>
+            </a:solidFill>
+            <a:prstDash val="solid"/>
+            <a:round/>
+            <a:headEnd type="none" w="sm" len="sm"/>
+            <a:tailEnd type="none" w="sm" len="sm"/>
+          </a:ln>
+        </p:spPr>
+        <p:txBody>
+          <a:bodyPr spcFirstLastPara="1" wrap="square" lIns="27425" tIns="27425" rIns="27425" bIns="27425" anchor="t" anchorCtr="0">
+            <a:spAutoFit/>
+          </a:bodyPr>
+          <a:lstStyle/>
+          <a:p>
+            <a:pPr marL="0" lvl="0" indent="0" algn="l" rtl="0">
+              <a:spcBef>
+                <a:spcPts val="0"/>
+              </a:spcBef>
+              <a:spcAft>
+                <a:spcPts val="0"/>
+              </a:spcAft>
+              <a:buNone/>
+            </a:pPr>
+            <a:r>
+              <a:rPr lang="en" sz="1100" b="1">
+                <a:solidFill>
+                  <a:srgbClr val="FF0000"/>
+                </a:solidFill>
+                <a:latin typeface="Calibri"/>
+                <a:ea typeface="Calibri"/>
+                <a:cs typeface="Calibri"/>
+                <a:sym typeface="Calibri"/>
+              </a:rPr>
+              <a:t>LLM Agent</a:t>
+            </a:r>
+            <a:br>
+              <a:rPr lang="en" sz="1100">
+                <a:latin typeface="Calibri"/>
+                <a:ea typeface="Calibri"/>
+                <a:cs typeface="Calibri"/>
+                <a:sym typeface="Calibri"/>
+              </a:rPr>
+            </a:br>
+            <a:r>
+              <a:rPr lang="en" sz="1100">
+                <a:latin typeface="Calibri"/>
+                <a:ea typeface="Calibri"/>
+                <a:cs typeface="Calibri"/>
+                <a:sym typeface="Calibri"/>
+              </a:rPr>
+              <a:t>summarizer</a:t>
+            </a:r>
+            <a:endParaRPr sz="1100">
+              <a:latin typeface="Calibri"/>
+              <a:ea typeface="Calibri"/>
+              <a:cs typeface="Calibri"/>
+              <a:sym typeface="Calibri"/>
+            </a:endParaRPr>
+          </a:p>
+        </p:txBody>
+      </p:sp>
+      <p:sp>
+        <p:nvSpPr>
+          <p:cNvPr id="234" name="Google Shape;234;p28"/>
+          <p:cNvSpPr/>
+          <p:nvPr/>
+        </p:nvSpPr>
+        <p:spPr>
+          <a:xfrm rot="10800000">
+            <a:off x="5818275" y="1689725"/>
+            <a:ext cx="201300" cy="201300"/>
+          </a:xfrm>
+          <a:prstGeom prst="rightArrow">
+            <a:avLst>
+              <a:gd name="adj1" fmla="val 50000"/>
+              <a:gd name="adj2" fmla="val 50000"/>
+            </a:avLst>
+          </a:prstGeom>
+          <a:solidFill>
+            <a:schemeClr val="lt2"/>
+          </a:solidFill>
+          <a:ln w="9525" cap="flat" cmpd="sng">
+            <a:solidFill>
+              <a:schemeClr val="dk2"/>
+            </a:solidFill>
+            <a:prstDash val="solid"/>
+            <a:round/>
+            <a:headEnd type="none" w="sm" len="sm"/>
+            <a:tailEnd type="none" w="sm" len="sm"/>
+          </a:ln>
+        </p:spPr>
+        <p:txBody>
+          <a:bodyPr spcFirstLastPara="1" wrap="square" lIns="91425" tIns="91425" rIns="91425" bIns="91425" anchor="ctr" anchorCtr="0">
+            <a:noAutofit/>
+          </a:bodyPr>
+          <a:lstStyle/>
+          <a:p>
+            <a:pPr marL="0" lvl="0" indent="0" algn="ctr" rtl="0">
+              <a:spcBef>
+                <a:spcPts val="0"/>
+              </a:spcBef>
+              <a:spcAft>
+                <a:spcPts val="0"/>
+              </a:spcAft>
+              <a:buNone/>
+            </a:pPr>
+            <a:endParaRPr/>
+          </a:p>
+        </p:txBody>
+      </p:sp>
+      <p:sp>
+        <p:nvSpPr>
+          <p:cNvPr id="235" name="Google Shape;235;p28"/>
+          <p:cNvSpPr txBox="1"/>
+          <p:nvPr/>
+        </p:nvSpPr>
+        <p:spPr>
+          <a:xfrm>
+            <a:off x="5179721" y="1678025"/>
+            <a:ext cx="645000" cy="224700"/>
+          </a:xfrm>
+          <a:prstGeom prst="rect">
+            <a:avLst/>
+          </a:prstGeom>
+          <a:noFill/>
+          <a:ln>
+            <a:noFill/>
+          </a:ln>
+        </p:spPr>
+        <p:txBody>
+          <a:bodyPr spcFirstLastPara="1" wrap="square" lIns="27425" tIns="27425" rIns="27425" bIns="27425" anchor="t" anchorCtr="0">
+            <a:spAutoFit/>
+          </a:bodyPr>
+          <a:lstStyle/>
+          <a:p>
+            <a:pPr marL="0" lvl="0" indent="0" algn="l" rtl="0">
+              <a:spcBef>
+                <a:spcPts val="0"/>
+              </a:spcBef>
+              <a:spcAft>
+                <a:spcPts val="0"/>
+              </a:spcAft>
+              <a:buNone/>
+            </a:pPr>
+            <a:r>
+              <a:rPr lang="en" sz="1100">
+                <a:latin typeface="Calibri"/>
+                <a:ea typeface="Calibri"/>
+                <a:cs typeface="Calibri"/>
+                <a:sym typeface="Calibri"/>
+              </a:rPr>
+              <a:t>Response</a:t>
+            </a:r>
+            <a:endParaRPr sz="1100">
+              <a:latin typeface="Calibri"/>
+              <a:ea typeface="Calibri"/>
+              <a:cs typeface="Calibri"/>
+              <a:sym typeface="Calibri"/>
+            </a:endParaRPr>
+          </a:p>
+        </p:txBody>
+      </p:sp>
+      <p:sp>
+        <p:nvSpPr>
+          <p:cNvPr id="236" name="Google Shape;236;p28"/>
+          <p:cNvSpPr txBox="1"/>
+          <p:nvPr/>
+        </p:nvSpPr>
+        <p:spPr>
+          <a:xfrm>
+            <a:off x="5250771" y="1030025"/>
+            <a:ext cx="645000" cy="224700"/>
+          </a:xfrm>
+          <a:prstGeom prst="rect">
+            <a:avLst/>
+          </a:prstGeom>
+          <a:noFill/>
+          <a:ln>
+            <a:noFill/>
+          </a:ln>
+        </p:spPr>
+        <p:txBody>
+          <a:bodyPr spcFirstLastPara="1" wrap="square" lIns="27425" tIns="27425" rIns="27425" bIns="27425" anchor="t" anchorCtr="0">
+            <a:spAutoFit/>
+          </a:bodyPr>
+          <a:lstStyle/>
+          <a:p>
+            <a:pPr marL="0" lvl="0" indent="0" algn="l" rtl="0">
+              <a:spcBef>
+                <a:spcPts val="0"/>
+              </a:spcBef>
+              <a:spcAft>
+                <a:spcPts val="0"/>
+              </a:spcAft>
+              <a:buNone/>
+            </a:pPr>
+            <a:r>
+              <a:rPr lang="en" sz="1100">
+                <a:latin typeface="Calibri"/>
+                <a:ea typeface="Calibri"/>
+                <a:cs typeface="Calibri"/>
+                <a:sym typeface="Calibri"/>
+              </a:rPr>
+              <a:t>Request</a:t>
+            </a:r>
+            <a:endParaRPr sz="1100">
+              <a:latin typeface="Calibri"/>
+              <a:ea typeface="Calibri"/>
+              <a:cs typeface="Calibri"/>
+              <a:sym typeface="Calibri"/>
+            </a:endParaRPr>
+          </a:p>
+        </p:txBody>
+      </p:sp>
+      <p:sp>
+        <p:nvSpPr>
+          <p:cNvPr id="237" name="Google Shape;237;p28"/>
+          <p:cNvSpPr txBox="1"/>
+          <p:nvPr/>
+        </p:nvSpPr>
+        <p:spPr>
+          <a:xfrm>
+            <a:off x="4677575" y="2288825"/>
+            <a:ext cx="4313400" cy="2456700"/>
+          </a:xfrm>
+          <a:prstGeom prst="rect">
+            <a:avLst/>
+          </a:prstGeom>
+          <a:solidFill>
+            <a:srgbClr val="FFF2CC"/>
+          </a:solidFill>
+          <a:ln w="9525" cap="flat" cmpd="sng">
+            <a:solidFill>
+              <a:srgbClr val="FF0000"/>
+            </a:solidFill>
+            <a:prstDash val="solid"/>
+            <a:round/>
+            <a:headEnd type="none" w="sm" len="sm"/>
+            <a:tailEnd type="none" w="sm" len="sm"/>
+          </a:ln>
+        </p:spPr>
+        <p:txBody>
+          <a:bodyPr spcFirstLastPara="1" wrap="square" lIns="27425" tIns="27425" rIns="27425" bIns="27425" anchor="t" anchorCtr="0">
+            <a:spAutoFit/>
+          </a:bodyPr>
+          <a:lstStyle/>
+          <a:p>
+            <a:pPr marL="0" lvl="0" indent="0" algn="l" rtl="0">
+              <a:spcBef>
+                <a:spcPts val="0"/>
+              </a:spcBef>
+              <a:spcAft>
+                <a:spcPts val="0"/>
+              </a:spcAft>
+              <a:buNone/>
+            </a:pPr>
+            <a:r>
+              <a:rPr lang="en" sz="1300" b="1">
+                <a:solidFill>
+                  <a:srgbClr val="FF0000"/>
+                </a:solidFill>
+                <a:latin typeface="Calibri"/>
+                <a:ea typeface="Calibri"/>
+                <a:cs typeface="Calibri"/>
+                <a:sym typeface="Calibri"/>
+              </a:rPr>
+              <a:t>Semantic re-runking:</a:t>
+            </a:r>
+            <a:endParaRPr sz="1300" b="1">
+              <a:solidFill>
+                <a:srgbClr val="FF0000"/>
+              </a:solidFill>
+              <a:latin typeface="Calibri"/>
+              <a:ea typeface="Calibri"/>
+              <a:cs typeface="Calibri"/>
+              <a:sym typeface="Calibri"/>
+            </a:endParaRPr>
+          </a:p>
+          <a:p>
+            <a:pPr marL="0" lvl="0" indent="0" algn="l" rtl="0">
+              <a:spcBef>
+                <a:spcPts val="0"/>
+              </a:spcBef>
+              <a:spcAft>
+                <a:spcPts val="0"/>
+              </a:spcAft>
+              <a:buNone/>
+            </a:pPr>
+            <a:r>
+              <a:rPr lang="en" sz="1300">
+                <a:latin typeface="Calibri"/>
+                <a:ea typeface="Calibri"/>
+                <a:cs typeface="Calibri"/>
+                <a:sym typeface="Calibri"/>
+              </a:rPr>
+              <a:t>You send question and the chunk of text to LLM - and ask it to rank the relevancy of the text to the question.</a:t>
+            </a:r>
+            <a:endParaRPr sz="1300">
+              <a:latin typeface="Calibri"/>
+              <a:ea typeface="Calibri"/>
+              <a:cs typeface="Calibri"/>
+              <a:sym typeface="Calibri"/>
+            </a:endParaRPr>
+          </a:p>
+          <a:p>
+            <a:pPr marL="0" lvl="0" indent="0" algn="l" rtl="0">
+              <a:spcBef>
+                <a:spcPts val="0"/>
+              </a:spcBef>
+              <a:spcAft>
+                <a:spcPts val="0"/>
+              </a:spcAft>
+              <a:buNone/>
+            </a:pPr>
+            <a:r>
+              <a:rPr lang="en" sz="1300">
+                <a:latin typeface="Calibri"/>
+                <a:ea typeface="Calibri"/>
+                <a:cs typeface="Calibri"/>
+                <a:sym typeface="Calibri"/>
+              </a:rPr>
+              <a:t>If your search found 10 text chunks - you can make 10 separate queries to LLM, get 10 ranks - and sort them to select the best match.</a:t>
+            </a:r>
+            <a:endParaRPr sz="1300">
+              <a:latin typeface="Calibri"/>
+              <a:ea typeface="Calibri"/>
+              <a:cs typeface="Calibri"/>
+              <a:sym typeface="Calibri"/>
+            </a:endParaRPr>
+          </a:p>
+          <a:p>
+            <a:pPr marL="0" lvl="0" indent="0" algn="l" rtl="0">
+              <a:spcBef>
+                <a:spcPts val="0"/>
+              </a:spcBef>
+              <a:spcAft>
+                <a:spcPts val="0"/>
+              </a:spcAft>
+              <a:buNone/>
+            </a:pPr>
+            <a:endParaRPr sz="1300">
+              <a:latin typeface="Calibri"/>
+              <a:ea typeface="Calibri"/>
+              <a:cs typeface="Calibri"/>
+              <a:sym typeface="Calibri"/>
+            </a:endParaRPr>
+          </a:p>
+          <a:p>
+            <a:pPr marL="0" lvl="0" indent="0" algn="l" rtl="0">
+              <a:spcBef>
+                <a:spcPts val="0"/>
+              </a:spcBef>
+              <a:spcAft>
+                <a:spcPts val="0"/>
+              </a:spcAft>
+              <a:buNone/>
+            </a:pPr>
+            <a:r>
+              <a:rPr lang="en" sz="1300">
+                <a:latin typeface="Calibri"/>
+                <a:ea typeface="Calibri"/>
+                <a:cs typeface="Calibri"/>
+                <a:sym typeface="Calibri"/>
+              </a:rPr>
+              <a:t>You can make those 10 queries in parallel (for speed).</a:t>
+            </a:r>
+            <a:endParaRPr sz="1300">
+              <a:latin typeface="Calibri"/>
+              <a:ea typeface="Calibri"/>
+              <a:cs typeface="Calibri"/>
+              <a:sym typeface="Calibri"/>
+            </a:endParaRPr>
+          </a:p>
+          <a:p>
+            <a:pPr marL="0" lvl="0" indent="0" algn="l" rtl="0">
+              <a:spcBef>
+                <a:spcPts val="0"/>
+              </a:spcBef>
+              <a:spcAft>
+                <a:spcPts val="0"/>
+              </a:spcAft>
+              <a:buNone/>
+            </a:pPr>
+            <a:endParaRPr sz="1300">
+              <a:latin typeface="Calibri"/>
+              <a:ea typeface="Calibri"/>
+              <a:cs typeface="Calibri"/>
+              <a:sym typeface="Calibri"/>
+            </a:endParaRPr>
+          </a:p>
+          <a:p>
+            <a:pPr marL="0" lvl="0" indent="0" algn="l" rtl="0">
+              <a:spcBef>
+                <a:spcPts val="0"/>
+              </a:spcBef>
+              <a:spcAft>
+                <a:spcPts val="0"/>
+              </a:spcAft>
+              <a:buNone/>
+            </a:pPr>
+            <a:r>
+              <a:rPr lang="en" sz="1300">
+                <a:latin typeface="Calibri"/>
+                <a:ea typeface="Calibri"/>
+                <a:cs typeface="Calibri"/>
+                <a:sym typeface="Calibri"/>
+              </a:rPr>
+              <a:t>Any good LLM can be used (Mixtral, for example).</a:t>
+            </a:r>
+            <a:endParaRPr sz="1300">
+              <a:latin typeface="Calibri"/>
+              <a:ea typeface="Calibri"/>
+              <a:cs typeface="Calibri"/>
+              <a:sym typeface="Calibri"/>
+            </a:endParaRPr>
+          </a:p>
+          <a:p>
+            <a:pPr marL="0" lvl="0" indent="0" algn="l" rtl="0">
+              <a:spcBef>
+                <a:spcPts val="0"/>
+              </a:spcBef>
+              <a:spcAft>
+                <a:spcPts val="0"/>
+              </a:spcAft>
+              <a:buNone/>
+            </a:pPr>
+            <a:endParaRPr sz="1300">
+              <a:latin typeface="Calibri"/>
+              <a:ea typeface="Calibri"/>
+              <a:cs typeface="Calibri"/>
+              <a:sym typeface="Calibri"/>
+            </a:endParaRPr>
+          </a:p>
+          <a:p>
+            <a:pPr marL="0" lvl="0" indent="0" algn="l" rtl="0">
+              <a:spcBef>
+                <a:spcPts val="0"/>
+              </a:spcBef>
+              <a:spcAft>
+                <a:spcPts val="0"/>
+              </a:spcAft>
+              <a:buNone/>
+            </a:pPr>
+            <a:r>
+              <a:rPr lang="en" sz="1300">
+                <a:latin typeface="Calibri"/>
+                <a:ea typeface="Calibri"/>
+                <a:cs typeface="Calibri"/>
+                <a:sym typeface="Calibri"/>
+              </a:rPr>
+              <a:t>You can program agents using LangChain or LlamaIndex</a:t>
+            </a:r>
+            <a:endParaRPr sz="1300">
+              <a:latin typeface="Calibri"/>
+              <a:ea typeface="Calibri"/>
+              <a:cs typeface="Calibri"/>
+              <a:sym typeface="Calibri"/>
+            </a:endParaRPr>
+          </a:p>
+        </p:txBody>
+      </p:sp>
+      <p:sp>
+        <p:nvSpPr>
+          <p:cNvPr id="238" name="Google Shape;238;p28"/>
+          <p:cNvSpPr txBox="1"/>
+          <p:nvPr/>
+        </p:nvSpPr>
+        <p:spPr>
+          <a:xfrm>
+            <a:off x="53350" y="3795731"/>
+            <a:ext cx="2415600" cy="1256100"/>
+          </a:xfrm>
+          <a:prstGeom prst="rect">
+            <a:avLst/>
+          </a:prstGeom>
+          <a:solidFill>
+            <a:srgbClr val="FFF2CC"/>
+          </a:solidFill>
+          <a:ln w="9525" cap="flat" cmpd="sng">
+            <a:solidFill>
+              <a:srgbClr val="FF0000"/>
+            </a:solidFill>
+            <a:prstDash val="solid"/>
+            <a:round/>
+            <a:headEnd type="none" w="sm" len="sm"/>
+            <a:tailEnd type="none" w="sm" len="sm"/>
+          </a:ln>
+        </p:spPr>
+        <p:txBody>
+          <a:bodyPr spcFirstLastPara="1" wrap="square" lIns="27425" tIns="27425" rIns="27425" bIns="27425" anchor="t" anchorCtr="0">
+            <a:spAutoFit/>
+          </a:bodyPr>
+          <a:lstStyle/>
+          <a:p>
+            <a:pPr marL="0" lvl="0" indent="0" algn="l" rtl="0">
+              <a:spcBef>
+                <a:spcPts val="0"/>
+              </a:spcBef>
+              <a:spcAft>
+                <a:spcPts val="0"/>
+              </a:spcAft>
+              <a:buNone/>
+            </a:pPr>
+            <a:r>
+              <a:rPr lang="en" sz="1300">
+                <a:latin typeface="Calibri"/>
+                <a:ea typeface="Calibri"/>
+                <a:cs typeface="Calibri"/>
+                <a:sym typeface="Calibri"/>
+              </a:rPr>
+              <a:t>Some good techniques to use:</a:t>
+            </a:r>
+            <a:endParaRPr sz="1300">
+              <a:latin typeface="Calibri"/>
+              <a:ea typeface="Calibri"/>
+              <a:cs typeface="Calibri"/>
+              <a:sym typeface="Calibri"/>
+            </a:endParaRPr>
+          </a:p>
+          <a:p>
+            <a:pPr marL="457200" lvl="0" indent="-311150" algn="l" rtl="0">
+              <a:spcBef>
+                <a:spcPts val="0"/>
+              </a:spcBef>
+              <a:spcAft>
+                <a:spcPts val="0"/>
+              </a:spcAft>
+              <a:buClr>
+                <a:schemeClr val="dk1"/>
+              </a:buClr>
+              <a:buSzPts val="1300"/>
+              <a:buFont typeface="Calibri"/>
+              <a:buChar char="●"/>
+            </a:pPr>
+            <a:r>
+              <a:rPr lang="en" sz="1300">
+                <a:solidFill>
+                  <a:schemeClr val="dk1"/>
+                </a:solidFill>
+                <a:latin typeface="Calibri"/>
+                <a:ea typeface="Calibri"/>
+                <a:cs typeface="Calibri"/>
+                <a:sym typeface="Calibri"/>
+              </a:rPr>
+              <a:t>classification step</a:t>
+            </a:r>
+            <a:endParaRPr sz="1300">
+              <a:solidFill>
+                <a:schemeClr val="dk1"/>
+              </a:solidFill>
+              <a:latin typeface="Calibri"/>
+              <a:ea typeface="Calibri"/>
+              <a:cs typeface="Calibri"/>
+              <a:sym typeface="Calibri"/>
+            </a:endParaRPr>
+          </a:p>
+          <a:p>
+            <a:pPr marL="457200" lvl="0" indent="-311150" algn="l" rtl="0">
+              <a:spcBef>
+                <a:spcPts val="0"/>
+              </a:spcBef>
+              <a:spcAft>
+                <a:spcPts val="0"/>
+              </a:spcAft>
+              <a:buClr>
+                <a:schemeClr val="dk1"/>
+              </a:buClr>
+              <a:buSzPts val="1300"/>
+              <a:buFont typeface="Calibri"/>
+              <a:buChar char="●"/>
+            </a:pPr>
+            <a:r>
+              <a:rPr lang="en" sz="1300">
+                <a:solidFill>
+                  <a:schemeClr val="dk1"/>
+                </a:solidFill>
+                <a:latin typeface="Calibri"/>
+                <a:ea typeface="Calibri"/>
+                <a:cs typeface="Calibri"/>
+                <a:sym typeface="Calibri"/>
+              </a:rPr>
+              <a:t>query expansion</a:t>
+            </a:r>
+            <a:endParaRPr sz="1300">
+              <a:solidFill>
+                <a:schemeClr val="dk1"/>
+              </a:solidFill>
+              <a:latin typeface="Calibri"/>
+              <a:ea typeface="Calibri"/>
+              <a:cs typeface="Calibri"/>
+              <a:sym typeface="Calibri"/>
+            </a:endParaRPr>
+          </a:p>
+          <a:p>
+            <a:pPr marL="457200" lvl="0" indent="-311150" algn="l" rtl="0">
+              <a:spcBef>
+                <a:spcPts val="0"/>
+              </a:spcBef>
+              <a:spcAft>
+                <a:spcPts val="0"/>
+              </a:spcAft>
+              <a:buSzPts val="1300"/>
+              <a:buFont typeface="Calibri"/>
+              <a:buChar char="●"/>
+            </a:pPr>
+            <a:r>
+              <a:rPr lang="en" sz="1300">
+                <a:latin typeface="Calibri"/>
+                <a:ea typeface="Calibri"/>
+                <a:cs typeface="Calibri"/>
+                <a:sym typeface="Calibri"/>
+              </a:rPr>
+              <a:t>re-ranking</a:t>
+            </a:r>
+            <a:endParaRPr sz="1300">
+              <a:latin typeface="Calibri"/>
+              <a:ea typeface="Calibri"/>
+              <a:cs typeface="Calibri"/>
+              <a:sym typeface="Calibri"/>
+            </a:endParaRPr>
+          </a:p>
+          <a:p>
+            <a:pPr marL="457200" lvl="0" indent="-311150" algn="l" rtl="0">
+              <a:spcBef>
+                <a:spcPts val="0"/>
+              </a:spcBef>
+              <a:spcAft>
+                <a:spcPts val="0"/>
+              </a:spcAft>
+              <a:buSzPts val="1300"/>
+              <a:buFont typeface="Calibri"/>
+              <a:buChar char="●"/>
+            </a:pPr>
+            <a:r>
+              <a:rPr lang="en" sz="1300">
+                <a:latin typeface="Calibri"/>
+                <a:ea typeface="Calibri"/>
+                <a:cs typeface="Calibri"/>
+                <a:sym typeface="Calibri"/>
+              </a:rPr>
+              <a:t>prompt engineering</a:t>
+            </a:r>
+            <a:endParaRPr sz="1300">
+              <a:latin typeface="Calibri"/>
+              <a:ea typeface="Calibri"/>
+              <a:cs typeface="Calibri"/>
+              <a:sym typeface="Calibri"/>
+            </a:endParaRPr>
+          </a:p>
+          <a:p>
+            <a:pPr marL="457200" lvl="0" indent="-311150" algn="l" rtl="0">
+              <a:spcBef>
+                <a:spcPts val="0"/>
+              </a:spcBef>
+              <a:spcAft>
+                <a:spcPts val="0"/>
+              </a:spcAft>
+              <a:buSzPts val="1300"/>
+              <a:buFont typeface="Calibri"/>
+              <a:buChar char="●"/>
+            </a:pPr>
+            <a:r>
+              <a:rPr lang="en" sz="1300">
+                <a:latin typeface="Calibri"/>
+                <a:ea typeface="Calibri"/>
+                <a:cs typeface="Calibri"/>
+                <a:sym typeface="Calibri"/>
+              </a:rPr>
+              <a:t>tool use</a:t>
+            </a:r>
+            <a:endParaRPr sz="1300">
+              <a:latin typeface="Calibri"/>
+              <a:ea typeface="Calibri"/>
+              <a:cs typeface="Calibri"/>
+              <a:sym typeface="Calibri"/>
+            </a:endParaRPr>
+          </a:p>
+        </p:txBody>
+      </p:sp>
+    </p:spTree>
+  </p:cSld>
+  <p:clrMapOvr>
+    <a:masterClrMapping/>
+  </p:clrMapOvr>
+</p:sld>
+</file>
+
+<file path=ppt/slides/slide16.xml><?xml version="1.0" encoding="utf-8"?>
+<p:sld xmlns:a="http://schemas.openxmlformats.org/drawingml/2006/main" xmlns:r="http://schemas.openxmlformats.org/officeDocument/2006/relationships" xmlns:p="http://schemas.openxmlformats.org/presentationml/2006/main">
+  <p:cSld>
+    <p:spTree>
+      <p:nvGrpSpPr>
+        <p:cNvPr id="1" name="Shape 242"/>
+        <p:cNvGrpSpPr/>
+        <p:nvPr/>
+      </p:nvGrpSpPr>
+      <p:grpSpPr>
+        <a:xfrm>
+          <a:off x="0" y="0"/>
+          <a:ext cx="0" cy="0"/>
+          <a:chOff x="0" y="0"/>
+          <a:chExt cx="0" cy="0"/>
+        </a:xfrm>
+      </p:grpSpPr>
+      <p:sp>
+        <p:nvSpPr>
+          <p:cNvPr id="243" name="Google Shape;243;p29"/>
           <p:cNvSpPr txBox="1"/>
           <p:nvPr/>
         </p:nvSpPr>
@@ -15572,7 +18003,7 @@
       </p:sp>
       <p:sp>
         <p:nvSpPr>
-          <p:cNvPr id="218" name="Google Shape;218;p27"/>
+          <p:cNvPr id="244" name="Google Shape;244;p29"/>
           <p:cNvSpPr txBox="1"/>
           <p:nvPr/>
         </p:nvSpPr>
@@ -15630,7 +18061,7 @@
       </p:sp>
       <p:sp>
         <p:nvSpPr>
-          <p:cNvPr id="219" name="Google Shape;219;p27"/>
+          <p:cNvPr id="245" name="Google Shape;245;p29"/>
           <p:cNvSpPr txBox="1"/>
           <p:nvPr/>
         </p:nvSpPr>
@@ -16320,7 +18751,7 @@
       </p:sp>
       <p:pic>
         <p:nvPicPr>
-          <p:cNvPr id="220" name="Google Shape;220;p27"/>
+          <p:cNvPr id="246" name="Google Shape;246;p29"/>
           <p:cNvPicPr preferRelativeResize="0"/>
           <p:nvPr/>
         </p:nvPicPr>
@@ -16353,7 +18784,7 @@
       </p:pic>
       <p:pic>
         <p:nvPicPr>
-          <p:cNvPr id="221" name="Google Shape;221;p27"/>
+          <p:cNvPr id="247" name="Google Shape;247;p29"/>
           <p:cNvPicPr preferRelativeResize="0"/>
           <p:nvPr/>
         </p:nvPicPr>
@@ -16392,12 +18823,12 @@
 </p:sld>
 </file>
 
-<file path=ppt/slides/slide16.xml><?xml version="1.0" encoding="utf-8"?>
+<file path=ppt/slides/slide17.xml><?xml version="1.0" encoding="utf-8"?>
 <p:sld xmlns:a="http://schemas.openxmlformats.org/drawingml/2006/main" xmlns:r="http://schemas.openxmlformats.org/officeDocument/2006/relationships" xmlns:p="http://schemas.openxmlformats.org/presentationml/2006/main">
   <p:cSld>
     <p:spTree>
       <p:nvGrpSpPr>
-        <p:cNvPr id="1" name="Shape 225"/>
+        <p:cNvPr id="1" name="Shape 251"/>
         <p:cNvGrpSpPr/>
         <p:nvPr/>
       </p:nvGrpSpPr>
@@ -16411,7 +18842,7 @@
       </p:grpSpPr>
       <p:sp>
         <p:nvSpPr>
-          <p:cNvPr id="226" name="Google Shape;226;p28"/>
+          <p:cNvPr id="252" name="Google Shape;252;p30"/>
           <p:cNvSpPr txBox="1"/>
           <p:nvPr/>
         </p:nvSpPr>
@@ -16916,7 +19347,7 @@
       </p:sp>
       <p:sp>
         <p:nvSpPr>
-          <p:cNvPr id="227" name="Google Shape;227;p28"/>
+          <p:cNvPr id="253" name="Google Shape;253;p30"/>
           <p:cNvSpPr txBox="1"/>
           <p:nvPr/>
         </p:nvSpPr>
@@ -16974,7 +19405,7 @@
       </p:sp>
       <p:pic>
         <p:nvPicPr>
-          <p:cNvPr id="228" name="Google Shape;228;p28"/>
+          <p:cNvPr id="254" name="Google Shape;254;p30"/>
           <p:cNvPicPr preferRelativeResize="0"/>
           <p:nvPr/>
         </p:nvPicPr>
@@ -17019,12 +19450,12 @@
 </p:sld>
 </file>
 
-<file path=ppt/slides/slide17.xml><?xml version="1.0" encoding="utf-8"?>
+<file path=ppt/slides/slide18.xml><?xml version="1.0" encoding="utf-8"?>
 <p:sld xmlns:a="http://schemas.openxmlformats.org/drawingml/2006/main" xmlns:r="http://schemas.openxmlformats.org/officeDocument/2006/relationships" xmlns:p="http://schemas.openxmlformats.org/presentationml/2006/main">
   <p:cSld>
     <p:spTree>
       <p:nvGrpSpPr>
-        <p:cNvPr id="1" name="Shape 232"/>
+        <p:cNvPr id="1" name="Shape 258"/>
         <p:cNvGrpSpPr/>
         <p:nvPr/>
       </p:nvGrpSpPr>
@@ -17038,7 +19469,7 @@
       </p:grpSpPr>
       <p:sp>
         <p:nvSpPr>
-          <p:cNvPr id="233" name="Google Shape;233;p29"/>
+          <p:cNvPr id="259" name="Google Shape;259;p31"/>
           <p:cNvSpPr txBox="1"/>
           <p:nvPr/>
         </p:nvSpPr>
@@ -17189,7 +19620,7 @@
       </p:sp>
       <p:sp>
         <p:nvSpPr>
-          <p:cNvPr id="234" name="Google Shape;234;p29"/>
+          <p:cNvPr id="260" name="Google Shape;260;p31"/>
           <p:cNvSpPr txBox="1"/>
           <p:nvPr/>
         </p:nvSpPr>
@@ -17247,7 +19678,7 @@
       </p:sp>
       <p:pic>
         <p:nvPicPr>
-          <p:cNvPr id="235" name="Google Shape;235;p29"/>
+          <p:cNvPr id="261" name="Google Shape;261;p31"/>
           <p:cNvPicPr preferRelativeResize="0"/>
           <p:nvPr/>
         </p:nvPicPr>
@@ -17286,7 +19717,7 @@
       </p:pic>
       <p:pic>
         <p:nvPicPr>
-          <p:cNvPr id="236" name="Google Shape;236;p29"/>
+          <p:cNvPr id="262" name="Google Shape;262;p31"/>
           <p:cNvPicPr preferRelativeResize="0"/>
           <p:nvPr/>
         </p:nvPicPr>
@@ -17319,7 +19750,7 @@
       </p:pic>
       <p:sp>
         <p:nvSpPr>
-          <p:cNvPr id="237" name="Google Shape;237;p29"/>
+          <p:cNvPr id="263" name="Google Shape;263;p31"/>
           <p:cNvSpPr txBox="1"/>
           <p:nvPr/>
         </p:nvSpPr>
@@ -17371,7 +19802,7 @@
       </p:sp>
       <p:sp>
         <p:nvSpPr>
-          <p:cNvPr id="238" name="Google Shape;238;p29"/>
+          <p:cNvPr id="264" name="Google Shape;264;p31"/>
           <p:cNvSpPr txBox="1"/>
           <p:nvPr/>
         </p:nvSpPr>
@@ -17619,7 +20050,7 @@
       </p:sp>
       <p:pic>
         <p:nvPicPr>
-          <p:cNvPr id="239" name="Google Shape;239;p29"/>
+          <p:cNvPr id="265" name="Google Shape;265;p31"/>
           <p:cNvPicPr preferRelativeResize="0"/>
           <p:nvPr/>
         </p:nvPicPr>
@@ -17647,7 +20078,7 @@
       </p:pic>
       <p:pic>
         <p:nvPicPr>
-          <p:cNvPr id="240" name="Google Shape;240;p29"/>
+          <p:cNvPr id="266" name="Google Shape;266;p31"/>
           <p:cNvPicPr preferRelativeResize="0"/>
           <p:nvPr/>
         </p:nvPicPr>
@@ -17686,12 +20117,12 @@
 </p:sld>
 </file>
 
-<file path=ppt/slides/slide18.xml><?xml version="1.0" encoding="utf-8"?>
+<file path=ppt/slides/slide19.xml><?xml version="1.0" encoding="utf-8"?>
 <p:sld xmlns:a="http://schemas.openxmlformats.org/drawingml/2006/main" xmlns:r="http://schemas.openxmlformats.org/officeDocument/2006/relationships" xmlns:p="http://schemas.openxmlformats.org/presentationml/2006/main">
   <p:cSld>
     <p:spTree>
       <p:nvGrpSpPr>
-        <p:cNvPr id="1" name="Shape 244"/>
+        <p:cNvPr id="1" name="Shape 270"/>
         <p:cNvGrpSpPr/>
         <p:nvPr/>
       </p:nvGrpSpPr>
@@ -17705,7 +20136,7 @@
       </p:grpSpPr>
       <p:sp>
         <p:nvSpPr>
-          <p:cNvPr id="245" name="Google Shape;245;p30"/>
+          <p:cNvPr id="271" name="Google Shape;271;p32"/>
           <p:cNvSpPr txBox="1"/>
           <p:nvPr/>
         </p:nvSpPr>
@@ -17887,7 +20318,7 @@
       </p:sp>
       <p:sp>
         <p:nvSpPr>
-          <p:cNvPr id="246" name="Google Shape;246;p30"/>
+          <p:cNvPr id="272" name="Google Shape;272;p32"/>
           <p:cNvSpPr txBox="1"/>
           <p:nvPr/>
         </p:nvSpPr>
@@ -18001,7 +20432,7 @@
       </p:sp>
       <p:sp>
         <p:nvSpPr>
-          <p:cNvPr id="247" name="Google Shape;247;p30"/>
+          <p:cNvPr id="273" name="Google Shape;273;p32"/>
           <p:cNvSpPr txBox="1"/>
           <p:nvPr/>
         </p:nvSpPr>
@@ -18067,7 +20498,7 @@
       </p:sp>
       <p:sp>
         <p:nvSpPr>
-          <p:cNvPr id="248" name="Google Shape;248;p30"/>
+          <p:cNvPr id="274" name="Google Shape;274;p32"/>
           <p:cNvSpPr txBox="1"/>
           <p:nvPr/>
         </p:nvSpPr>
@@ -18146,7 +20577,7 @@
       </p:sp>
       <p:pic>
         <p:nvPicPr>
-          <p:cNvPr id="249" name="Google Shape;249;p30"/>
+          <p:cNvPr id="275" name="Google Shape;275;p32"/>
           <p:cNvPicPr preferRelativeResize="0"/>
           <p:nvPr/>
         </p:nvPicPr>
@@ -18185,7 +20616,7 @@
       </p:pic>
       <p:pic>
         <p:nvPicPr>
-          <p:cNvPr id="250" name="Google Shape;250;p30"/>
+          <p:cNvPr id="276" name="Google Shape;276;p32"/>
           <p:cNvPicPr preferRelativeResize="0"/>
           <p:nvPr/>
         </p:nvPicPr>
@@ -18224,7 +20655,7 @@
       </p:pic>
       <p:sp>
         <p:nvSpPr>
-          <p:cNvPr id="251" name="Google Shape;251;p30"/>
+          <p:cNvPr id="277" name="Google Shape;277;p32"/>
           <p:cNvSpPr txBox="1"/>
           <p:nvPr/>
         </p:nvSpPr>
@@ -18310,7 +20741,7 @@
       </p:sp>
       <p:sp>
         <p:nvSpPr>
-          <p:cNvPr id="252" name="Google Shape;252;p30"/>
+          <p:cNvPr id="278" name="Google Shape;278;p32"/>
           <p:cNvSpPr txBox="1"/>
           <p:nvPr/>
         </p:nvSpPr>
@@ -18396,7 +20827,7 @@
       </p:sp>
       <p:sp>
         <p:nvSpPr>
-          <p:cNvPr id="253" name="Google Shape;253;p30"/>
+          <p:cNvPr id="279" name="Google Shape;279;p32"/>
           <p:cNvSpPr txBox="1"/>
           <p:nvPr/>
         </p:nvSpPr>
@@ -18482,7 +20913,7 @@
       </p:sp>
       <p:sp>
         <p:nvSpPr>
-          <p:cNvPr id="254" name="Google Shape;254;p30"/>
+          <p:cNvPr id="280" name="Google Shape;280;p32"/>
           <p:cNvSpPr txBox="1"/>
           <p:nvPr/>
         </p:nvSpPr>
@@ -18568,7 +20999,7 @@
       </p:sp>
       <p:sp>
         <p:nvSpPr>
-          <p:cNvPr id="255" name="Google Shape;255;p30"/>
+          <p:cNvPr id="281" name="Google Shape;281;p32"/>
           <p:cNvSpPr txBox="1"/>
           <p:nvPr/>
         </p:nvSpPr>
@@ -18654,7 +21085,7 @@
       </p:sp>
       <p:sp>
         <p:nvSpPr>
-          <p:cNvPr id="256" name="Google Shape;256;p30"/>
+          <p:cNvPr id="282" name="Google Shape;282;p32"/>
           <p:cNvSpPr txBox="1"/>
           <p:nvPr/>
         </p:nvSpPr>
@@ -18740,7 +21171,7 @@
       </p:sp>
       <p:sp>
         <p:nvSpPr>
-          <p:cNvPr id="257" name="Google Shape;257;p30"/>
+          <p:cNvPr id="283" name="Google Shape;283;p32"/>
           <p:cNvSpPr txBox="1"/>
           <p:nvPr/>
         </p:nvSpPr>
@@ -18832,12 +21263,12 @@
 </p:sld>
 </file>
 
-<file path=ppt/slides/slide19.xml><?xml version="1.0" encoding="utf-8"?>
+<file path=ppt/slides/slide2.xml><?xml version="1.0" encoding="utf-8"?>
 <p:sld xmlns:a="http://schemas.openxmlformats.org/drawingml/2006/main" xmlns:r="http://schemas.openxmlformats.org/officeDocument/2006/relationships" xmlns:p="http://schemas.openxmlformats.org/presentationml/2006/main">
   <p:cSld>
     <p:spTree>
       <p:nvGrpSpPr>
-        <p:cNvPr id="1" name="Shape 261"/>
+        <p:cNvPr id="1" name="Shape 63"/>
         <p:cNvGrpSpPr/>
         <p:nvPr/>
       </p:nvGrpSpPr>
@@ -18851,525 +21282,14 @@
       </p:grpSpPr>
       <p:sp>
         <p:nvSpPr>
-          <p:cNvPr id="262" name="Google Shape;262;p31"/>
+          <p:cNvPr id="64" name="Google Shape;64;p15"/>
           <p:cNvSpPr txBox="1"/>
           <p:nvPr/>
         </p:nvSpPr>
         <p:spPr>
           <a:xfrm>
-            <a:off x="72300" y="76200"/>
-            <a:ext cx="3999600" cy="326400"/>
-          </a:xfrm>
-          <a:prstGeom prst="rect">
-            <a:avLst/>
-          </a:prstGeom>
-          <a:noFill/>
-          <a:ln>
-            <a:noFill/>
-          </a:ln>
-        </p:spPr>
-        <p:txBody>
-          <a:bodyPr spcFirstLastPara="1" wrap="square" lIns="9125" tIns="9125" rIns="9125" bIns="9125" anchor="t" anchorCtr="0">
-            <a:spAutoFit/>
-          </a:bodyPr>
-          <a:lstStyle/>
-          <a:p>
-            <a:pPr marL="0" marR="0" lvl="0" indent="0" algn="l" rtl="0">
-              <a:lnSpc>
-                <a:spcPct val="100000"/>
-              </a:lnSpc>
-              <a:spcBef>
-                <a:spcPts val="0"/>
-              </a:spcBef>
-              <a:spcAft>
-                <a:spcPts val="0"/>
-              </a:spcAft>
-              <a:buClr>
-                <a:srgbClr val="000000"/>
-              </a:buClr>
-              <a:buSzPts val="2000"/>
-              <a:buFont typeface="Arial"/>
-              <a:buNone/>
-            </a:pPr>
-            <a:r>
-              <a:rPr lang="en" sz="2000" b="1" i="0" u="none" strike="noStrike" cap="none">
-                <a:solidFill>
-                  <a:schemeClr val="dk1"/>
-                </a:solidFill>
-                <a:latin typeface="Calibri"/>
-                <a:ea typeface="Calibri"/>
-                <a:cs typeface="Calibri"/>
-                <a:sym typeface="Calibri"/>
-              </a:rPr>
-              <a:t>Tech Layoffs are lower than in 2023</a:t>
-            </a:r>
-            <a:endParaRPr sz="2000" b="1" i="0" u="none" strike="noStrike" cap="none">
-              <a:solidFill>
-                <a:srgbClr val="000000"/>
-              </a:solidFill>
-              <a:latin typeface="Calibri"/>
-              <a:ea typeface="Calibri"/>
-              <a:cs typeface="Calibri"/>
-              <a:sym typeface="Calibri"/>
-            </a:endParaRPr>
-          </a:p>
-        </p:txBody>
-      </p:sp>
-      <p:sp>
-        <p:nvSpPr>
-          <p:cNvPr id="263" name="Google Shape;263;p31"/>
-          <p:cNvSpPr txBox="1"/>
-          <p:nvPr/>
-        </p:nvSpPr>
-        <p:spPr>
-          <a:xfrm>
-            <a:off x="6291625" y="109963"/>
-            <a:ext cx="2002500" cy="384900"/>
-          </a:xfrm>
-          <a:prstGeom prst="rect">
-            <a:avLst/>
-          </a:prstGeom>
-          <a:noFill/>
-          <a:ln>
-            <a:noFill/>
-          </a:ln>
-        </p:spPr>
-        <p:txBody>
-          <a:bodyPr spcFirstLastPara="1" wrap="square" lIns="91425" tIns="91425" rIns="91425" bIns="91425" anchor="t" anchorCtr="0">
-            <a:spAutoFit/>
-          </a:bodyPr>
-          <a:lstStyle/>
-          <a:p>
-            <a:pPr marL="0" marR="0" lvl="0" indent="0" algn="l" rtl="0">
-              <a:lnSpc>
-                <a:spcPct val="100000"/>
-              </a:lnSpc>
-              <a:spcBef>
-                <a:spcPts val="0"/>
-              </a:spcBef>
-              <a:spcAft>
-                <a:spcPts val="0"/>
-              </a:spcAft>
-              <a:buClr>
-                <a:srgbClr val="000000"/>
-              </a:buClr>
-              <a:buSzPts val="1300"/>
-              <a:buFont typeface="Arial"/>
-              <a:buNone/>
-            </a:pPr>
-            <a:r>
-              <a:rPr lang="en" sz="1300" b="0" i="0" u="none" strike="noStrike" cap="none">
-                <a:solidFill>
-                  <a:srgbClr val="0F0F0F"/>
-                </a:solidFill>
-                <a:latin typeface="Calibri"/>
-                <a:ea typeface="Calibri"/>
-                <a:cs typeface="Calibri"/>
-                <a:sym typeface="Calibri"/>
-              </a:rPr>
-              <a:t>Layoffs - </a:t>
-            </a:r>
-            <a:r>
-              <a:rPr lang="en" sz="1300" b="0" i="0" u="sng" strike="noStrike" cap="none">
-                <a:solidFill>
-                  <a:schemeClr val="hlink"/>
-                </a:solidFill>
-                <a:latin typeface="Calibri"/>
-                <a:ea typeface="Calibri"/>
-                <a:cs typeface="Calibri"/>
-                <a:sym typeface="Calibri"/>
-                <a:hlinkClick r:id="rId3"/>
-              </a:rPr>
-              <a:t>https://layoffs.fyi</a:t>
-            </a:r>
-            <a:r>
-              <a:rPr lang="en" sz="1300" b="0" i="0" u="none" strike="noStrike" cap="none">
-                <a:solidFill>
-                  <a:srgbClr val="0F0F0F"/>
-                </a:solidFill>
-                <a:latin typeface="Calibri"/>
-                <a:ea typeface="Calibri"/>
-                <a:cs typeface="Calibri"/>
-                <a:sym typeface="Calibri"/>
-              </a:rPr>
-              <a:t> </a:t>
-            </a:r>
-            <a:endParaRPr sz="1300" b="0" i="0" u="none" strike="noStrike" cap="none">
-              <a:solidFill>
-                <a:srgbClr val="0F0F0F"/>
-              </a:solidFill>
-              <a:latin typeface="Calibri"/>
-              <a:ea typeface="Calibri"/>
-              <a:cs typeface="Calibri"/>
-              <a:sym typeface="Calibri"/>
-            </a:endParaRPr>
-          </a:p>
-        </p:txBody>
-      </p:sp>
-      <p:sp>
-        <p:nvSpPr>
-          <p:cNvPr id="264" name="Google Shape;264;p31"/>
-          <p:cNvSpPr txBox="1"/>
-          <p:nvPr/>
-        </p:nvSpPr>
-        <p:spPr>
-          <a:xfrm>
-            <a:off x="387275" y="4202375"/>
-            <a:ext cx="8367000" cy="923400"/>
-          </a:xfrm>
-          <a:prstGeom prst="rect">
-            <a:avLst/>
-          </a:prstGeom>
-          <a:solidFill>
-            <a:srgbClr val="FFF2CC"/>
-          </a:solidFill>
-          <a:ln>
-            <a:noFill/>
-          </a:ln>
-        </p:spPr>
-        <p:txBody>
-          <a:bodyPr spcFirstLastPara="1" wrap="square" lIns="91425" tIns="91425" rIns="91425" bIns="91425" anchor="t" anchorCtr="0">
-            <a:spAutoFit/>
-          </a:bodyPr>
-          <a:lstStyle/>
-          <a:p>
-            <a:pPr marL="457200" marR="0" lvl="0" indent="-304800" algn="l" rtl="0">
-              <a:lnSpc>
-                <a:spcPct val="100000"/>
-              </a:lnSpc>
-              <a:spcBef>
-                <a:spcPts val="0"/>
-              </a:spcBef>
-              <a:spcAft>
-                <a:spcPts val="0"/>
-              </a:spcAft>
-              <a:buClr>
-                <a:srgbClr val="000000"/>
-              </a:buClr>
-              <a:buSzPts val="1200"/>
-              <a:buFont typeface="Calibri"/>
-              <a:buChar char="●"/>
-            </a:pPr>
-            <a:r>
-              <a:rPr lang="en" sz="1200" b="0" i="0" u="none" strike="noStrike" cap="none">
-                <a:solidFill>
-                  <a:srgbClr val="000000"/>
-                </a:solidFill>
-                <a:latin typeface="Calibri"/>
-                <a:ea typeface="Calibri"/>
-                <a:cs typeface="Calibri"/>
-                <a:sym typeface="Calibri"/>
-              </a:rPr>
-              <a:t>Salaries for AI engineers rose 12% from the third to fourth quarter last year</a:t>
-            </a:r>
-            <a:endParaRPr sz="1200" b="0" i="0" u="none" strike="noStrike" cap="none">
-              <a:solidFill>
-                <a:srgbClr val="000000"/>
-              </a:solidFill>
-              <a:latin typeface="Calibri"/>
-              <a:ea typeface="Calibri"/>
-              <a:cs typeface="Calibri"/>
-              <a:sym typeface="Calibri"/>
-            </a:endParaRPr>
-          </a:p>
-          <a:p>
-            <a:pPr marL="457200" marR="0" lvl="0" indent="-304800" algn="l" rtl="0">
-              <a:lnSpc>
-                <a:spcPct val="100000"/>
-              </a:lnSpc>
-              <a:spcBef>
-                <a:spcPts val="0"/>
-              </a:spcBef>
-              <a:spcAft>
-                <a:spcPts val="0"/>
-              </a:spcAft>
-              <a:buClr>
-                <a:srgbClr val="000000"/>
-              </a:buClr>
-              <a:buSzPts val="1200"/>
-              <a:buFont typeface="Calibri"/>
-              <a:buChar char="●"/>
-            </a:pPr>
-            <a:r>
-              <a:rPr lang="en" sz="1200" b="0" i="0" u="none" strike="noStrike" cap="none">
-                <a:solidFill>
-                  <a:srgbClr val="000000"/>
-                </a:solidFill>
-                <a:latin typeface="Calibri"/>
-                <a:ea typeface="Calibri"/>
-                <a:cs typeface="Calibri"/>
-                <a:sym typeface="Calibri"/>
-              </a:rPr>
-              <a:t>The average salary for a senior AI engineer nationally is more than $190,000, according to Comprehensive.io.</a:t>
-            </a:r>
-            <a:endParaRPr sz="1200" b="0" i="0" u="none" strike="noStrike" cap="none">
-              <a:solidFill>
-                <a:srgbClr val="000000"/>
-              </a:solidFill>
-              <a:latin typeface="Calibri"/>
-              <a:ea typeface="Calibri"/>
-              <a:cs typeface="Calibri"/>
-              <a:sym typeface="Calibri"/>
-            </a:endParaRPr>
-          </a:p>
-          <a:p>
-            <a:pPr marL="457200" marR="0" lvl="0" indent="-304800" algn="l" rtl="0">
-              <a:lnSpc>
-                <a:spcPct val="100000"/>
-              </a:lnSpc>
-              <a:spcBef>
-                <a:spcPts val="0"/>
-              </a:spcBef>
-              <a:spcAft>
-                <a:spcPts val="0"/>
-              </a:spcAft>
-              <a:buClr>
-                <a:srgbClr val="000000"/>
-              </a:buClr>
-              <a:buSzPts val="1200"/>
-              <a:buFont typeface="Calibri"/>
-              <a:buChar char="●"/>
-            </a:pPr>
-            <a:r>
-              <a:rPr lang="en" sz="1200" b="0" i="0" u="none" strike="noStrike" cap="none">
-                <a:solidFill>
-                  <a:srgbClr val="000000"/>
-                </a:solidFill>
-                <a:latin typeface="Calibri"/>
-                <a:ea typeface="Calibri"/>
-                <a:cs typeface="Calibri"/>
-                <a:sym typeface="Calibri"/>
-              </a:rPr>
-              <a:t>AI has a talent shortage, meaning </a:t>
-            </a:r>
-            <a:r>
-              <a:rPr lang="en" sz="1200" b="1" i="0" u="none" strike="noStrike" cap="none">
-                <a:solidFill>
-                  <a:srgbClr val="FF0000"/>
-                </a:solidFill>
-                <a:latin typeface="Calibri"/>
-                <a:ea typeface="Calibri"/>
-                <a:cs typeface="Calibri"/>
-                <a:sym typeface="Calibri"/>
-              </a:rPr>
-              <a:t>$1 Mln salary job offers! </a:t>
-            </a:r>
-            <a:r>
-              <a:rPr lang="en" sz="1200" b="0" i="0" u="none" strike="noStrike" cap="none">
-                <a:solidFill>
-                  <a:srgbClr val="000000"/>
-                </a:solidFill>
-                <a:latin typeface="Calibri"/>
-                <a:ea typeface="Calibri"/>
-                <a:cs typeface="Calibri"/>
-                <a:sym typeface="Calibri"/>
-              </a:rPr>
-              <a:t>Even during tech layoffs</a:t>
-            </a:r>
-            <a:br>
-              <a:rPr lang="en" sz="1200" b="0" i="0" u="none" strike="noStrike" cap="none">
-                <a:solidFill>
-                  <a:srgbClr val="000000"/>
-                </a:solidFill>
-                <a:latin typeface="Calibri"/>
-                <a:ea typeface="Calibri"/>
-                <a:cs typeface="Calibri"/>
-                <a:sym typeface="Calibri"/>
-              </a:rPr>
-            </a:br>
-            <a:r>
-              <a:rPr lang="en" sz="1200" b="0" i="0" u="sng" strike="noStrike" cap="none">
-                <a:solidFill>
-                  <a:schemeClr val="hlink"/>
-                </a:solidFill>
-                <a:latin typeface="Calibri"/>
-                <a:ea typeface="Calibri"/>
-                <a:cs typeface="Calibri"/>
-                <a:sym typeface="Calibri"/>
-                <a:hlinkClick r:id="rId4"/>
-              </a:rPr>
-              <a:t>https://qz.com/tech-layoffs-high-ai-struggling-find-talent-1851368861</a:t>
-            </a:r>
-            <a:r>
-              <a:rPr lang="en" sz="1200" b="0" i="0" u="none" strike="noStrike" cap="none">
-                <a:solidFill>
-                  <a:srgbClr val="000000"/>
-                </a:solidFill>
-                <a:latin typeface="Calibri"/>
-                <a:ea typeface="Calibri"/>
-                <a:cs typeface="Calibri"/>
-                <a:sym typeface="Calibri"/>
-              </a:rPr>
-              <a:t> </a:t>
-            </a:r>
-            <a:endParaRPr sz="1200" b="0" i="0" u="none" strike="noStrike" cap="none">
-              <a:solidFill>
-                <a:srgbClr val="000000"/>
-              </a:solidFill>
-              <a:latin typeface="Calibri"/>
-              <a:ea typeface="Calibri"/>
-              <a:cs typeface="Calibri"/>
-              <a:sym typeface="Calibri"/>
-            </a:endParaRPr>
-          </a:p>
-        </p:txBody>
-      </p:sp>
-      <p:pic>
-        <p:nvPicPr>
-          <p:cNvPr id="265" name="Google Shape;265;p31"/>
-          <p:cNvPicPr preferRelativeResize="0"/>
-          <p:nvPr/>
-        </p:nvPicPr>
-        <p:blipFill>
-          <a:blip r:embed="rId5" cstate="email">
-            <a:alphaModFix/>
-            <a:extLst>
-              <a:ext uri="{28A0092B-C50C-407E-A947-70E740481C1C}">
-                <a14:useLocalDpi xmlns:a14="http://schemas.microsoft.com/office/drawing/2010/main"/>
-              </a:ext>
-            </a:extLst>
-          </a:blip>
-          <a:stretch>
-            <a:fillRect/>
-          </a:stretch>
-        </p:blipFill>
-        <p:spPr>
-          <a:xfrm>
-            <a:off x="536838" y="656951"/>
-            <a:ext cx="8067873" cy="3482675"/>
-          </a:xfrm>
-          <a:prstGeom prst="rect">
-            <a:avLst/>
-          </a:prstGeom>
-          <a:noFill/>
-          <a:ln>
-            <a:noFill/>
-          </a:ln>
-        </p:spPr>
-      </p:pic>
-      <p:sp>
-        <p:nvSpPr>
-          <p:cNvPr id="266" name="Google Shape;266;p31"/>
-          <p:cNvSpPr/>
-          <p:nvPr/>
-        </p:nvSpPr>
-        <p:spPr>
-          <a:xfrm>
-            <a:off x="4287625" y="1553375"/>
-            <a:ext cx="861300" cy="1665300"/>
-          </a:xfrm>
-          <a:prstGeom prst="rect">
-            <a:avLst/>
-          </a:prstGeom>
-          <a:noFill/>
-          <a:ln w="9525" cap="flat" cmpd="sng">
-            <a:solidFill>
-              <a:srgbClr val="FF0000"/>
-            </a:solidFill>
-            <a:prstDash val="solid"/>
-            <a:round/>
-            <a:headEnd type="none" w="sm" len="sm"/>
-            <a:tailEnd type="none" w="sm" len="sm"/>
-          </a:ln>
-        </p:spPr>
-        <p:txBody>
-          <a:bodyPr spcFirstLastPara="1" wrap="square" lIns="91425" tIns="91425" rIns="91425" bIns="91425" anchor="ctr" anchorCtr="0">
-            <a:noAutofit/>
-          </a:bodyPr>
-          <a:lstStyle/>
-          <a:p>
-            <a:pPr marL="0" lvl="0" indent="0" algn="ctr" rtl="0">
-              <a:spcBef>
-                <a:spcPts val="0"/>
-              </a:spcBef>
-              <a:spcAft>
-                <a:spcPts val="0"/>
-              </a:spcAft>
-              <a:buNone/>
-            </a:pPr>
-            <a:endParaRPr/>
-          </a:p>
-        </p:txBody>
-      </p:sp>
-      <p:sp>
-        <p:nvSpPr>
-          <p:cNvPr id="267" name="Google Shape;267;p31"/>
-          <p:cNvSpPr/>
-          <p:nvPr/>
-        </p:nvSpPr>
-        <p:spPr>
-          <a:xfrm>
-            <a:off x="6877475" y="1553393"/>
-            <a:ext cx="861300" cy="1665300"/>
-          </a:xfrm>
-          <a:prstGeom prst="rect">
-            <a:avLst/>
-          </a:prstGeom>
-          <a:noFill/>
-          <a:ln w="9525" cap="flat" cmpd="sng">
-            <a:solidFill>
-              <a:srgbClr val="FF0000"/>
-            </a:solidFill>
-            <a:prstDash val="solid"/>
-            <a:round/>
-            <a:headEnd type="none" w="sm" len="sm"/>
-            <a:tailEnd type="none" w="sm" len="sm"/>
-          </a:ln>
-        </p:spPr>
-        <p:txBody>
-          <a:bodyPr spcFirstLastPara="1" wrap="square" lIns="91425" tIns="91425" rIns="91425" bIns="91425" anchor="ctr" anchorCtr="0">
-            <a:noAutofit/>
-          </a:bodyPr>
-          <a:lstStyle/>
-          <a:p>
-            <a:pPr marL="0" lvl="0" indent="0" algn="ctr" rtl="0">
-              <a:spcBef>
-                <a:spcPts val="0"/>
-              </a:spcBef>
-              <a:spcAft>
-                <a:spcPts val="0"/>
-              </a:spcAft>
-              <a:buNone/>
-            </a:pPr>
-            <a:endParaRPr/>
-          </a:p>
-        </p:txBody>
-      </p:sp>
-    </p:spTree>
-  </p:cSld>
-  <p:clrMapOvr>
-    <a:masterClrMapping/>
-  </p:clrMapOvr>
-</p:sld>
-</file>
-
-<file path=ppt/slides/slide2.xml><?xml version="1.0" encoding="utf-8"?>
-<p:sld xmlns:a="http://schemas.openxmlformats.org/drawingml/2006/main" xmlns:r="http://schemas.openxmlformats.org/officeDocument/2006/relationships" xmlns:p="http://schemas.openxmlformats.org/presentationml/2006/main">
-  <p:cSld>
-    <p:spTree>
-      <p:nvGrpSpPr>
-        <p:cNvPr id="1" name="Shape 60"/>
-        <p:cNvGrpSpPr/>
-        <p:nvPr/>
-      </p:nvGrpSpPr>
-      <p:grpSpPr>
-        <a:xfrm>
-          <a:off x="0" y="0"/>
-          <a:ext cx="0" cy="0"/>
-          <a:chOff x="0" y="0"/>
-          <a:chExt cx="0" cy="0"/>
-        </a:xfrm>
-      </p:grpSpPr>
-      <p:sp>
-        <p:nvSpPr>
-          <p:cNvPr id="61" name="Google Shape;61;p14"/>
-          <p:cNvSpPr txBox="1"/>
-          <p:nvPr/>
-        </p:nvSpPr>
-        <p:spPr>
-          <a:xfrm>
-            <a:off x="5334000" y="139250"/>
-            <a:ext cx="3700250" cy="2256600"/>
+            <a:off x="5257800" y="139250"/>
+            <a:ext cx="3776450" cy="2256600"/>
           </a:xfrm>
           <a:prstGeom prst="rect">
             <a:avLst/>
@@ -19403,7 +21323,7 @@
               <a:buNone/>
             </a:pPr>
             <a:r>
-              <a:rPr lang="en" sz="1300">
+              <a:rPr lang="en" sz="1300" dirty="0">
                 <a:solidFill>
                   <a:schemeClr val="dk1"/>
                 </a:solidFill>
@@ -19414,7 +21334,7 @@
               </a:rPr>
               <a:t>Google Cloud Next 2024 Event (Las Vegas April 9-11):</a:t>
             </a:r>
-            <a:endParaRPr sz="1300">
+            <a:endParaRPr sz="1300" dirty="0">
               <a:solidFill>
                 <a:schemeClr val="dk1"/>
               </a:solidFill>
@@ -19437,7 +21357,7 @@
               <a:buChar char="●"/>
             </a:pPr>
             <a:r>
-              <a:rPr lang="en" sz="1300">
+              <a:rPr lang="en" sz="1300" dirty="0">
                 <a:solidFill>
                   <a:schemeClr val="dk1"/>
                 </a:solidFill>
@@ -19446,10 +21366,34 @@
                 <a:cs typeface="Calibri"/>
                 <a:sym typeface="Calibri"/>
               </a:rPr>
-              <a:t>New AI Hypercomputer architecture (</a:t>
-            </a:r>
-            <a:r>
-              <a:rPr lang="en" sz="1300" b="1">
+              <a:t>New AI </a:t>
+            </a:r>
+            <a:r>
+              <a:rPr lang="en" sz="1300" dirty="0" err="1">
+                <a:solidFill>
+                  <a:schemeClr val="dk1"/>
+                </a:solidFill>
+                <a:latin typeface="Calibri"/>
+                <a:ea typeface="Calibri"/>
+                <a:cs typeface="Calibri"/>
+                <a:sym typeface="Calibri"/>
+              </a:rPr>
+              <a:t>Hypercomputer</a:t>
+            </a:r>
+            <a:r>
+              <a:rPr lang="en" sz="1300" dirty="0">
+                <a:solidFill>
+                  <a:schemeClr val="dk1"/>
+                </a:solidFill>
+                <a:latin typeface="Calibri"/>
+                <a:ea typeface="Calibri"/>
+                <a:cs typeface="Calibri"/>
+                <a:sym typeface="Calibri"/>
+              </a:rPr>
+              <a:t> architecture (</a:t>
+            </a:r>
+            <a:r>
+              <a:rPr lang="en" sz="1300" b="1" dirty="0">
                 <a:solidFill>
                   <a:srgbClr val="3C78D8"/>
                 </a:solidFill>
@@ -19461,7 +21405,7 @@
               <a:t>TPU v5p</a:t>
             </a:r>
             <a:r>
-              <a:rPr lang="en" sz="1300">
+              <a:rPr lang="en" sz="1300" dirty="0">
                 <a:solidFill>
                   <a:schemeClr val="dk1"/>
                 </a:solidFill>
@@ -19472,7 +21416,7 @@
               </a:rPr>
               <a:t>)</a:t>
             </a:r>
-            <a:endParaRPr sz="1300">
+            <a:endParaRPr sz="1300" dirty="0">
               <a:solidFill>
                 <a:schemeClr val="dk1"/>
               </a:solidFill>
@@ -19495,7 +21439,7 @@
               <a:buChar char="●"/>
             </a:pPr>
             <a:r>
-              <a:rPr lang="en" sz="1300">
+              <a:rPr lang="en" sz="1300" dirty="0">
                 <a:solidFill>
                   <a:schemeClr val="dk1"/>
                 </a:solidFill>
@@ -19506,7 +21450,7 @@
               </a:rPr>
               <a:t>Gemini 1.5 Pro</a:t>
             </a:r>
-            <a:endParaRPr sz="1300">
+            <a:endParaRPr sz="1300" dirty="0">
               <a:solidFill>
                 <a:schemeClr val="dk1"/>
               </a:solidFill>
@@ -19529,7 +21473,7 @@
               <a:buChar char="●"/>
             </a:pPr>
             <a:r>
-              <a:rPr lang="en" sz="1300">
+              <a:rPr lang="en" sz="1300" dirty="0">
                 <a:solidFill>
                   <a:schemeClr val="dk1"/>
                 </a:solidFill>
@@ -19540,7 +21484,7 @@
               </a:rPr>
               <a:t>Imagen 2.0</a:t>
             </a:r>
-            <a:endParaRPr sz="1300">
+            <a:endParaRPr sz="1300" dirty="0">
               <a:solidFill>
                 <a:schemeClr val="dk1"/>
               </a:solidFill>
@@ -19563,7 +21507,7 @@
               <a:buChar char="●"/>
             </a:pPr>
             <a:r>
-              <a:rPr lang="en" sz="1300">
+              <a:rPr lang="en" sz="1300" dirty="0">
                 <a:solidFill>
                   <a:schemeClr val="dk1"/>
                 </a:solidFill>
@@ -19574,7 +21518,7 @@
               </a:rPr>
               <a:t>Vertex AI Agent Builder</a:t>
             </a:r>
-            <a:endParaRPr sz="1300">
+            <a:endParaRPr sz="1300" dirty="0">
               <a:solidFill>
                 <a:schemeClr val="dk1"/>
               </a:solidFill>
@@ -19597,7 +21541,7 @@
               <a:buChar char="●"/>
             </a:pPr>
             <a:r>
-              <a:rPr lang="en" sz="1300">
+              <a:rPr lang="en" sz="1300" dirty="0">
                 <a:solidFill>
                   <a:schemeClr val="dk1"/>
                 </a:solidFill>
@@ -19609,7 +21553,7 @@
               <a:t>Gemini Assistants for Google Cloud (developers, services, applications): </a:t>
             </a:r>
             <a:r>
-              <a:rPr lang="en" sz="1300" b="1">
+              <a:rPr lang="en" sz="1300" b="1" dirty="0">
                 <a:solidFill>
                   <a:srgbClr val="3C78D8"/>
                 </a:solidFill>
@@ -19618,9 +21562,33 @@
                 <a:cs typeface="Calibri"/>
                 <a:sym typeface="Calibri"/>
               </a:rPr>
-              <a:t>Gemini Cloud Assist, Gemini in Security, Gemini Code Assist, Gemini in BigQuery, Gemini in Looker, Gemini in Databases</a:t>
-            </a:r>
-            <a:endParaRPr sz="1300" b="1">
+              <a:t>Gemini Cloud Assist, Gemini in Security, Gemini Code Assist, Gemini in </a:t>
+            </a:r>
+            <a:r>
+              <a:rPr lang="en" sz="1300" b="1" dirty="0" err="1">
+                <a:solidFill>
+                  <a:srgbClr val="3C78D8"/>
+                </a:solidFill>
+                <a:latin typeface="Calibri"/>
+                <a:ea typeface="Calibri"/>
+                <a:cs typeface="Calibri"/>
+                <a:sym typeface="Calibri"/>
+              </a:rPr>
+              <a:t>BigQuery</a:t>
+            </a:r>
+            <a:r>
+              <a:rPr lang="en" sz="1300" b="1" dirty="0">
+                <a:solidFill>
+                  <a:srgbClr val="3C78D8"/>
+                </a:solidFill>
+                <a:latin typeface="Calibri"/>
+                <a:ea typeface="Calibri"/>
+                <a:cs typeface="Calibri"/>
+                <a:sym typeface="Calibri"/>
+              </a:rPr>
+              <a:t>, Gemini in Looker, Gemini in Databases</a:t>
+            </a:r>
+            <a:endParaRPr sz="1300" b="1" dirty="0">
               <a:solidFill>
                 <a:srgbClr val="3C78D8"/>
               </a:solidFill>
@@ -19643,7 +21611,7 @@
               <a:buChar char="●"/>
             </a:pPr>
             <a:r>
-              <a:rPr lang="en" sz="1300">
+              <a:rPr lang="en" sz="1300" dirty="0">
                 <a:solidFill>
                   <a:schemeClr val="dk1"/>
                 </a:solidFill>
@@ -19654,7 +21622,7 @@
               </a:rPr>
               <a:t>Google Axion Processors</a:t>
             </a:r>
-            <a:endParaRPr sz="1300">
+            <a:endParaRPr sz="1300" dirty="0">
               <a:solidFill>
                 <a:schemeClr val="dk1"/>
               </a:solidFill>
@@ -19677,7 +21645,7 @@
               <a:buChar char="●"/>
             </a:pPr>
             <a:r>
-              <a:rPr lang="en" sz="1300">
+              <a:rPr lang="en" sz="1300" dirty="0">
                 <a:solidFill>
                   <a:schemeClr val="dk1"/>
                 </a:solidFill>
@@ -19688,7 +21656,7 @@
               </a:rPr>
               <a:t>Google Workspace, Google Vids</a:t>
             </a:r>
-            <a:endParaRPr sz="1300">
+            <a:endParaRPr sz="1300" dirty="0">
               <a:solidFill>
                 <a:schemeClr val="dk1"/>
               </a:solidFill>
@@ -19702,7 +21670,7 @@
       </p:sp>
       <p:sp>
         <p:nvSpPr>
-          <p:cNvPr id="62" name="Google Shape;62;p14"/>
+          <p:cNvPr id="65" name="Google Shape;65;p15"/>
           <p:cNvSpPr txBox="1"/>
           <p:nvPr/>
         </p:nvSpPr>
@@ -19760,7 +21728,7 @@
       </p:sp>
       <p:pic>
         <p:nvPicPr>
-          <p:cNvPr id="63" name="Google Shape;63;p14"/>
+          <p:cNvPr id="66" name="Google Shape;66;p15"/>
           <p:cNvPicPr preferRelativeResize="0"/>
           <p:nvPr/>
         </p:nvPicPr>
@@ -19799,7 +21767,7 @@
       </p:pic>
       <p:sp>
         <p:nvSpPr>
-          <p:cNvPr id="64" name="Google Shape;64;p14"/>
+          <p:cNvPr id="67" name="Google Shape;67;p15"/>
           <p:cNvSpPr txBox="1"/>
           <p:nvPr/>
         </p:nvSpPr>
@@ -20111,7 +22079,7 @@
       </p:sp>
       <p:pic>
         <p:nvPicPr>
-          <p:cNvPr id="65" name="Google Shape;65;p14"/>
+          <p:cNvPr id="68" name="Google Shape;68;p15"/>
           <p:cNvPicPr preferRelativeResize="0"/>
           <p:nvPr/>
         </p:nvPicPr>
@@ -20160,7 +22128,518 @@
   <p:cSld>
     <p:spTree>
       <p:nvGrpSpPr>
-        <p:cNvPr id="1" name="Shape 271"/>
+        <p:cNvPr id="1" name="Shape 287"/>
+        <p:cNvGrpSpPr/>
+        <p:nvPr/>
+      </p:nvGrpSpPr>
+      <p:grpSpPr>
+        <a:xfrm>
+          <a:off x="0" y="0"/>
+          <a:ext cx="0" cy="0"/>
+          <a:chOff x="0" y="0"/>
+          <a:chExt cx="0" cy="0"/>
+        </a:xfrm>
+      </p:grpSpPr>
+      <p:sp>
+        <p:nvSpPr>
+          <p:cNvPr id="288" name="Google Shape;288;p33"/>
+          <p:cNvSpPr txBox="1"/>
+          <p:nvPr/>
+        </p:nvSpPr>
+        <p:spPr>
+          <a:xfrm>
+            <a:off x="72300" y="76200"/>
+            <a:ext cx="3999600" cy="326400"/>
+          </a:xfrm>
+          <a:prstGeom prst="rect">
+            <a:avLst/>
+          </a:prstGeom>
+          <a:noFill/>
+          <a:ln>
+            <a:noFill/>
+          </a:ln>
+        </p:spPr>
+        <p:txBody>
+          <a:bodyPr spcFirstLastPara="1" wrap="square" lIns="9125" tIns="9125" rIns="9125" bIns="9125" anchor="t" anchorCtr="0">
+            <a:spAutoFit/>
+          </a:bodyPr>
+          <a:lstStyle/>
+          <a:p>
+            <a:pPr marL="0" marR="0" lvl="0" indent="0" algn="l" rtl="0">
+              <a:lnSpc>
+                <a:spcPct val="100000"/>
+              </a:lnSpc>
+              <a:spcBef>
+                <a:spcPts val="0"/>
+              </a:spcBef>
+              <a:spcAft>
+                <a:spcPts val="0"/>
+              </a:spcAft>
+              <a:buClr>
+                <a:srgbClr val="000000"/>
+              </a:buClr>
+              <a:buSzPts val="2000"/>
+              <a:buFont typeface="Arial"/>
+              <a:buNone/>
+            </a:pPr>
+            <a:r>
+              <a:rPr lang="en" sz="2000" b="1" i="0" u="none" strike="noStrike" cap="none">
+                <a:solidFill>
+                  <a:schemeClr val="dk1"/>
+                </a:solidFill>
+                <a:latin typeface="Calibri"/>
+                <a:ea typeface="Calibri"/>
+                <a:cs typeface="Calibri"/>
+                <a:sym typeface="Calibri"/>
+              </a:rPr>
+              <a:t>Tech Layoffs are lower than in 2023</a:t>
+            </a:r>
+            <a:endParaRPr sz="2000" b="1" i="0" u="none" strike="noStrike" cap="none">
+              <a:solidFill>
+                <a:srgbClr val="000000"/>
+              </a:solidFill>
+              <a:latin typeface="Calibri"/>
+              <a:ea typeface="Calibri"/>
+              <a:cs typeface="Calibri"/>
+              <a:sym typeface="Calibri"/>
+            </a:endParaRPr>
+          </a:p>
+        </p:txBody>
+      </p:sp>
+      <p:sp>
+        <p:nvSpPr>
+          <p:cNvPr id="289" name="Google Shape;289;p33"/>
+          <p:cNvSpPr txBox="1"/>
+          <p:nvPr/>
+        </p:nvSpPr>
+        <p:spPr>
+          <a:xfrm>
+            <a:off x="6291625" y="109963"/>
+            <a:ext cx="2002500" cy="384900"/>
+          </a:xfrm>
+          <a:prstGeom prst="rect">
+            <a:avLst/>
+          </a:prstGeom>
+          <a:noFill/>
+          <a:ln>
+            <a:noFill/>
+          </a:ln>
+        </p:spPr>
+        <p:txBody>
+          <a:bodyPr spcFirstLastPara="1" wrap="square" lIns="91425" tIns="91425" rIns="91425" bIns="91425" anchor="t" anchorCtr="0">
+            <a:spAutoFit/>
+          </a:bodyPr>
+          <a:lstStyle/>
+          <a:p>
+            <a:pPr marL="0" marR="0" lvl="0" indent="0" algn="l" rtl="0">
+              <a:lnSpc>
+                <a:spcPct val="100000"/>
+              </a:lnSpc>
+              <a:spcBef>
+                <a:spcPts val="0"/>
+              </a:spcBef>
+              <a:spcAft>
+                <a:spcPts val="0"/>
+              </a:spcAft>
+              <a:buClr>
+                <a:srgbClr val="000000"/>
+              </a:buClr>
+              <a:buSzPts val="1300"/>
+              <a:buFont typeface="Arial"/>
+              <a:buNone/>
+            </a:pPr>
+            <a:r>
+              <a:rPr lang="en" sz="1300" b="0" i="0" u="none" strike="noStrike" cap="none">
+                <a:solidFill>
+                  <a:srgbClr val="0F0F0F"/>
+                </a:solidFill>
+                <a:latin typeface="Calibri"/>
+                <a:ea typeface="Calibri"/>
+                <a:cs typeface="Calibri"/>
+                <a:sym typeface="Calibri"/>
+              </a:rPr>
+              <a:t>Layoffs - </a:t>
+            </a:r>
+            <a:r>
+              <a:rPr lang="en" sz="1300" b="0" i="0" u="sng" strike="noStrike" cap="none">
+                <a:solidFill>
+                  <a:schemeClr val="hlink"/>
+                </a:solidFill>
+                <a:latin typeface="Calibri"/>
+                <a:ea typeface="Calibri"/>
+                <a:cs typeface="Calibri"/>
+                <a:sym typeface="Calibri"/>
+                <a:hlinkClick r:id="rId3"/>
+              </a:rPr>
+              <a:t>https://layoffs.fyi</a:t>
+            </a:r>
+            <a:r>
+              <a:rPr lang="en" sz="1300" b="0" i="0" u="none" strike="noStrike" cap="none">
+                <a:solidFill>
+                  <a:srgbClr val="0F0F0F"/>
+                </a:solidFill>
+                <a:latin typeface="Calibri"/>
+                <a:ea typeface="Calibri"/>
+                <a:cs typeface="Calibri"/>
+                <a:sym typeface="Calibri"/>
+              </a:rPr>
+              <a:t> </a:t>
+            </a:r>
+            <a:endParaRPr sz="1300" b="0" i="0" u="none" strike="noStrike" cap="none">
+              <a:solidFill>
+                <a:srgbClr val="0F0F0F"/>
+              </a:solidFill>
+              <a:latin typeface="Calibri"/>
+              <a:ea typeface="Calibri"/>
+              <a:cs typeface="Calibri"/>
+              <a:sym typeface="Calibri"/>
+            </a:endParaRPr>
+          </a:p>
+        </p:txBody>
+      </p:sp>
+      <p:sp>
+        <p:nvSpPr>
+          <p:cNvPr id="290" name="Google Shape;290;p33"/>
+          <p:cNvSpPr txBox="1"/>
+          <p:nvPr/>
+        </p:nvSpPr>
+        <p:spPr>
+          <a:xfrm>
+            <a:off x="387275" y="4202375"/>
+            <a:ext cx="8367000" cy="923400"/>
+          </a:xfrm>
+          <a:prstGeom prst="rect">
+            <a:avLst/>
+          </a:prstGeom>
+          <a:solidFill>
+            <a:srgbClr val="FFF2CC"/>
+          </a:solidFill>
+          <a:ln>
+            <a:noFill/>
+          </a:ln>
+        </p:spPr>
+        <p:txBody>
+          <a:bodyPr spcFirstLastPara="1" wrap="square" lIns="91425" tIns="91425" rIns="91425" bIns="91425" anchor="t" anchorCtr="0">
+            <a:spAutoFit/>
+          </a:bodyPr>
+          <a:lstStyle/>
+          <a:p>
+            <a:pPr marL="457200" marR="0" lvl="0" indent="-304800" algn="l" rtl="0">
+              <a:lnSpc>
+                <a:spcPct val="100000"/>
+              </a:lnSpc>
+              <a:spcBef>
+                <a:spcPts val="0"/>
+              </a:spcBef>
+              <a:spcAft>
+                <a:spcPts val="0"/>
+              </a:spcAft>
+              <a:buClr>
+                <a:srgbClr val="000000"/>
+              </a:buClr>
+              <a:buSzPts val="1200"/>
+              <a:buFont typeface="Calibri"/>
+              <a:buChar char="●"/>
+            </a:pPr>
+            <a:r>
+              <a:rPr lang="en" sz="1200" b="0" i="0" u="none" strike="noStrike" cap="none">
+                <a:solidFill>
+                  <a:srgbClr val="000000"/>
+                </a:solidFill>
+                <a:latin typeface="Calibri"/>
+                <a:ea typeface="Calibri"/>
+                <a:cs typeface="Calibri"/>
+                <a:sym typeface="Calibri"/>
+              </a:rPr>
+              <a:t>Salaries for AI engineers rose 12% from the third to fourth quarter last year</a:t>
+            </a:r>
+            <a:endParaRPr sz="1200" b="0" i="0" u="none" strike="noStrike" cap="none">
+              <a:solidFill>
+                <a:srgbClr val="000000"/>
+              </a:solidFill>
+              <a:latin typeface="Calibri"/>
+              <a:ea typeface="Calibri"/>
+              <a:cs typeface="Calibri"/>
+              <a:sym typeface="Calibri"/>
+            </a:endParaRPr>
+          </a:p>
+          <a:p>
+            <a:pPr marL="457200" marR="0" lvl="0" indent="-304800" algn="l" rtl="0">
+              <a:lnSpc>
+                <a:spcPct val="100000"/>
+              </a:lnSpc>
+              <a:spcBef>
+                <a:spcPts val="0"/>
+              </a:spcBef>
+              <a:spcAft>
+                <a:spcPts val="0"/>
+              </a:spcAft>
+              <a:buClr>
+                <a:srgbClr val="000000"/>
+              </a:buClr>
+              <a:buSzPts val="1200"/>
+              <a:buFont typeface="Calibri"/>
+              <a:buChar char="●"/>
+            </a:pPr>
+            <a:r>
+              <a:rPr lang="en" sz="1200" b="0" i="0" u="none" strike="noStrike" cap="none">
+                <a:solidFill>
+                  <a:srgbClr val="000000"/>
+                </a:solidFill>
+                <a:latin typeface="Calibri"/>
+                <a:ea typeface="Calibri"/>
+                <a:cs typeface="Calibri"/>
+                <a:sym typeface="Calibri"/>
+              </a:rPr>
+              <a:t>The average salary for a senior AI engineer nationally is more than $190,000, according to Comprehensive.io.</a:t>
+            </a:r>
+            <a:endParaRPr sz="1200" b="0" i="0" u="none" strike="noStrike" cap="none">
+              <a:solidFill>
+                <a:srgbClr val="000000"/>
+              </a:solidFill>
+              <a:latin typeface="Calibri"/>
+              <a:ea typeface="Calibri"/>
+              <a:cs typeface="Calibri"/>
+              <a:sym typeface="Calibri"/>
+            </a:endParaRPr>
+          </a:p>
+          <a:p>
+            <a:pPr marL="457200" marR="0" lvl="0" indent="-304800" algn="l" rtl="0">
+              <a:lnSpc>
+                <a:spcPct val="100000"/>
+              </a:lnSpc>
+              <a:spcBef>
+                <a:spcPts val="0"/>
+              </a:spcBef>
+              <a:spcAft>
+                <a:spcPts val="0"/>
+              </a:spcAft>
+              <a:buClr>
+                <a:srgbClr val="000000"/>
+              </a:buClr>
+              <a:buSzPts val="1200"/>
+              <a:buFont typeface="Calibri"/>
+              <a:buChar char="●"/>
+            </a:pPr>
+            <a:r>
+              <a:rPr lang="en" sz="1200" b="0" i="0" u="none" strike="noStrike" cap="none">
+                <a:solidFill>
+                  <a:srgbClr val="000000"/>
+                </a:solidFill>
+                <a:latin typeface="Calibri"/>
+                <a:ea typeface="Calibri"/>
+                <a:cs typeface="Calibri"/>
+                <a:sym typeface="Calibri"/>
+              </a:rPr>
+              <a:t>AI has a talent shortage, meaning </a:t>
+            </a:r>
+            <a:r>
+              <a:rPr lang="en" sz="1200" b="1" i="0" u="none" strike="noStrike" cap="none">
+                <a:solidFill>
+                  <a:srgbClr val="FF0000"/>
+                </a:solidFill>
+                <a:latin typeface="Calibri"/>
+                <a:ea typeface="Calibri"/>
+                <a:cs typeface="Calibri"/>
+                <a:sym typeface="Calibri"/>
+              </a:rPr>
+              <a:t>$1 Mln salary job offers! </a:t>
+            </a:r>
+            <a:r>
+              <a:rPr lang="en" sz="1200" b="0" i="0" u="none" strike="noStrike" cap="none">
+                <a:solidFill>
+                  <a:srgbClr val="000000"/>
+                </a:solidFill>
+                <a:latin typeface="Calibri"/>
+                <a:ea typeface="Calibri"/>
+                <a:cs typeface="Calibri"/>
+                <a:sym typeface="Calibri"/>
+              </a:rPr>
+              <a:t>Even during tech layoffs</a:t>
+            </a:r>
+            <a:br>
+              <a:rPr lang="en" sz="1200" b="0" i="0" u="none" strike="noStrike" cap="none">
+                <a:solidFill>
+                  <a:srgbClr val="000000"/>
+                </a:solidFill>
+                <a:latin typeface="Calibri"/>
+                <a:ea typeface="Calibri"/>
+                <a:cs typeface="Calibri"/>
+                <a:sym typeface="Calibri"/>
+              </a:rPr>
+            </a:br>
+            <a:r>
+              <a:rPr lang="en" sz="1200" b="0" i="0" u="sng" strike="noStrike" cap="none">
+                <a:solidFill>
+                  <a:schemeClr val="hlink"/>
+                </a:solidFill>
+                <a:latin typeface="Calibri"/>
+                <a:ea typeface="Calibri"/>
+                <a:cs typeface="Calibri"/>
+                <a:sym typeface="Calibri"/>
+                <a:hlinkClick r:id="rId4"/>
+              </a:rPr>
+              <a:t>https://qz.com/tech-layoffs-high-ai-struggling-find-talent-1851368861</a:t>
+            </a:r>
+            <a:r>
+              <a:rPr lang="en" sz="1200" b="0" i="0" u="none" strike="noStrike" cap="none">
+                <a:solidFill>
+                  <a:srgbClr val="000000"/>
+                </a:solidFill>
+                <a:latin typeface="Calibri"/>
+                <a:ea typeface="Calibri"/>
+                <a:cs typeface="Calibri"/>
+                <a:sym typeface="Calibri"/>
+              </a:rPr>
+              <a:t> </a:t>
+            </a:r>
+            <a:endParaRPr sz="1200" b="0" i="0" u="none" strike="noStrike" cap="none">
+              <a:solidFill>
+                <a:srgbClr val="000000"/>
+              </a:solidFill>
+              <a:latin typeface="Calibri"/>
+              <a:ea typeface="Calibri"/>
+              <a:cs typeface="Calibri"/>
+              <a:sym typeface="Calibri"/>
+            </a:endParaRPr>
+          </a:p>
+        </p:txBody>
+      </p:sp>
+      <p:pic>
+        <p:nvPicPr>
+          <p:cNvPr id="291" name="Google Shape;291;p33"/>
+          <p:cNvPicPr preferRelativeResize="0"/>
+          <p:nvPr/>
+        </p:nvPicPr>
+        <p:blipFill>
+          <a:blip r:embed="rId5" cstate="email">
+            <a:alphaModFix/>
+            <a:extLst>
+              <a:ext uri="{28A0092B-C50C-407E-A947-70E740481C1C}">
+                <a14:useLocalDpi xmlns:a14="http://schemas.microsoft.com/office/drawing/2010/main"/>
+              </a:ext>
+            </a:extLst>
+          </a:blip>
+          <a:stretch>
+            <a:fillRect/>
+          </a:stretch>
+        </p:blipFill>
+        <p:spPr>
+          <a:xfrm>
+            <a:off x="536838" y="656951"/>
+            <a:ext cx="8067873" cy="3482675"/>
+          </a:xfrm>
+          <a:prstGeom prst="rect">
+            <a:avLst/>
+          </a:prstGeom>
+          <a:noFill/>
+          <a:ln>
+            <a:noFill/>
+          </a:ln>
+        </p:spPr>
+      </p:pic>
+      <p:sp>
+        <p:nvSpPr>
+          <p:cNvPr id="292" name="Google Shape;292;p33"/>
+          <p:cNvSpPr/>
+          <p:nvPr/>
+        </p:nvSpPr>
+        <p:spPr>
+          <a:xfrm>
+            <a:off x="4287625" y="1553375"/>
+            <a:ext cx="861300" cy="1665300"/>
+          </a:xfrm>
+          <a:prstGeom prst="rect">
+            <a:avLst/>
+          </a:prstGeom>
+          <a:noFill/>
+          <a:ln w="9525" cap="flat" cmpd="sng">
+            <a:solidFill>
+              <a:srgbClr val="FF0000"/>
+            </a:solidFill>
+            <a:prstDash val="solid"/>
+            <a:round/>
+            <a:headEnd type="none" w="sm" len="sm"/>
+            <a:tailEnd type="none" w="sm" len="sm"/>
+          </a:ln>
+        </p:spPr>
+        <p:txBody>
+          <a:bodyPr spcFirstLastPara="1" wrap="square" lIns="91425" tIns="91425" rIns="91425" bIns="91425" anchor="ctr" anchorCtr="0">
+            <a:noAutofit/>
+          </a:bodyPr>
+          <a:lstStyle/>
+          <a:p>
+            <a:pPr marL="0" lvl="0" indent="0" algn="ctr" rtl="0">
+              <a:spcBef>
+                <a:spcPts val="0"/>
+              </a:spcBef>
+              <a:spcAft>
+                <a:spcPts val="0"/>
+              </a:spcAft>
+              <a:buNone/>
+            </a:pPr>
+            <a:endParaRPr/>
+          </a:p>
+        </p:txBody>
+      </p:sp>
+      <p:sp>
+        <p:nvSpPr>
+          <p:cNvPr id="293" name="Google Shape;293;p33"/>
+          <p:cNvSpPr/>
+          <p:nvPr/>
+        </p:nvSpPr>
+        <p:spPr>
+          <a:xfrm>
+            <a:off x="6877475" y="1553393"/>
+            <a:ext cx="861300" cy="1665300"/>
+          </a:xfrm>
+          <a:prstGeom prst="rect">
+            <a:avLst/>
+          </a:prstGeom>
+          <a:noFill/>
+          <a:ln w="9525" cap="flat" cmpd="sng">
+            <a:solidFill>
+              <a:srgbClr val="FF0000"/>
+            </a:solidFill>
+            <a:prstDash val="solid"/>
+            <a:round/>
+            <a:headEnd type="none" w="sm" len="sm"/>
+            <a:tailEnd type="none" w="sm" len="sm"/>
+          </a:ln>
+        </p:spPr>
+        <p:txBody>
+          <a:bodyPr spcFirstLastPara="1" wrap="square" lIns="91425" tIns="91425" rIns="91425" bIns="91425" anchor="ctr" anchorCtr="0">
+            <a:noAutofit/>
+          </a:bodyPr>
+          <a:lstStyle/>
+          <a:p>
+            <a:pPr marL="0" lvl="0" indent="0" algn="ctr" rtl="0">
+              <a:spcBef>
+                <a:spcPts val="0"/>
+              </a:spcBef>
+              <a:spcAft>
+                <a:spcPts val="0"/>
+              </a:spcAft>
+              <a:buNone/>
+            </a:pPr>
+            <a:endParaRPr/>
+          </a:p>
+        </p:txBody>
+      </p:sp>
+    </p:spTree>
+  </p:cSld>
+  <p:clrMapOvr>
+    <a:masterClrMapping/>
+  </p:clrMapOvr>
+</p:sld>
+</file>
+
+<file path=ppt/slides/slide21.xml><?xml version="1.0" encoding="utf-8"?>
+<p:sld xmlns:a="http://schemas.openxmlformats.org/drawingml/2006/main" xmlns:r="http://schemas.openxmlformats.org/officeDocument/2006/relationships" xmlns:p="http://schemas.openxmlformats.org/presentationml/2006/main">
+  <p:cSld>
+    <p:spTree>
+      <p:nvGrpSpPr>
+        <p:cNvPr id="1" name="Shape 297"/>
         <p:cNvGrpSpPr/>
         <p:nvPr/>
       </p:nvGrpSpPr>
@@ -20174,7 +22653,7 @@
       </p:grpSpPr>
       <p:pic>
         <p:nvPicPr>
-          <p:cNvPr id="272" name="Google Shape;272;p32"/>
+          <p:cNvPr id="298" name="Google Shape;298;p34"/>
           <p:cNvPicPr preferRelativeResize="0"/>
           <p:nvPr/>
         </p:nvPicPr>
@@ -20201,7 +22680,7 @@
       </p:pic>
       <p:sp>
         <p:nvSpPr>
-          <p:cNvPr id="273" name="Google Shape;273;p32"/>
+          <p:cNvPr id="299" name="Google Shape;299;p34"/>
           <p:cNvSpPr txBox="1"/>
           <p:nvPr/>
         </p:nvSpPr>
@@ -20267,7 +22746,7 @@
       </p:sp>
       <p:sp>
         <p:nvSpPr>
-          <p:cNvPr id="274" name="Google Shape;274;p32"/>
+          <p:cNvPr id="300" name="Google Shape;300;p34"/>
           <p:cNvSpPr txBox="1"/>
           <p:nvPr/>
         </p:nvSpPr>
@@ -20697,7 +23176,7 @@
       </p:sp>
       <p:pic>
         <p:nvPicPr>
-          <p:cNvPr id="275" name="Google Shape;275;p32"/>
+          <p:cNvPr id="301" name="Google Shape;301;p34"/>
           <p:cNvPicPr preferRelativeResize="0"/>
           <p:nvPr/>
         </p:nvPicPr>
@@ -20729,7 +23208,7 @@
       </p:pic>
       <p:sp>
         <p:nvSpPr>
-          <p:cNvPr id="276" name="Google Shape;276;p32"/>
+          <p:cNvPr id="302" name="Google Shape;302;p34"/>
           <p:cNvSpPr txBox="1"/>
           <p:nvPr/>
         </p:nvSpPr>
@@ -20808,7 +23287,7 @@
       </p:sp>
       <p:sp>
         <p:nvSpPr>
-          <p:cNvPr id="277" name="Google Shape;277;p32"/>
+          <p:cNvPr id="303" name="Google Shape;303;p34"/>
           <p:cNvSpPr txBox="1"/>
           <p:nvPr/>
         </p:nvSpPr>
@@ -20880,12 +23359,12 @@
 </p:sld>
 </file>
 
-<file path=ppt/slides/slide21.xml><?xml version="1.0" encoding="utf-8"?>
+<file path=ppt/slides/slide22.xml><?xml version="1.0" encoding="utf-8"?>
 <p:sld xmlns:a="http://schemas.openxmlformats.org/drawingml/2006/main" xmlns:r="http://schemas.openxmlformats.org/officeDocument/2006/relationships" xmlns:p="http://schemas.openxmlformats.org/presentationml/2006/main">
   <p:cSld>
     <p:spTree>
       <p:nvGrpSpPr>
-        <p:cNvPr id="1" name="Shape 281"/>
+        <p:cNvPr id="1" name="Shape 307"/>
         <p:cNvGrpSpPr/>
         <p:nvPr/>
       </p:nvGrpSpPr>
@@ -20899,7 +23378,7 @@
       </p:grpSpPr>
       <p:sp>
         <p:nvSpPr>
-          <p:cNvPr id="282" name="Google Shape;282;p33"/>
+          <p:cNvPr id="308" name="Google Shape;308;p35"/>
           <p:cNvSpPr txBox="1"/>
           <p:nvPr/>
         </p:nvSpPr>
@@ -20976,7 +23455,7 @@
   <p:cSld>
     <p:spTree>
       <p:nvGrpSpPr>
-        <p:cNvPr id="1" name="Shape 69"/>
+        <p:cNvPr id="1" name="Shape 72"/>
         <p:cNvGrpSpPr/>
         <p:nvPr/>
       </p:nvGrpSpPr>
@@ -20990,7 +23469,7 @@
       </p:grpSpPr>
       <p:pic>
         <p:nvPicPr>
-          <p:cNvPr id="70" name="Google Shape;70;p15"/>
+          <p:cNvPr id="73" name="Google Shape;73;p16"/>
           <p:cNvPicPr preferRelativeResize="0"/>
           <p:nvPr/>
         </p:nvPicPr>
@@ -21023,7 +23502,7 @@
       </p:pic>
       <p:sp>
         <p:nvSpPr>
-          <p:cNvPr id="71" name="Google Shape;71;p15"/>
+          <p:cNvPr id="74" name="Google Shape;74;p16"/>
           <p:cNvSpPr txBox="1"/>
           <p:nvPr/>
         </p:nvSpPr>
@@ -21262,7 +23741,7 @@
       </p:sp>
       <p:pic>
         <p:nvPicPr>
-          <p:cNvPr id="72" name="Google Shape;72;p15"/>
+          <p:cNvPr id="75" name="Google Shape;75;p16"/>
           <p:cNvPicPr preferRelativeResize="0"/>
           <p:nvPr/>
         </p:nvPicPr>
@@ -21295,7 +23774,7 @@
       </p:pic>
       <p:sp>
         <p:nvSpPr>
-          <p:cNvPr id="73" name="Google Shape;73;p15"/>
+          <p:cNvPr id="76" name="Google Shape;76;p16"/>
           <p:cNvSpPr txBox="1"/>
           <p:nvPr/>
         </p:nvSpPr>
@@ -21497,7 +23976,7 @@
       </p:sp>
       <p:pic>
         <p:nvPicPr>
-          <p:cNvPr id="74" name="Google Shape;74;p15"/>
+          <p:cNvPr id="77" name="Google Shape;77;p16"/>
           <p:cNvPicPr preferRelativeResize="0"/>
           <p:nvPr/>
         </p:nvPicPr>
@@ -21530,7 +24009,7 @@
       </p:pic>
       <p:sp>
         <p:nvSpPr>
-          <p:cNvPr id="75" name="Google Shape;75;p15"/>
+          <p:cNvPr id="78" name="Google Shape;78;p16"/>
           <p:cNvSpPr txBox="1"/>
           <p:nvPr/>
         </p:nvSpPr>
@@ -21688,7 +24167,7 @@
       </p:sp>
       <p:pic>
         <p:nvPicPr>
-          <p:cNvPr id="76" name="Google Shape;76;p15"/>
+          <p:cNvPr id="79" name="Google Shape;79;p16"/>
           <p:cNvPicPr preferRelativeResize="0"/>
           <p:nvPr/>
         </p:nvPicPr>
@@ -21721,7 +24200,7 @@
       </p:pic>
       <p:sp>
         <p:nvSpPr>
-          <p:cNvPr id="77" name="Google Shape;77;p15"/>
+          <p:cNvPr id="80" name="Google Shape;80;p16"/>
           <p:cNvSpPr txBox="1"/>
           <p:nvPr/>
         </p:nvSpPr>
@@ -21950,7 +24429,7 @@
       </p:sp>
       <p:pic>
         <p:nvPicPr>
-          <p:cNvPr id="78" name="Google Shape;78;p15"/>
+          <p:cNvPr id="81" name="Google Shape;81;p16"/>
           <p:cNvPicPr preferRelativeResize="0"/>
           <p:nvPr/>
         </p:nvPicPr>
@@ -21982,7 +24461,7 @@
       </p:pic>
       <p:pic>
         <p:nvPicPr>
-          <p:cNvPr id="79" name="Google Shape;79;p15"/>
+          <p:cNvPr id="82" name="Google Shape;82;p16"/>
           <p:cNvPicPr preferRelativeResize="0"/>
           <p:nvPr/>
         </p:nvPicPr>
@@ -22015,7 +24494,7 @@
       </p:pic>
       <p:sp>
         <p:nvSpPr>
-          <p:cNvPr id="80" name="Google Shape;80;p15"/>
+          <p:cNvPr id="83" name="Google Shape;83;p16"/>
           <p:cNvSpPr txBox="1"/>
           <p:nvPr/>
         </p:nvSpPr>
@@ -22177,7 +24656,7 @@
       </p:sp>
       <p:pic>
         <p:nvPicPr>
-          <p:cNvPr id="81" name="Google Shape;81;p15"/>
+          <p:cNvPr id="84" name="Google Shape;84;p16"/>
           <p:cNvPicPr preferRelativeResize="0"/>
           <p:nvPr/>
         </p:nvPicPr>
@@ -22210,7 +24689,7 @@
       </p:pic>
       <p:pic>
         <p:nvPicPr>
-          <p:cNvPr id="82" name="Google Shape;82;p15"/>
+          <p:cNvPr id="85" name="Google Shape;85;p16"/>
           <p:cNvPicPr preferRelativeResize="0"/>
           <p:nvPr/>
         </p:nvPicPr>
@@ -22243,7 +24722,7 @@
       </p:pic>
       <p:sp>
         <p:nvSpPr>
-          <p:cNvPr id="83" name="Google Shape;83;p15"/>
+          <p:cNvPr id="86" name="Google Shape;86;p16"/>
           <p:cNvSpPr txBox="1"/>
           <p:nvPr/>
         </p:nvSpPr>
@@ -22309,7 +24788,7 @@
       </p:sp>
       <p:sp>
         <p:nvSpPr>
-          <p:cNvPr id="84" name="Google Shape;84;p15"/>
+          <p:cNvPr id="87" name="Google Shape;87;p16"/>
           <p:cNvSpPr txBox="1"/>
           <p:nvPr/>
         </p:nvSpPr>
@@ -22475,7 +24954,7 @@
       </p:sp>
       <p:sp>
         <p:nvSpPr>
-          <p:cNvPr id="85" name="Google Shape;85;p15"/>
+          <p:cNvPr id="88" name="Google Shape;88;p16"/>
           <p:cNvSpPr/>
           <p:nvPr/>
         </p:nvSpPr>
@@ -22524,7 +25003,7 @@
       </p:sp>
       <p:sp>
         <p:nvSpPr>
-          <p:cNvPr id="86" name="Google Shape;86;p15"/>
+          <p:cNvPr id="89" name="Google Shape;89;p16"/>
           <p:cNvSpPr txBox="1"/>
           <p:nvPr/>
         </p:nvSpPr>
@@ -22721,7 +25200,7 @@
       </p:sp>
       <p:pic>
         <p:nvPicPr>
-          <p:cNvPr id="87" name="Google Shape;87;p15"/>
+          <p:cNvPr id="90" name="Google Shape;90;p16"/>
           <p:cNvPicPr preferRelativeResize="0"/>
           <p:nvPr/>
         </p:nvPicPr>
@@ -22754,7 +25233,7 @@
       </p:pic>
       <p:sp>
         <p:nvSpPr>
-          <p:cNvPr id="88" name="Google Shape;88;p15"/>
+          <p:cNvPr id="91" name="Google Shape;91;p16"/>
           <p:cNvSpPr/>
           <p:nvPr/>
         </p:nvSpPr>
@@ -22818,7 +25297,7 @@
       </p:sp>
       <p:sp>
         <p:nvSpPr>
-          <p:cNvPr id="89" name="Google Shape;89;p15"/>
+          <p:cNvPr id="92" name="Google Shape;92;p16"/>
           <p:cNvSpPr txBox="1"/>
           <p:nvPr/>
         </p:nvSpPr>
@@ -22893,7 +25372,7 @@
   <p:cSld>
     <p:spTree>
       <p:nvGrpSpPr>
-        <p:cNvPr id="1" name="Shape 93"/>
+        <p:cNvPr id="1" name="Shape 96"/>
         <p:cNvGrpSpPr/>
         <p:nvPr/>
       </p:nvGrpSpPr>
@@ -22907,7 +25386,7 @@
       </p:grpSpPr>
       <p:sp>
         <p:nvSpPr>
-          <p:cNvPr id="94" name="Google Shape;94;p16"/>
+          <p:cNvPr id="97" name="Google Shape;97;p17"/>
           <p:cNvSpPr txBox="1"/>
           <p:nvPr/>
         </p:nvSpPr>
@@ -22967,7 +25446,7 @@
       </p:sp>
       <p:sp>
         <p:nvSpPr>
-          <p:cNvPr id="95" name="Google Shape;95;p16"/>
+          <p:cNvPr id="98" name="Google Shape;98;p17"/>
           <p:cNvSpPr txBox="1"/>
           <p:nvPr/>
         </p:nvSpPr>
@@ -23055,7 +25534,7 @@
       </p:sp>
       <p:pic>
         <p:nvPicPr>
-          <p:cNvPr id="96" name="Google Shape;96;p16"/>
+          <p:cNvPr id="99" name="Google Shape;99;p17"/>
           <p:cNvPicPr preferRelativeResize="0"/>
           <p:nvPr/>
         </p:nvPicPr>
@@ -23083,7 +25562,7 @@
       </p:pic>
       <p:sp>
         <p:nvSpPr>
-          <p:cNvPr id="97" name="Google Shape;97;p16"/>
+          <p:cNvPr id="100" name="Google Shape;100;p17"/>
           <p:cNvSpPr txBox="1"/>
           <p:nvPr/>
         </p:nvSpPr>
@@ -23199,7 +25678,7 @@
       </p:sp>
       <p:pic>
         <p:nvPicPr>
-          <p:cNvPr id="98" name="Google Shape;98;p16"/>
+          <p:cNvPr id="101" name="Google Shape;101;p17"/>
           <p:cNvPicPr preferRelativeResize="0"/>
           <p:nvPr/>
         </p:nvPicPr>
@@ -23232,7 +25711,7 @@
       </p:pic>
       <p:pic>
         <p:nvPicPr>
-          <p:cNvPr id="99" name="Google Shape;99;p16"/>
+          <p:cNvPr id="102" name="Google Shape;102;p17"/>
           <p:cNvPicPr preferRelativeResize="0"/>
           <p:nvPr/>
         </p:nvPicPr>
@@ -23264,7 +25743,7 @@
       </p:pic>
       <p:sp>
         <p:nvSpPr>
-          <p:cNvPr id="100" name="Google Shape;100;p16"/>
+          <p:cNvPr id="103" name="Google Shape;103;p17"/>
           <p:cNvSpPr txBox="1"/>
           <p:nvPr/>
         </p:nvSpPr>
@@ -23316,7 +25795,7 @@
       </p:sp>
       <p:pic>
         <p:nvPicPr>
-          <p:cNvPr id="101" name="Google Shape;101;p16"/>
+          <p:cNvPr id="104" name="Google Shape;104;p17"/>
           <p:cNvPicPr preferRelativeResize="0"/>
           <p:nvPr/>
         </p:nvPicPr>
@@ -23355,7 +25834,7 @@
       </p:pic>
       <p:pic>
         <p:nvPicPr>
-          <p:cNvPr id="102" name="Google Shape;102;p16"/>
+          <p:cNvPr id="105" name="Google Shape;105;p17"/>
           <p:cNvPicPr preferRelativeResize="0"/>
           <p:nvPr/>
         </p:nvPicPr>
@@ -23394,7 +25873,7 @@
       </p:pic>
       <p:sp>
         <p:nvSpPr>
-          <p:cNvPr id="103" name="Google Shape;103;p16"/>
+          <p:cNvPr id="106" name="Google Shape;106;p17"/>
           <p:cNvSpPr txBox="1"/>
           <p:nvPr/>
         </p:nvSpPr>
@@ -23457,7 +25936,7 @@
   <p:cSld>
     <p:spTree>
       <p:nvGrpSpPr>
-        <p:cNvPr id="1" name="Shape 107"/>
+        <p:cNvPr id="1" name="Shape 110"/>
         <p:cNvGrpSpPr/>
         <p:nvPr/>
       </p:nvGrpSpPr>
@@ -23471,7 +25950,7 @@
       </p:grpSpPr>
       <p:sp>
         <p:nvSpPr>
-          <p:cNvPr id="108" name="Google Shape;108;p17"/>
+          <p:cNvPr id="111" name="Google Shape;111;p18"/>
           <p:cNvSpPr txBox="1"/>
           <p:nvPr/>
         </p:nvSpPr>
@@ -23535,7 +26014,7 @@
       </p:sp>
       <p:sp>
         <p:nvSpPr>
-          <p:cNvPr id="109" name="Google Shape;109;p17"/>
+          <p:cNvPr id="112" name="Google Shape;112;p18"/>
           <p:cNvSpPr txBox="1"/>
           <p:nvPr/>
         </p:nvSpPr>
@@ -23995,7 +26474,7 @@
       </p:sp>
       <p:pic>
         <p:nvPicPr>
-          <p:cNvPr id="110" name="Google Shape;110;p17"/>
+          <p:cNvPr id="113" name="Google Shape;113;p18"/>
           <p:cNvPicPr preferRelativeResize="0"/>
           <p:nvPr/>
         </p:nvPicPr>
@@ -24028,7 +26507,7 @@
       </p:pic>
       <p:sp>
         <p:nvSpPr>
-          <p:cNvPr id="111" name="Google Shape;111;p17"/>
+          <p:cNvPr id="114" name="Google Shape;114;p18"/>
           <p:cNvSpPr txBox="1"/>
           <p:nvPr/>
         </p:nvSpPr>
@@ -24092,7 +26571,7 @@
       </p:sp>
       <p:pic>
         <p:nvPicPr>
-          <p:cNvPr id="112" name="Google Shape;112;p17"/>
+          <p:cNvPr id="115" name="Google Shape;115;p18"/>
           <p:cNvPicPr preferRelativeResize="0"/>
           <p:nvPr/>
         </p:nvPicPr>
@@ -24124,7 +26603,7 @@
       </p:pic>
       <p:sp>
         <p:nvSpPr>
-          <p:cNvPr id="113" name="Google Shape;113;p17"/>
+          <p:cNvPr id="116" name="Google Shape;116;p18"/>
           <p:cNvSpPr txBox="1"/>
           <p:nvPr/>
         </p:nvSpPr>
@@ -24246,7 +26725,7 @@
       </p:sp>
       <p:pic>
         <p:nvPicPr>
-          <p:cNvPr id="114" name="Google Shape;114;p17"/>
+          <p:cNvPr id="117" name="Google Shape;117;p18"/>
           <p:cNvPicPr preferRelativeResize="0"/>
           <p:nvPr/>
         </p:nvPicPr>
@@ -24279,7 +26758,7 @@
       </p:pic>
       <p:sp>
         <p:nvSpPr>
-          <p:cNvPr id="115" name="Google Shape;115;p17"/>
+          <p:cNvPr id="118" name="Google Shape;118;p18"/>
           <p:cNvSpPr txBox="1"/>
           <p:nvPr/>
         </p:nvSpPr>
@@ -24343,7 +26822,7 @@
       </p:sp>
       <p:sp>
         <p:nvSpPr>
-          <p:cNvPr id="116" name="Google Shape;116;p17"/>
+          <p:cNvPr id="119" name="Google Shape;119;p18"/>
           <p:cNvSpPr txBox="1"/>
           <p:nvPr/>
         </p:nvSpPr>
@@ -24517,7 +26996,7 @@
   <p:cSld>
     <p:spTree>
       <p:nvGrpSpPr>
-        <p:cNvPr id="1" name="Shape 120"/>
+        <p:cNvPr id="1" name="Shape 123"/>
         <p:cNvGrpSpPr/>
         <p:nvPr/>
       </p:nvGrpSpPr>
@@ -24531,7 +27010,7 @@
       </p:grpSpPr>
       <p:sp>
         <p:nvSpPr>
-          <p:cNvPr id="121" name="Google Shape;121;p18"/>
+          <p:cNvPr id="124" name="Google Shape;124;p19"/>
           <p:cNvSpPr txBox="1"/>
           <p:nvPr/>
         </p:nvSpPr>
@@ -24597,7 +27076,7 @@
       </p:sp>
       <p:sp>
         <p:nvSpPr>
-          <p:cNvPr id="122" name="Google Shape;122;p18"/>
+          <p:cNvPr id="125" name="Google Shape;125;p19"/>
           <p:cNvSpPr txBox="1"/>
           <p:nvPr/>
         </p:nvSpPr>
@@ -24992,7 +27471,7 @@
       </p:sp>
       <p:pic>
         <p:nvPicPr>
-          <p:cNvPr id="123" name="Google Shape;123;p18"/>
+          <p:cNvPr id="126" name="Google Shape;126;p19"/>
           <p:cNvPicPr preferRelativeResize="0"/>
           <p:nvPr/>
         </p:nvPicPr>
@@ -25025,7 +27504,7 @@
       </p:pic>
       <p:pic>
         <p:nvPicPr>
-          <p:cNvPr id="124" name="Google Shape;124;p18"/>
+          <p:cNvPr id="127" name="Google Shape;127;p19"/>
           <p:cNvPicPr preferRelativeResize="0"/>
           <p:nvPr/>
         </p:nvPicPr>
@@ -25058,7 +27537,7 @@
       </p:pic>
       <p:pic>
         <p:nvPicPr>
-          <p:cNvPr id="125" name="Google Shape;125;p18"/>
+          <p:cNvPr id="128" name="Google Shape;128;p19"/>
           <p:cNvPicPr preferRelativeResize="0"/>
           <p:nvPr/>
         </p:nvPicPr>
@@ -25085,7 +27564,7 @@
       </p:pic>
       <p:sp>
         <p:nvSpPr>
-          <p:cNvPr id="126" name="Google Shape;126;p18"/>
+          <p:cNvPr id="129" name="Google Shape;129;p19"/>
           <p:cNvSpPr txBox="1"/>
           <p:nvPr/>
         </p:nvSpPr>
@@ -25199,7 +27678,7 @@
       </p:sp>
       <p:sp>
         <p:nvSpPr>
-          <p:cNvPr id="127" name="Google Shape;127;p18"/>
+          <p:cNvPr id="130" name="Google Shape;130;p19"/>
           <p:cNvSpPr txBox="1"/>
           <p:nvPr/>
         </p:nvSpPr>
@@ -25324,7 +27803,7 @@
   <p:cSld>
     <p:spTree>
       <p:nvGrpSpPr>
-        <p:cNvPr id="1" name="Shape 131"/>
+        <p:cNvPr id="1" name="Shape 134"/>
         <p:cNvGrpSpPr/>
         <p:nvPr/>
       </p:nvGrpSpPr>
@@ -25338,7 +27817,7 @@
       </p:grpSpPr>
       <p:sp>
         <p:nvSpPr>
-          <p:cNvPr id="132" name="Google Shape;132;p19"/>
+          <p:cNvPr id="135" name="Google Shape;135;p20"/>
           <p:cNvSpPr txBox="1"/>
           <p:nvPr/>
         </p:nvSpPr>
@@ -25554,7 +28033,7 @@
       </p:sp>
       <p:sp>
         <p:nvSpPr>
-          <p:cNvPr id="133" name="Google Shape;133;p19"/>
+          <p:cNvPr id="136" name="Google Shape;136;p20"/>
           <p:cNvSpPr txBox="1"/>
           <p:nvPr/>
         </p:nvSpPr>
@@ -25612,7 +28091,7 @@
       </p:sp>
       <p:pic>
         <p:nvPicPr>
-          <p:cNvPr id="134" name="Google Shape;134;p19"/>
+          <p:cNvPr id="137" name="Google Shape;137;p20"/>
           <p:cNvPicPr preferRelativeResize="0"/>
           <p:nvPr/>
         </p:nvPicPr>
@@ -25650,20 +28129,20 @@
       </p:pic>
       <p:graphicFrame>
         <p:nvGraphicFramePr>
-          <p:cNvPr id="135" name="Google Shape;135;p19"/>
+          <p:cNvPr id="138" name="Google Shape;138;p20"/>
           <p:cNvGraphicFramePr/>
           <p:nvPr/>
         </p:nvGraphicFramePr>
         <p:xfrm>
           <a:off x="103100" y="1788900"/>
-          <a:ext cx="3990500" cy="3104729"/>
+          <a:ext cx="3000000" cy="3000000"/>
         </p:xfrm>
         <a:graphic>
           <a:graphicData uri="http://schemas.openxmlformats.org/drawingml/2006/table">
             <a:tbl>
               <a:tblPr>
                 <a:noFill/>
-                <a:tableStyleId>{70BF8F04-2F7E-4ED9-9760-67181E2B8811}</a:tableStyleId>
+                <a:tableStyleId>{7C222181-9F5D-47B4-B23C-B56B0E27C54C}</a:tableStyleId>
               </a:tblPr>
               <a:tblGrid>
                 <a:gridCol w="1217975">
@@ -31494,7 +33973,7 @@
       </p:graphicFrame>
       <p:sp>
         <p:nvSpPr>
-          <p:cNvPr id="136" name="Google Shape;136;p19"/>
+          <p:cNvPr id="139" name="Google Shape;139;p20"/>
           <p:cNvSpPr txBox="1"/>
           <p:nvPr/>
         </p:nvSpPr>
@@ -31642,7 +34121,7 @@
       </p:sp>
       <p:sp>
         <p:nvSpPr>
-          <p:cNvPr id="137" name="Google Shape;137;p19"/>
+          <p:cNvPr id="140" name="Google Shape;140;p20"/>
           <p:cNvSpPr txBox="1"/>
           <p:nvPr/>
         </p:nvSpPr>
@@ -31745,7 +34224,7 @@
       </p:sp>
       <p:sp>
         <p:nvSpPr>
-          <p:cNvPr id="138" name="Google Shape;138;p19"/>
+          <p:cNvPr id="141" name="Google Shape;141;p20"/>
           <p:cNvSpPr txBox="1"/>
           <p:nvPr/>
         </p:nvSpPr>
@@ -32110,7 +34589,7 @@
       </p:sp>
       <p:pic>
         <p:nvPicPr>
-          <p:cNvPr id="139" name="Google Shape;139;p19"/>
+          <p:cNvPr id="142" name="Google Shape;142;p20"/>
           <p:cNvPicPr preferRelativeResize="0"/>
           <p:nvPr/>
         </p:nvPicPr>
@@ -32142,7 +34621,7 @@
       </p:pic>
       <p:pic>
         <p:nvPicPr>
-          <p:cNvPr id="140" name="Google Shape;140;p19"/>
+          <p:cNvPr id="143" name="Google Shape;143;p20"/>
           <p:cNvPicPr preferRelativeResize="0"/>
           <p:nvPr/>
         </p:nvPicPr>
@@ -32186,7 +34665,7 @@
   <p:cSld>
     <p:spTree>
       <p:nvGrpSpPr>
-        <p:cNvPr id="1" name="Shape 144"/>
+        <p:cNvPr id="1" name="Shape 147"/>
         <p:cNvGrpSpPr/>
         <p:nvPr/>
       </p:nvGrpSpPr>
@@ -32200,7 +34679,7 @@
       </p:grpSpPr>
       <p:sp>
         <p:nvSpPr>
-          <p:cNvPr id="145" name="Google Shape;145;p20"/>
+          <p:cNvPr id="148" name="Google Shape;148;p21"/>
           <p:cNvSpPr txBox="1"/>
           <p:nvPr/>
         </p:nvSpPr>
@@ -32407,7 +34886,7 @@
       </p:sp>
       <p:pic>
         <p:nvPicPr>
-          <p:cNvPr id="146" name="Google Shape;146;p20"/>
+          <p:cNvPr id="149" name="Google Shape;149;p21"/>
           <p:cNvPicPr preferRelativeResize="0"/>
           <p:nvPr/>
         </p:nvPicPr>
@@ -32440,7 +34919,7 @@
       </p:pic>
       <p:sp>
         <p:nvSpPr>
-          <p:cNvPr id="147" name="Google Shape;147;p20"/>
+          <p:cNvPr id="150" name="Google Shape;150;p21"/>
           <p:cNvSpPr txBox="1"/>
           <p:nvPr/>
         </p:nvSpPr>
@@ -32635,7 +35114,7 @@
       </p:sp>
       <p:pic>
         <p:nvPicPr>
-          <p:cNvPr id="148" name="Google Shape;148;p20"/>
+          <p:cNvPr id="151" name="Google Shape;151;p21"/>
           <p:cNvPicPr preferRelativeResize="0"/>
           <p:nvPr/>
         </p:nvPicPr>
@@ -32668,7 +35147,7 @@
       </p:pic>
       <p:sp>
         <p:nvSpPr>
-          <p:cNvPr id="149" name="Google Shape;149;p20"/>
+          <p:cNvPr id="152" name="Google Shape;152;p21"/>
           <p:cNvSpPr txBox="1"/>
           <p:nvPr/>
         </p:nvSpPr>
@@ -32726,7 +35205,7 @@
       </p:sp>
       <p:pic>
         <p:nvPicPr>
-          <p:cNvPr id="150" name="Google Shape;150;p20"/>
+          <p:cNvPr id="153" name="Google Shape;153;p21"/>
           <p:cNvPicPr preferRelativeResize="0"/>
           <p:nvPr/>
         </p:nvPicPr>
@@ -32764,7 +35243,7 @@
       </p:pic>
       <p:sp>
         <p:nvSpPr>
-          <p:cNvPr id="151" name="Google Shape;151;p20"/>
+          <p:cNvPr id="154" name="Google Shape;154;p21"/>
           <p:cNvSpPr txBox="1"/>
           <p:nvPr/>
         </p:nvSpPr>
@@ -32869,7 +35348,7 @@
       </p:sp>
       <p:sp>
         <p:nvSpPr>
-          <p:cNvPr id="152" name="Google Shape;152;p20"/>
+          <p:cNvPr id="155" name="Google Shape;155;p21"/>
           <p:cNvSpPr txBox="1"/>
           <p:nvPr/>
         </p:nvSpPr>
@@ -33093,7 +35572,7 @@
       </p:sp>
       <p:sp>
         <p:nvSpPr>
-          <p:cNvPr id="153" name="Google Shape;153;p20"/>
+          <p:cNvPr id="156" name="Google Shape;156;p21"/>
           <p:cNvSpPr txBox="1"/>
           <p:nvPr/>
         </p:nvSpPr>
@@ -33171,7 +35650,7 @@
       </p:sp>
       <p:sp>
         <p:nvSpPr>
-          <p:cNvPr id="154" name="Google Shape;154;p20"/>
+          <p:cNvPr id="157" name="Google Shape;157;p21"/>
           <p:cNvSpPr txBox="1"/>
           <p:nvPr/>
         </p:nvSpPr>
@@ -33322,7 +35801,7 @@
   <p:cSld>
     <p:spTree>
       <p:nvGrpSpPr>
-        <p:cNvPr id="1" name="Shape 158"/>
+        <p:cNvPr id="1" name="Shape 161"/>
         <p:cNvGrpSpPr/>
         <p:nvPr/>
       </p:nvGrpSpPr>
@@ -33336,7 +35815,7 @@
       </p:grpSpPr>
       <p:sp>
         <p:nvSpPr>
-          <p:cNvPr id="159" name="Google Shape;159;p21"/>
+          <p:cNvPr id="162" name="Google Shape;162;p22"/>
           <p:cNvSpPr txBox="1"/>
           <p:nvPr/>
         </p:nvSpPr>
@@ -33499,7 +35978,7 @@
       </p:sp>
       <p:sp>
         <p:nvSpPr>
-          <p:cNvPr id="160" name="Google Shape;160;p21"/>
+          <p:cNvPr id="163" name="Google Shape;163;p22"/>
           <p:cNvSpPr txBox="1"/>
           <p:nvPr/>
         </p:nvSpPr>
@@ -33557,7 +36036,7 @@
       </p:sp>
       <p:sp>
         <p:nvSpPr>
-          <p:cNvPr id="161" name="Google Shape;161;p21"/>
+          <p:cNvPr id="164" name="Google Shape;164;p22"/>
           <p:cNvSpPr txBox="1"/>
           <p:nvPr/>
         </p:nvSpPr>
@@ -33728,7 +36207,7 @@
       </p:sp>
       <p:sp>
         <p:nvSpPr>
-          <p:cNvPr id="162" name="Google Shape;162;p21"/>
+          <p:cNvPr id="165" name="Google Shape;165;p22"/>
           <p:cNvSpPr txBox="1"/>
           <p:nvPr/>
         </p:nvSpPr>
@@ -33809,7 +36288,7 @@
       </p:sp>
       <p:pic>
         <p:nvPicPr>
-          <p:cNvPr id="163" name="Google Shape;163;p21"/>
+          <p:cNvPr id="166" name="Google Shape;166;p22"/>
           <p:cNvPicPr preferRelativeResize="0"/>
           <p:nvPr/>
         </p:nvPicPr>
@@ -33848,7 +36327,7 @@
       </p:pic>
       <p:sp>
         <p:nvSpPr>
-          <p:cNvPr id="164" name="Google Shape;164;p21"/>
+          <p:cNvPr id="167" name="Google Shape;167;p22"/>
           <p:cNvSpPr txBox="1"/>
           <p:nvPr/>
         </p:nvSpPr>
@@ -34033,7 +36512,7 @@
       </p:sp>
       <p:pic>
         <p:nvPicPr>
-          <p:cNvPr id="165" name="Google Shape;165;p21"/>
+          <p:cNvPr id="168" name="Google Shape;168;p22"/>
           <p:cNvPicPr preferRelativeResize="0"/>
           <p:nvPr/>
         </p:nvPicPr>
@@ -34072,7 +36551,7 @@
       </p:pic>
       <p:sp>
         <p:nvSpPr>
-          <p:cNvPr id="166" name="Google Shape;166;p21"/>
+          <p:cNvPr id="169" name="Google Shape;169;p22"/>
           <p:cNvSpPr txBox="1"/>
           <p:nvPr/>
         </p:nvSpPr>
@@ -34197,7 +36676,7 @@
       </p:sp>
       <p:pic>
         <p:nvPicPr>
-          <p:cNvPr id="167" name="Google Shape;167;p21"/>
+          <p:cNvPr id="170" name="Google Shape;170;p22"/>
           <p:cNvPicPr preferRelativeResize="0"/>
           <p:nvPr/>
         </p:nvPicPr>
@@ -34235,7 +36714,7 @@
       </p:pic>
       <p:sp>
         <p:nvSpPr>
-          <p:cNvPr id="168" name="Google Shape;168;p21"/>
+          <p:cNvPr id="171" name="Google Shape;171;p22"/>
           <p:cNvSpPr txBox="1"/>
           <p:nvPr/>
         </p:nvSpPr>
@@ -34363,7 +36842,7 @@
       </p:sp>
       <p:pic>
         <p:nvPicPr>
-          <p:cNvPr id="169" name="Google Shape;169;p21"/>
+          <p:cNvPr id="172" name="Google Shape;172;p22"/>
           <p:cNvPicPr preferRelativeResize="0"/>
           <p:nvPr/>
         </p:nvPicPr>
